--- a/presentations/mid_term_202606/04_slides_draft/中間発表_スライド_v4.pptx
+++ b/presentations/mid_term_202606/04_slides_draft/中間発表_スライド_v4.pptx
@@ -5,22 +5,25 @@
     <p:sldMasterId id="2147483648" r:id="rId1"/>
   </p:sldMasterIdLst>
   <p:notesMasterIdLst>
-    <p:notesMasterId r:id="rId16"/>
+    <p:notesMasterId r:id="rId18"/>
   </p:notesMasterIdLst>
   <p:sldIdLst>
     <p:sldId id="425" r:id="rId2"/>
     <p:sldId id="426" r:id="rId3"/>
     <p:sldId id="388" r:id="rId4"/>
     <p:sldId id="427" r:id="rId5"/>
-    <p:sldId id="438" r:id="rId23"/>
-    <p:sldId id="439" r:id="rId24"/>
-    <p:sldId id="440" r:id="rId25"/>
-    <p:sldId id="441" r:id="rId26"/>
-    <p:sldId id="442" r:id="rId27"/>
-    <p:sldId id="443" r:id="rId28"/>
-    <p:sldId id="444" r:id="rId29"/>
-    <p:sldId id="445" r:id="rId30"/>
-    <p:sldId id="446" r:id="rId31"/>
+    <p:sldId id="438" r:id="rId6"/>
+    <p:sldId id="439" r:id="rId7"/>
+    <p:sldId id="441" r:id="rId8"/>
+    <p:sldId id="442" r:id="rId9"/>
+    <p:sldId id="440" r:id="rId10"/>
+    <p:sldId id="447" r:id="rId11"/>
+    <p:sldId id="443" r:id="rId12"/>
+    <p:sldId id="448" r:id="rId13"/>
+    <p:sldId id="444" r:id="rId14"/>
+    <p:sldId id="445" r:id="rId15"/>
+    <p:sldId id="446" r:id="rId16"/>
+    <p:sldId id="413" r:id="rId17"/>
   </p:sldIdLst>
   <p:sldSz cx="9906000" cy="6858000" type="A4"/>
   <p:notesSz cx="6858000" cy="9874250"/>
@@ -297,7 +300,7 @@
       <p15:notesGuideLst xmlns:p15="http://schemas.microsoft.com/office/powerpoint/2012/main"/>
     </p:ext>
     <p:ext uri="GoogleSlidesCustomDataVersion2">
-      <go:slidesCustomData xmlns="" xmlns:mc="http://schemas.openxmlformats.org/markup-compatibility/2006" xmlns:mv="urn:schemas-microsoft-com:mac:vml" xmlns:c="http://schemas.openxmlformats.org/drawingml/2006/chart" xmlns:dgm="http://schemas.openxmlformats.org/drawingml/2006/diagram" xmlns:o="urn:schemas-microsoft-com:office:office" xmlns:v="urn:schemas-microsoft-com:vml" xmlns:pvml="urn:schemas-microsoft-com:office:powerpoint" xmlns:com="http://schemas.openxmlformats.org/drawingml/2006/compatibility" xmlns:p14="http://schemas.microsoft.com/office/powerpoint/2010/main" xmlns:p15="http://schemas.microsoft.com/office/powerpoint/2012/main" xmlns:ahyp="http://schemas.microsoft.com/office/drawing/2018/hyperlinkcolor" xmlns:go="http://customooxmlschemas.google.com/" r:id="rId51" roundtripDataSignature="AMtx7mhGZ7uZ5vFhmAr7D05oSO2hGt9NUg=="/>
+      <go:slidesCustomData xmlns:go="http://customooxmlschemas.google.com/" xmlns:ahyp="http://schemas.microsoft.com/office/drawing/2018/hyperlinkcolor" xmlns:p15="http://schemas.microsoft.com/office/powerpoint/2012/main" xmlns:p14="http://schemas.microsoft.com/office/powerpoint/2010/main" xmlns:com="http://schemas.openxmlformats.org/drawingml/2006/compatibility" xmlns:pvml="urn:schemas-microsoft-com:office:powerpoint" xmlns:v="urn:schemas-microsoft-com:vml" xmlns:o="urn:schemas-microsoft-com:office:office" xmlns:dgm="http://schemas.openxmlformats.org/drawingml/2006/diagram" xmlns:c="http://schemas.openxmlformats.org/drawingml/2006/chart" xmlns:mv="urn:schemas-microsoft-com:mac:vml" xmlns:mc="http://schemas.openxmlformats.org/markup-compatibility/2006" xmlns="" r:id="rId51" roundtripDataSignature="AMtx7mhGZ7uZ5vFhmAr7D05oSO2hGt9NUg=="/>
     </p:ext>
   </p:extLst>
 </p:presentation>
@@ -2298,6 +2301,240 @@
     <p:extLst>
       <p:ext uri="{BB962C8B-B14F-4D97-AF65-F5344CB8AC3E}">
         <p14:creationId xmlns:p14="http://schemas.microsoft.com/office/powerpoint/2010/main" val="3943812891"/>
+      </p:ext>
+    </p:extLst>
+  </p:cSld>
+  <p:clrMapOvr>
+    <a:masterClrMapping/>
+  </p:clrMapOvr>
+</p:notes>
+</file>
+
+<file path=ppt/notesSlides/notesSlide3.xml><?xml version="1.0" encoding="utf-8"?>
+<p:notes xmlns:a="http://schemas.openxmlformats.org/drawingml/2006/main" xmlns:r="http://schemas.openxmlformats.org/officeDocument/2006/relationships" xmlns:p="http://schemas.openxmlformats.org/presentationml/2006/main">
+  <p:cSld>
+    <p:spTree>
+      <p:nvGrpSpPr>
+        <p:cNvPr id="1" name=""/>
+        <p:cNvGrpSpPr/>
+        <p:nvPr/>
+      </p:nvGrpSpPr>
+      <p:grpSpPr>
+        <a:xfrm>
+          <a:off x="0" y="0"/>
+          <a:ext cx="0" cy="0"/>
+          <a:chOff x="0" y="0"/>
+          <a:chExt cx="0" cy="0"/>
+        </a:xfrm>
+      </p:grpSpPr>
+      <p:sp>
+        <p:nvSpPr>
+          <p:cNvPr id="2" name="スライド イメージ プレースホルダー 1"/>
+          <p:cNvSpPr>
+            <a:spLocks noGrp="1" noRot="1" noChangeAspect="1"/>
+          </p:cNvSpPr>
+          <p:nvPr>
+            <p:ph type="sldImg"/>
+          </p:nvPr>
+        </p:nvSpPr>
+        <p:spPr/>
+      </p:sp>
+      <p:sp>
+        <p:nvSpPr>
+          <p:cNvPr id="3" name="ノート プレースホルダー 2"/>
+          <p:cNvSpPr>
+            <a:spLocks noGrp="1"/>
+          </p:cNvSpPr>
+          <p:nvPr>
+            <p:ph type="body" idx="1"/>
+          </p:nvPr>
+        </p:nvSpPr>
+        <p:spPr/>
+        <p:txBody>
+          <a:bodyPr/>
+          <a:lstStyle/>
+          <a:p>
+            <a:endParaRPr kumimoji="1" lang="ja-JP" altLang="en-US" dirty="0"/>
+          </a:p>
+        </p:txBody>
+      </p:sp>
+      <p:sp>
+        <p:nvSpPr>
+          <p:cNvPr id="4" name="スライド番号プレースホルダー 3"/>
+          <p:cNvSpPr>
+            <a:spLocks noGrp="1"/>
+          </p:cNvSpPr>
+          <p:nvPr>
+            <p:ph type="sldNum" idx="12"/>
+          </p:nvPr>
+        </p:nvSpPr>
+        <p:spPr/>
+        <p:txBody>
+          <a:bodyPr/>
+          <a:lstStyle/>
+          <a:p>
+            <a:pPr marL="0" marR="0" lvl="0" indent="0" algn="r" rtl="0">
+              <a:lnSpc>
+                <a:spcPct val="100000"/>
+              </a:lnSpc>
+              <a:spcBef>
+                <a:spcPts val="0"/>
+              </a:spcBef>
+              <a:spcAft>
+                <a:spcPts val="0"/>
+              </a:spcAft>
+              <a:buClr>
+                <a:srgbClr val="000000"/>
+              </a:buClr>
+              <a:buSzPts val="1200"/>
+              <a:buFont typeface="Arial"/>
+              <a:buNone/>
+            </a:pPr>
+            <a:fld id="{00000000-1234-1234-1234-123412341234}" type="slidenum">
+              <a:rPr lang="en-US" altLang="ja-JP" sz="1200" b="0" i="0" u="none" strike="noStrike" cap="none" smtClean="0">
+                <a:solidFill>
+                  <a:schemeClr val="dk1"/>
+                </a:solidFill>
+                <a:latin typeface="Arial"/>
+                <a:ea typeface="Arial"/>
+                <a:cs typeface="Arial"/>
+                <a:sym typeface="Arial"/>
+              </a:rPr>
+              <a:t>6</a:t>
+            </a:fld>
+            <a:endParaRPr lang="ja-JP" altLang="en-US" sz="1200" b="0" i="0" u="none" strike="noStrike" cap="none" dirty="0">
+              <a:solidFill>
+                <a:schemeClr val="dk1"/>
+              </a:solidFill>
+              <a:latin typeface="Arial"/>
+              <a:ea typeface="Arial"/>
+              <a:cs typeface="Arial"/>
+              <a:sym typeface="Arial"/>
+            </a:endParaRPr>
+          </a:p>
+        </p:txBody>
+      </p:sp>
+    </p:spTree>
+    <p:extLst>
+      <p:ext uri="{BB962C8B-B14F-4D97-AF65-F5344CB8AC3E}">
+        <p14:creationId xmlns:p14="http://schemas.microsoft.com/office/powerpoint/2010/main" val="3458616797"/>
+      </p:ext>
+    </p:extLst>
+  </p:cSld>
+  <p:clrMapOvr>
+    <a:masterClrMapping/>
+  </p:clrMapOvr>
+</p:notes>
+</file>
+
+<file path=ppt/notesSlides/notesSlide4.xml><?xml version="1.0" encoding="utf-8"?>
+<p:notes xmlns:a="http://schemas.openxmlformats.org/drawingml/2006/main" xmlns:r="http://schemas.openxmlformats.org/officeDocument/2006/relationships" xmlns:p="http://schemas.openxmlformats.org/presentationml/2006/main">
+  <p:cSld>
+    <p:spTree>
+      <p:nvGrpSpPr>
+        <p:cNvPr id="1" name=""/>
+        <p:cNvGrpSpPr/>
+        <p:nvPr/>
+      </p:nvGrpSpPr>
+      <p:grpSpPr>
+        <a:xfrm>
+          <a:off x="0" y="0"/>
+          <a:ext cx="0" cy="0"/>
+          <a:chOff x="0" y="0"/>
+          <a:chExt cx="0" cy="0"/>
+        </a:xfrm>
+      </p:grpSpPr>
+      <p:sp>
+        <p:nvSpPr>
+          <p:cNvPr id="2" name="スライド イメージ プレースホルダー 1"/>
+          <p:cNvSpPr>
+            <a:spLocks noGrp="1" noRot="1" noChangeAspect="1"/>
+          </p:cNvSpPr>
+          <p:nvPr>
+            <p:ph type="sldImg"/>
+          </p:nvPr>
+        </p:nvSpPr>
+        <p:spPr/>
+      </p:sp>
+      <p:sp>
+        <p:nvSpPr>
+          <p:cNvPr id="3" name="ノート プレースホルダー 2"/>
+          <p:cNvSpPr>
+            <a:spLocks noGrp="1"/>
+          </p:cNvSpPr>
+          <p:nvPr>
+            <p:ph type="body" idx="1"/>
+          </p:nvPr>
+        </p:nvSpPr>
+        <p:spPr/>
+        <p:txBody>
+          <a:bodyPr/>
+          <a:lstStyle/>
+          <a:p>
+            <a:endParaRPr kumimoji="1" lang="ja-JP" altLang="en-US"/>
+          </a:p>
+        </p:txBody>
+      </p:sp>
+      <p:sp>
+        <p:nvSpPr>
+          <p:cNvPr id="4" name="スライド番号プレースホルダー 3"/>
+          <p:cNvSpPr>
+            <a:spLocks noGrp="1"/>
+          </p:cNvSpPr>
+          <p:nvPr>
+            <p:ph type="sldNum" idx="12"/>
+          </p:nvPr>
+        </p:nvSpPr>
+        <p:spPr/>
+        <p:txBody>
+          <a:bodyPr/>
+          <a:lstStyle/>
+          <a:p>
+            <a:pPr marL="0" marR="0" lvl="0" indent="0" algn="r" rtl="0">
+              <a:lnSpc>
+                <a:spcPct val="100000"/>
+              </a:lnSpc>
+              <a:spcBef>
+                <a:spcPts val="0"/>
+              </a:spcBef>
+              <a:spcAft>
+                <a:spcPts val="0"/>
+              </a:spcAft>
+              <a:buClr>
+                <a:srgbClr val="000000"/>
+              </a:buClr>
+              <a:buSzPts val="1200"/>
+              <a:buFont typeface="Arial"/>
+              <a:buNone/>
+            </a:pPr>
+            <a:fld id="{00000000-1234-1234-1234-123412341234}" type="slidenum">
+              <a:rPr lang="en-US" altLang="ja-JP" sz="1200" b="0" i="0" u="none" strike="noStrike" cap="none" smtClean="0">
+                <a:solidFill>
+                  <a:schemeClr val="dk1"/>
+                </a:solidFill>
+                <a:latin typeface="Arial"/>
+                <a:ea typeface="Arial"/>
+                <a:cs typeface="Arial"/>
+                <a:sym typeface="Arial"/>
+              </a:rPr>
+              <a:t>15</a:t>
+            </a:fld>
+            <a:endParaRPr lang="ja-JP" altLang="en-US" sz="1200" b="0" i="0" u="none" strike="noStrike" cap="none" dirty="0">
+              <a:solidFill>
+                <a:schemeClr val="dk1"/>
+              </a:solidFill>
+              <a:latin typeface="Arial"/>
+              <a:ea typeface="Arial"/>
+              <a:cs typeface="Arial"/>
+              <a:sym typeface="Arial"/>
+            </a:endParaRPr>
+          </a:p>
+        </p:txBody>
+      </p:sp>
+    </p:spTree>
+    <p:extLst>
+      <p:ext uri="{BB962C8B-B14F-4D97-AF65-F5344CB8AC3E}">
+        <p14:creationId xmlns:p14="http://schemas.microsoft.com/office/powerpoint/2010/main" val="1183329069"/>
       </p:ext>
     </p:extLst>
   </p:cSld>
@@ -6525,8 +6762,263 @@
 </p:sld>
 </file>
 
-<file path=ppt/slides/slide15.xml><?xml version="1.0" encoding="utf-8"?>
-<p:sld xmlns:a="http://schemas.openxmlformats.org/drawingml/2006/main" xmlns:p="http://schemas.openxmlformats.org/presentationml/2006/main" xmlns:r="http://schemas.openxmlformats.org/officeDocument/2006/relationships">
+<file path=ppt/slides/slide10.xml><?xml version="1.0" encoding="utf-8"?>
+<p:sld xmlns:a="http://schemas.openxmlformats.org/drawingml/2006/main" xmlns:r="http://schemas.openxmlformats.org/officeDocument/2006/relationships" xmlns:p="http://schemas.openxmlformats.org/presentationml/2006/main">
+  <p:cSld>
+    <p:spTree>
+      <p:nvGrpSpPr>
+        <p:cNvPr id="1" name="">
+          <a:extLst>
+            <a:ext uri="{FF2B5EF4-FFF2-40B4-BE49-F238E27FC236}">
+              <a16:creationId xmlns:a16="http://schemas.microsoft.com/office/drawing/2014/main" id="{10EAB907-215E-803C-0B72-6B8E64172F79}"/>
+            </a:ext>
+          </a:extLst>
+        </p:cNvPr>
+        <p:cNvGrpSpPr/>
+        <p:nvPr/>
+      </p:nvGrpSpPr>
+      <p:grpSpPr>
+        <a:xfrm>
+          <a:off x="0" y="0"/>
+          <a:ext cx="0" cy="0"/>
+          <a:chOff x="0" y="0"/>
+          <a:chExt cx="0" cy="0"/>
+        </a:xfrm>
+      </p:grpSpPr>
+      <p:sp>
+        <p:nvSpPr>
+          <p:cNvPr id="2" name="Title 1">
+            <a:extLst>
+              <a:ext uri="{FF2B5EF4-FFF2-40B4-BE49-F238E27FC236}">
+                <a16:creationId xmlns:a16="http://schemas.microsoft.com/office/drawing/2014/main" id="{B88CD6EF-6374-2AC3-8489-DF262FB5C578}"/>
+              </a:ext>
+            </a:extLst>
+          </p:cNvPr>
+          <p:cNvSpPr>
+            <a:spLocks noGrp="1"/>
+          </p:cNvSpPr>
+          <p:nvPr>
+            <p:ph type="title"/>
+          </p:nvPr>
+        </p:nvSpPr>
+        <p:spPr>
+          <a:xfrm>
+            <a:off x="228600" y="237744"/>
+            <a:ext cx="9473184" cy="969264"/>
+          </a:xfrm>
+        </p:spPr>
+        <p:txBody>
+          <a:bodyPr/>
+          <a:lstStyle/>
+          <a:p>
+            <a:pPr>
+              <a:spcBef>
+                <a:spcPts val="0"/>
+              </a:spcBef>
+              <a:spcAft>
+                <a:spcPts val="0"/>
+              </a:spcAft>
+            </a:pPr>
+            <a:r>
+              <a:rPr sz="1400" b="1" dirty="0">
+                <a:solidFill>
+                  <a:srgbClr val="000F78"/>
+                </a:solidFill>
+                <a:latin typeface="Arial"/>
+                <a:ea typeface="Arial"/>
+              </a:rPr>
+              <a:t>04. </a:t>
+            </a:r>
+            <a:r>
+              <a:rPr sz="1400" b="1" dirty="0" err="1">
+                <a:solidFill>
+                  <a:srgbClr val="000F78"/>
+                </a:solidFill>
+                <a:latin typeface="Arial"/>
+                <a:ea typeface="Arial"/>
+              </a:rPr>
+              <a:t>研究方法</a:t>
+            </a:r>
+            <a:endParaRPr sz="1400" b="1" dirty="0">
+              <a:solidFill>
+                <a:srgbClr val="000F78"/>
+              </a:solidFill>
+              <a:latin typeface="Arial"/>
+              <a:ea typeface="Arial"/>
+            </a:endParaRPr>
+          </a:p>
+          <a:p>
+            <a:pPr>
+              <a:spcBef>
+                <a:spcPts val="0"/>
+              </a:spcBef>
+              <a:spcAft>
+                <a:spcPts val="0"/>
+              </a:spcAft>
+            </a:pPr>
+            <a:r>
+              <a:rPr b="1" dirty="0">
+                <a:solidFill>
+                  <a:srgbClr val="000F78"/>
+                </a:solidFill>
+                <a:latin typeface="Arial"/>
+                <a:ea typeface="Arial"/>
+              </a:rPr>
+              <a:t>4-</a:t>
+            </a:r>
+            <a:r>
+              <a:rPr lang="en-US" b="1" dirty="0">
+                <a:solidFill>
+                  <a:srgbClr val="000F78"/>
+                </a:solidFill>
+                <a:latin typeface="Arial"/>
+                <a:ea typeface="Arial"/>
+              </a:rPr>
+              <a:t>4</a:t>
+            </a:r>
+            <a:r>
+              <a:rPr b="1" dirty="0">
+                <a:solidFill>
+                  <a:srgbClr val="000F78"/>
+                </a:solidFill>
+                <a:latin typeface="Arial"/>
+                <a:ea typeface="Arial"/>
+              </a:rPr>
+              <a:t>. </a:t>
+            </a:r>
+            <a:r>
+              <a:rPr lang="ja-JP" altLang="en-US" b="1" dirty="0">
+                <a:solidFill>
+                  <a:srgbClr val="000F78"/>
+                </a:solidFill>
+              </a:rPr>
+              <a:t>状態方程式による制御</a:t>
+            </a:r>
+            <a:endParaRPr b="1" dirty="0">
+              <a:solidFill>
+                <a:srgbClr val="000F78"/>
+              </a:solidFill>
+              <a:latin typeface="Arial"/>
+              <a:ea typeface="Arial"/>
+            </a:endParaRPr>
+          </a:p>
+        </p:txBody>
+      </p:sp>
+      <p:sp>
+        <p:nvSpPr>
+          <p:cNvPr id="3" name="Text Placeholder 2">
+            <a:extLst>
+              <a:ext uri="{FF2B5EF4-FFF2-40B4-BE49-F238E27FC236}">
+                <a16:creationId xmlns:a16="http://schemas.microsoft.com/office/drawing/2014/main" id="{74F06936-9F10-92B8-038E-96B52E85CF1C}"/>
+              </a:ext>
+            </a:extLst>
+          </p:cNvPr>
+          <p:cNvSpPr>
+            <a:spLocks noGrp="1"/>
+          </p:cNvSpPr>
+          <p:nvPr>
+            <p:ph type="body" idx="1"/>
+          </p:nvPr>
+        </p:nvSpPr>
+        <p:spPr>
+          <a:xfrm>
+            <a:off x="274320" y="932688"/>
+            <a:ext cx="9326880" cy="1771875"/>
+          </a:xfrm>
+        </p:spPr>
+        <p:txBody>
+          <a:bodyPr wrap="square"/>
+          <a:lstStyle/>
+          <a:p>
+            <a:r>
+              <a:rPr lang="en-US" altLang="ja-JP" dirty="0">
+                <a:latin typeface="Arial"/>
+                <a:ea typeface="Arial"/>
+              </a:rPr>
+              <a:t>XX</a:t>
+            </a:r>
+            <a:endParaRPr dirty="0">
+              <a:latin typeface="Arial"/>
+              <a:ea typeface="Arial"/>
+            </a:endParaRPr>
+          </a:p>
+        </p:txBody>
+      </p:sp>
+      <p:pic>
+        <p:nvPicPr>
+          <p:cNvPr id="5" name="図 4" descr="The image depicts a velocity-time graph showing the movement of two vehicles, with Vehicle 1 moving at a constant speed and Vehicle 2 accelerating over time.&#10;&#10;AI 生成コンテンツは誤りを含む可能性があります。">
+            <a:extLst>
+              <a:ext uri="{FF2B5EF4-FFF2-40B4-BE49-F238E27FC236}">
+                <a16:creationId xmlns:a16="http://schemas.microsoft.com/office/drawing/2014/main" id="{57973489-C92E-DF72-0EEA-B48A6A5CA5E7}"/>
+              </a:ext>
+            </a:extLst>
+          </p:cNvPr>
+          <p:cNvPicPr>
+            <a:picLocks noChangeAspect="1"/>
+          </p:cNvPicPr>
+          <p:nvPr/>
+        </p:nvPicPr>
+        <p:blipFill>
+          <a:blip r:embed="rId2"/>
+          <a:stretch>
+            <a:fillRect/>
+          </a:stretch>
+        </p:blipFill>
+        <p:spPr>
+          <a:xfrm>
+            <a:off x="5344669" y="1743204"/>
+            <a:ext cx="3626614" cy="2410234"/>
+          </a:xfrm>
+          <a:prstGeom prst="rect">
+            <a:avLst/>
+          </a:prstGeom>
+        </p:spPr>
+      </p:pic>
+      <p:pic>
+        <p:nvPicPr>
+          <p:cNvPr id="9" name="図 8" descr="The diagram shows the positions of two vehicles, one leading and one following, over time, with their positions marked in meters.&#10;&#10;AI 生成コンテンツは誤りを含む可能性があります。">
+            <a:extLst>
+              <a:ext uri="{FF2B5EF4-FFF2-40B4-BE49-F238E27FC236}">
+                <a16:creationId xmlns:a16="http://schemas.microsoft.com/office/drawing/2014/main" id="{25F5D005-1374-A746-DCE1-A10DB5B693FD}"/>
+              </a:ext>
+            </a:extLst>
+          </p:cNvPr>
+          <p:cNvPicPr>
+            <a:picLocks noChangeAspect="1"/>
+          </p:cNvPicPr>
+          <p:nvPr/>
+        </p:nvPicPr>
+        <p:blipFill>
+          <a:blip r:embed="rId3"/>
+          <a:stretch>
+            <a:fillRect/>
+          </a:stretch>
+        </p:blipFill>
+        <p:spPr>
+          <a:xfrm>
+            <a:off x="5292090" y="4153438"/>
+            <a:ext cx="3633473" cy="2410234"/>
+          </a:xfrm>
+          <a:prstGeom prst="rect">
+            <a:avLst/>
+          </a:prstGeom>
+        </p:spPr>
+      </p:pic>
+    </p:spTree>
+    <p:extLst>
+      <p:ext uri="{BB962C8B-B14F-4D97-AF65-F5344CB8AC3E}">
+        <p14:creationId xmlns:p14="http://schemas.microsoft.com/office/powerpoint/2010/main" val="912564952"/>
+      </p:ext>
+    </p:extLst>
+  </p:cSld>
+  <p:clrMapOvr>
+    <a:masterClrMapping/>
+  </p:clrMapOvr>
+</p:sld>
+</file>
+
+<file path=ppt/slides/slide11.xml><?xml version="1.0" encoding="utf-8"?>
+<p:sld xmlns:a="http://schemas.openxmlformats.org/drawingml/2006/main" xmlns:r="http://schemas.openxmlformats.org/officeDocument/2006/relationships" xmlns:p="http://schemas.openxmlformats.org/presentationml/2006/main">
   <p:cSld>
     <p:spTree>
       <p:nvGrpSpPr>
@@ -6534,7 +7026,14 @@
         <p:cNvGrpSpPr/>
         <p:nvPr/>
       </p:nvGrpSpPr>
-      <p:grpSpPr/>
+      <p:grpSpPr>
+        <a:xfrm>
+          <a:off x="0" y="0"/>
+          <a:ext cx="0" cy="0"/>
+          <a:chOff x="0" y="0"/>
+          <a:chExt cx="0" cy="0"/>
+        </a:xfrm>
+      </p:grpSpPr>
       <p:sp>
         <p:nvSpPr>
           <p:cNvPr id="2" name="Title 1"/>
@@ -6564,15 +7063,89 @@
               </a:spcAft>
             </a:pPr>
             <a:r>
-              <a:rPr b="1">
+              <a:rPr sz="1400" b="1" dirty="0">
                 <a:solidFill>
                   <a:srgbClr val="000F78"/>
                 </a:solidFill>
                 <a:latin typeface="Arial"/>
                 <a:ea typeface="Arial"/>
               </a:rPr>
-              <a:t>02. 本研究の目標</a:t>
-            </a:r>
+              <a:t>04. </a:t>
+            </a:r>
+            <a:r>
+              <a:rPr sz="1400" b="1" dirty="0" err="1">
+                <a:solidFill>
+                  <a:srgbClr val="000F78"/>
+                </a:solidFill>
+                <a:latin typeface="Arial"/>
+                <a:ea typeface="Arial"/>
+              </a:rPr>
+              <a:t>研究方法</a:t>
+            </a:r>
+            <a:endParaRPr sz="1400" b="1" dirty="0">
+              <a:solidFill>
+                <a:srgbClr val="000F78"/>
+              </a:solidFill>
+              <a:latin typeface="Arial"/>
+              <a:ea typeface="Arial"/>
+            </a:endParaRPr>
+          </a:p>
+          <a:p>
+            <a:pPr>
+              <a:spcBef>
+                <a:spcPts val="0"/>
+              </a:spcBef>
+              <a:spcAft>
+                <a:spcPts val="0"/>
+              </a:spcAft>
+            </a:pPr>
+            <a:r>
+              <a:rPr b="1" dirty="0">
+                <a:solidFill>
+                  <a:srgbClr val="000F78"/>
+                </a:solidFill>
+                <a:latin typeface="Arial"/>
+                <a:ea typeface="Arial"/>
+              </a:rPr>
+              <a:t>4-</a:t>
+            </a:r>
+            <a:r>
+              <a:rPr lang="en-US" b="1" dirty="0">
+                <a:solidFill>
+                  <a:srgbClr val="000F78"/>
+                </a:solidFill>
+                <a:latin typeface="Arial"/>
+                <a:ea typeface="Arial"/>
+              </a:rPr>
+              <a:t>5</a:t>
+            </a:r>
+            <a:r>
+              <a:rPr b="1" dirty="0">
+                <a:solidFill>
+                  <a:srgbClr val="000F78"/>
+                </a:solidFill>
+                <a:latin typeface="Arial"/>
+                <a:ea typeface="Arial"/>
+              </a:rPr>
+              <a:t>. </a:t>
+            </a:r>
+            <a:r>
+              <a:rPr b="1" dirty="0" err="1">
+                <a:solidFill>
+                  <a:srgbClr val="000F78"/>
+                </a:solidFill>
+                <a:latin typeface="Arial"/>
+                <a:ea typeface="Arial"/>
+              </a:rPr>
+              <a:t>予備実験：フィードバック電圧の感応度同定</a:t>
+            </a:r>
+            <a:endParaRPr b="1" dirty="0">
+              <a:solidFill>
+                <a:srgbClr val="000F78"/>
+              </a:solidFill>
+              <a:latin typeface="Arial"/>
+              <a:ea typeface="Arial"/>
+            </a:endParaRPr>
           </a:p>
         </p:txBody>
       </p:sp>
@@ -6596,37 +7169,96 @@
           <a:bodyPr wrap="square"/>
           <a:lstStyle/>
           <a:p>
-            <a:pPr/>
-            <a:r>
-              <a:rPr b="1">
+            <a:r>
+              <a:rPr b="1" dirty="0" err="1">
                 <a:solidFill>
                   <a:srgbClr val="1B2A5A"/>
                 </a:solidFill>
                 <a:latin typeface="Arial"/>
                 <a:ea typeface="Arial"/>
               </a:rPr>
-              <a:t>安価なOCXOで可能な限り高純度な基準信号源を実現することを目標とする。</a:t>
+              <a:t>フィードバック電圧のLSBを測定し回帰検証することで、フィードバックロジックのパラメータをチューニングした</a:t>
+            </a:r>
+            <a:r>
+              <a:rPr b="1" dirty="0">
+                <a:solidFill>
+                  <a:srgbClr val="1B2A5A"/>
+                </a:solidFill>
+                <a:latin typeface="Arial"/>
+                <a:ea typeface="Arial"/>
+              </a:rPr>
+              <a:t>。</a:t>
             </a:r>
           </a:p>
           <a:p>
             <a:pPr lvl="1"/>
             <a:r>
-              <a:rPr>
-                <a:latin typeface="Arial"/>
-                <a:ea typeface="Arial"/>
-              </a:rPr>
-              <a:t>究極的な目標：安価な水晶発振器（OCXO）で高純度な基準信号源を実現</a:t>
-            </a:r>
+              <a:rPr dirty="0">
+                <a:latin typeface="Arial"/>
+                <a:ea typeface="Arial"/>
+              </a:rPr>
+              <a:t>1 LSB（≈305 µ</a:t>
+            </a:r>
+            <a:r>
+              <a:rPr dirty="0" err="1">
+                <a:latin typeface="Arial"/>
+                <a:ea typeface="Arial"/>
+              </a:rPr>
+              <a:t>V）ずつ階段状に電圧を変え、各段の</a:t>
+            </a:r>
+            <a:r>
+              <a:rPr dirty="0">
+                <a:latin typeface="Arial"/>
+                <a:ea typeface="Arial"/>
+              </a:rPr>
+              <a:t> FRFR </a:t>
+            </a:r>
+            <a:r>
+              <a:rPr dirty="0" err="1">
+                <a:latin typeface="Arial"/>
+                <a:ea typeface="Arial"/>
+              </a:rPr>
+              <a:t>傾きを電圧増分に直線回帰</a:t>
+            </a:r>
+            <a:endParaRPr dirty="0">
+              <a:latin typeface="Arial"/>
+              <a:ea typeface="Arial"/>
+            </a:endParaRPr>
           </a:p>
           <a:p>
             <a:pPr lvl="1"/>
             <a:r>
-              <a:rPr>
-                <a:latin typeface="Arial"/>
-                <a:ea typeface="Arial"/>
-              </a:rPr>
-              <a:t>アプローチ：複数OCXOを同期させ、1台では実現できない純度での計測を可能にする</a:t>
-            </a:r>
+              <a:rPr dirty="0">
+                <a:latin typeface="Arial"/>
+                <a:ea typeface="Arial"/>
+              </a:rPr>
+              <a:t>→ </a:t>
+            </a:r>
+            <a:r>
+              <a:rPr dirty="0" err="1">
+                <a:latin typeface="Arial"/>
+                <a:ea typeface="Arial"/>
+              </a:rPr>
+              <a:t>プラントゲイン</a:t>
+            </a:r>
+            <a:r>
+              <a:rPr dirty="0">
+                <a:latin typeface="Arial"/>
+                <a:ea typeface="Arial"/>
+              </a:rPr>
+              <a:t> K≈860 ns/(V·s) </a:t>
+            </a:r>
+            <a:r>
+              <a:rPr dirty="0" err="1">
+                <a:latin typeface="Arial"/>
+                <a:ea typeface="Arial"/>
+              </a:rPr>
+              <a:t>が得られた</a:t>
+            </a:r>
+            <a:endParaRPr dirty="0">
+              <a:latin typeface="Arial"/>
+              <a:ea typeface="Arial"/>
+            </a:endParaRPr>
           </a:p>
         </p:txBody>
       </p:sp>
@@ -6646,14 +7278,99 @@
         </p:blipFill>
         <p:spPr>
           <a:xfrm>
-            <a:off x="1939113" y="2816352"/>
-            <a:ext cx="5997292" cy="3493008"/>
+            <a:off x="1000935" y="2432304"/>
+            <a:ext cx="7555829" cy="4187952"/>
           </a:xfrm>
           <a:prstGeom prst="rect">
             <a:avLst/>
           </a:prstGeom>
         </p:spPr>
       </p:pic>
+      <p:sp>
+        <p:nvSpPr>
+          <p:cNvPr id="5" name="正方形/長方形 4">
+            <a:extLst>
+              <a:ext uri="{FF2B5EF4-FFF2-40B4-BE49-F238E27FC236}">
+                <a16:creationId xmlns:a16="http://schemas.microsoft.com/office/drawing/2014/main" id="{256B7F1F-EE88-5D45-1AA0-641DA6F5D3F6}"/>
+              </a:ext>
+            </a:extLst>
+          </p:cNvPr>
+          <p:cNvSpPr/>
+          <p:nvPr/>
+        </p:nvSpPr>
+        <p:spPr>
+          <a:xfrm>
+            <a:off x="1997476" y="2432304"/>
+            <a:ext cx="6267635" cy="248752"/>
+          </a:xfrm>
+          <a:prstGeom prst="rect">
+            <a:avLst/>
+          </a:prstGeom>
+          <a:solidFill>
+            <a:schemeClr val="bg1"/>
+          </a:solidFill>
+          <a:ln>
+            <a:solidFill>
+              <a:schemeClr val="bg1"/>
+            </a:solidFill>
+          </a:ln>
+        </p:spPr>
+        <p:style>
+          <a:lnRef idx="2">
+            <a:schemeClr val="accent1">
+              <a:shade val="15000"/>
+            </a:schemeClr>
+          </a:lnRef>
+          <a:fillRef idx="1">
+            <a:schemeClr val="accent1"/>
+          </a:fillRef>
+          <a:effectRef idx="0">
+            <a:schemeClr val="accent1"/>
+          </a:effectRef>
+          <a:fontRef idx="minor">
+            <a:schemeClr val="lt1"/>
+          </a:fontRef>
+        </p:style>
+        <p:txBody>
+          <a:bodyPr rtlCol="0" anchor="ctr"/>
+          <a:lstStyle/>
+          <a:p>
+            <a:pPr algn="ctr"/>
+            <a:r>
+              <a:rPr kumimoji="1" lang="ja-JP" altLang="en-US" b="1" dirty="0">
+                <a:solidFill>
+                  <a:schemeClr val="tx1"/>
+                </a:solidFill>
+              </a:rPr>
+              <a:t>図　</a:t>
+            </a:r>
+            <a:r>
+              <a:rPr kumimoji="1" lang="en-US" altLang="ja-JP" b="1" dirty="0">
+                <a:solidFill>
+                  <a:schemeClr val="tx1"/>
+                </a:solidFill>
+              </a:rPr>
+              <a:t>LSB</a:t>
+            </a:r>
+            <a:r>
+              <a:rPr kumimoji="1" lang="ja-JP" altLang="en-US" b="1" dirty="0">
+                <a:solidFill>
+                  <a:schemeClr val="tx1"/>
+                </a:solidFill>
+              </a:rPr>
+              <a:t>感応度</a:t>
+            </a:r>
+            <a:r>
+              <a:rPr kumimoji="1" lang="en-US" altLang="ja-JP" b="1" dirty="0">
+                <a:solidFill>
+                  <a:schemeClr val="tx1"/>
+                </a:solidFill>
+              </a:rPr>
+              <a:t> </a:t>
+            </a:r>
+          </a:p>
+        </p:txBody>
+      </p:sp>
     </p:spTree>
   </p:cSld>
   <p:clrMapOvr>
@@ -6662,8 +7379,212 @@
 </p:sld>
 </file>
 
-<file path=ppt/slides/slide16.xml><?xml version="1.0" encoding="utf-8"?>
-<p:sld xmlns:a="http://schemas.openxmlformats.org/drawingml/2006/main" xmlns:p="http://schemas.openxmlformats.org/presentationml/2006/main" xmlns:r="http://schemas.openxmlformats.org/officeDocument/2006/relationships">
+<file path=ppt/slides/slide12.xml><?xml version="1.0" encoding="utf-8"?>
+<p:sld xmlns:a="http://schemas.openxmlformats.org/drawingml/2006/main" xmlns:r="http://schemas.openxmlformats.org/officeDocument/2006/relationships" xmlns:p="http://schemas.openxmlformats.org/presentationml/2006/main">
+  <p:cSld>
+    <p:spTree>
+      <p:nvGrpSpPr>
+        <p:cNvPr id="1" name="">
+          <a:extLst>
+            <a:ext uri="{FF2B5EF4-FFF2-40B4-BE49-F238E27FC236}">
+              <a16:creationId xmlns:a16="http://schemas.microsoft.com/office/drawing/2014/main" id="{B5FFFC93-6711-C2B9-E69F-E57837F7C2A0}"/>
+            </a:ext>
+          </a:extLst>
+        </p:cNvPr>
+        <p:cNvGrpSpPr/>
+        <p:nvPr/>
+      </p:nvGrpSpPr>
+      <p:grpSpPr>
+        <a:xfrm>
+          <a:off x="0" y="0"/>
+          <a:ext cx="0" cy="0"/>
+          <a:chOff x="0" y="0"/>
+          <a:chExt cx="0" cy="0"/>
+        </a:xfrm>
+      </p:grpSpPr>
+      <p:sp>
+        <p:nvSpPr>
+          <p:cNvPr id="2" name="Title 1">
+            <a:extLst>
+              <a:ext uri="{FF2B5EF4-FFF2-40B4-BE49-F238E27FC236}">
+                <a16:creationId xmlns:a16="http://schemas.microsoft.com/office/drawing/2014/main" id="{87263245-55E9-B407-3252-FBD65DDD8BF9}"/>
+              </a:ext>
+            </a:extLst>
+          </p:cNvPr>
+          <p:cNvSpPr>
+            <a:spLocks noGrp="1"/>
+          </p:cNvSpPr>
+          <p:nvPr>
+            <p:ph type="title"/>
+          </p:nvPr>
+        </p:nvSpPr>
+        <p:spPr>
+          <a:xfrm>
+            <a:off x="228600" y="237744"/>
+            <a:ext cx="9473184" cy="969264"/>
+          </a:xfrm>
+        </p:spPr>
+        <p:txBody>
+          <a:bodyPr/>
+          <a:lstStyle/>
+          <a:p>
+            <a:pPr>
+              <a:spcBef>
+                <a:spcPts val="0"/>
+              </a:spcBef>
+              <a:spcAft>
+                <a:spcPts val="0"/>
+              </a:spcAft>
+            </a:pPr>
+            <a:r>
+              <a:rPr sz="1400" b="1" dirty="0">
+                <a:solidFill>
+                  <a:srgbClr val="000F78"/>
+                </a:solidFill>
+                <a:latin typeface="Arial"/>
+                <a:ea typeface="Arial"/>
+              </a:rPr>
+              <a:t>04. </a:t>
+            </a:r>
+            <a:r>
+              <a:rPr sz="1400" b="1" dirty="0" err="1">
+                <a:solidFill>
+                  <a:srgbClr val="000F78"/>
+                </a:solidFill>
+                <a:latin typeface="Arial"/>
+                <a:ea typeface="Arial"/>
+              </a:rPr>
+              <a:t>研究方法</a:t>
+            </a:r>
+            <a:endParaRPr sz="1400" b="1" dirty="0">
+              <a:solidFill>
+                <a:srgbClr val="000F78"/>
+              </a:solidFill>
+              <a:latin typeface="Arial"/>
+              <a:ea typeface="Arial"/>
+            </a:endParaRPr>
+          </a:p>
+          <a:p>
+            <a:pPr>
+              <a:spcBef>
+                <a:spcPts val="0"/>
+              </a:spcBef>
+              <a:spcAft>
+                <a:spcPts val="0"/>
+              </a:spcAft>
+            </a:pPr>
+            <a:r>
+              <a:rPr b="1" dirty="0">
+                <a:solidFill>
+                  <a:srgbClr val="000F78"/>
+                </a:solidFill>
+                <a:latin typeface="Arial"/>
+                <a:ea typeface="Arial"/>
+              </a:rPr>
+              <a:t>4-</a:t>
+            </a:r>
+            <a:r>
+              <a:rPr lang="en-US" b="1" dirty="0">
+                <a:solidFill>
+                  <a:srgbClr val="000F78"/>
+                </a:solidFill>
+              </a:rPr>
+              <a:t>6</a:t>
+            </a:r>
+            <a:r>
+              <a:rPr b="1" dirty="0">
+                <a:solidFill>
+                  <a:srgbClr val="000F78"/>
+                </a:solidFill>
+                <a:latin typeface="Arial"/>
+                <a:ea typeface="Arial"/>
+              </a:rPr>
+              <a:t>. </a:t>
+            </a:r>
+            <a:r>
+              <a:rPr lang="ja-JP" altLang="en-US" b="1" dirty="0">
+                <a:solidFill>
+                  <a:srgbClr val="000F78"/>
+                </a:solidFill>
+              </a:rPr>
+              <a:t>制御ターゲット：</a:t>
+            </a:r>
+            <a:r>
+              <a:rPr lang="en-US" altLang="ja-JP" b="1" dirty="0">
+                <a:solidFill>
+                  <a:srgbClr val="000F78"/>
+                </a:solidFill>
+              </a:rPr>
+              <a:t>FRFR</a:t>
+            </a:r>
+            <a:endParaRPr b="1" dirty="0">
+              <a:solidFill>
+                <a:srgbClr val="000F78"/>
+              </a:solidFill>
+              <a:latin typeface="Arial"/>
+              <a:ea typeface="Arial"/>
+            </a:endParaRPr>
+          </a:p>
+        </p:txBody>
+      </p:sp>
+      <p:sp>
+        <p:nvSpPr>
+          <p:cNvPr id="3" name="Text Placeholder 2">
+            <a:extLst>
+              <a:ext uri="{FF2B5EF4-FFF2-40B4-BE49-F238E27FC236}">
+                <a16:creationId xmlns:a16="http://schemas.microsoft.com/office/drawing/2014/main" id="{1BFE9D7A-9BE3-02A0-BFE1-98487BDBAC12}"/>
+              </a:ext>
+            </a:extLst>
+          </p:cNvPr>
+          <p:cNvSpPr>
+            <a:spLocks noGrp="1"/>
+          </p:cNvSpPr>
+          <p:nvPr>
+            <p:ph type="body" idx="1"/>
+          </p:nvPr>
+        </p:nvSpPr>
+        <p:spPr>
+          <a:xfrm>
+            <a:off x="274320" y="932688"/>
+            <a:ext cx="9326880" cy="1810512"/>
+          </a:xfrm>
+        </p:spPr>
+        <p:txBody>
+          <a:bodyPr wrap="square"/>
+          <a:lstStyle/>
+          <a:p>
+            <a:r>
+              <a:rPr lang="en-US" altLang="ja-JP" b="1" dirty="0">
+                <a:solidFill>
+                  <a:srgbClr val="1B2A5A"/>
+                </a:solidFill>
+                <a:latin typeface="Arial"/>
+                <a:ea typeface="Arial"/>
+              </a:rPr>
+              <a:t>XX</a:t>
+            </a:r>
+            <a:endParaRPr dirty="0">
+              <a:latin typeface="Arial"/>
+              <a:ea typeface="Arial"/>
+            </a:endParaRPr>
+          </a:p>
+        </p:txBody>
+      </p:sp>
+    </p:spTree>
+    <p:extLst>
+      <p:ext uri="{BB962C8B-B14F-4D97-AF65-F5344CB8AC3E}">
+        <p14:creationId xmlns:p14="http://schemas.microsoft.com/office/powerpoint/2010/main" val="2137194653"/>
+      </p:ext>
+    </p:extLst>
+  </p:cSld>
+  <p:clrMapOvr>
+    <a:masterClrMapping/>
+  </p:clrMapOvr>
+</p:sld>
+</file>
+
+<file path=ppt/slides/slide13.xml><?xml version="1.0" encoding="utf-8"?>
+<p:sld xmlns:a="http://schemas.openxmlformats.org/drawingml/2006/main" xmlns:r="http://schemas.openxmlformats.org/officeDocument/2006/relationships" xmlns:p="http://schemas.openxmlformats.org/presentationml/2006/main">
   <p:cSld>
     <p:spTree>
       <p:nvGrpSpPr>
@@ -6671,7 +7592,14 @@
         <p:cNvGrpSpPr/>
         <p:nvPr/>
       </p:nvGrpSpPr>
-      <p:grpSpPr/>
+      <p:grpSpPr>
+        <a:xfrm>
+          <a:off x="0" y="0"/>
+          <a:ext cx="0" cy="0"/>
+          <a:chOff x="0" y="0"/>
+          <a:chExt cx="0" cy="0"/>
+        </a:xfrm>
+      </p:grpSpPr>
       <p:sp>
         <p:nvSpPr>
           <p:cNvPr id="2" name="Title 1"/>
@@ -6701,15 +7629,32 @@
               </a:spcAft>
             </a:pPr>
             <a:r>
-              <a:rPr sz="1400" b="1">
+              <a:rPr sz="1400" b="1" dirty="0">
                 <a:solidFill>
                   <a:srgbClr val="000F78"/>
                 </a:solidFill>
                 <a:latin typeface="Arial"/>
                 <a:ea typeface="Arial"/>
               </a:rPr>
-              <a:t>03. 先行研究</a:t>
-            </a:r>
+              <a:t>04. </a:t>
+            </a:r>
+            <a:r>
+              <a:rPr sz="1400" b="1" dirty="0" err="1">
+                <a:solidFill>
+                  <a:srgbClr val="000F78"/>
+                </a:solidFill>
+                <a:latin typeface="Arial"/>
+                <a:ea typeface="Arial"/>
+              </a:rPr>
+              <a:t>研究方法</a:t>
+            </a:r>
+            <a:endParaRPr sz="1400" b="1" dirty="0">
+              <a:solidFill>
+                <a:srgbClr val="000F78"/>
+              </a:solidFill>
+              <a:latin typeface="Arial"/>
+              <a:ea typeface="Arial"/>
+            </a:endParaRPr>
           </a:p>
           <a:p>
             <a:pPr>
@@ -6721,162 +7666,50 @@
               </a:spcAft>
             </a:pPr>
             <a:r>
-              <a:rPr b="1">
+              <a:rPr b="1" dirty="0">
                 <a:solidFill>
                   <a:srgbClr val="000F78"/>
                 </a:solidFill>
                 <a:latin typeface="Arial"/>
                 <a:ea typeface="Arial"/>
               </a:rPr>
-              <a:t>3-1. 同期・平均による位相雑音の改善（1/N の原理）</a:t>
-            </a:r>
-          </a:p>
-        </p:txBody>
-      </p:sp>
-      <p:sp>
-        <p:nvSpPr>
-          <p:cNvPr id="3" name="Text Placeholder 2"/>
-          <p:cNvSpPr>
-            <a:spLocks noGrp="1"/>
-          </p:cNvSpPr>
-          <p:nvPr>
-            <p:ph type="body" idx="1"/>
-          </p:nvPr>
-        </p:nvSpPr>
-        <p:spPr>
-          <a:xfrm>
-            <a:off x="274320" y="932688"/>
-            <a:ext cx="9326880" cy="1472184"/>
-          </a:xfrm>
-        </p:spPr>
-        <p:txBody>
-          <a:bodyPr wrap="square"/>
-          <a:lstStyle/>
-          <a:p>
-            <a:pPr/>
-            <a:r>
-              <a:rPr b="1">
-                <a:solidFill>
-                  <a:srgbClr val="1B2A5A"/>
-                </a:solidFill>
-                <a:latin typeface="Arial"/>
-                <a:ea typeface="Arial"/>
-              </a:rPr>
-              <a:t>互いに無相関な雑音は平均で打ち消し合うため、位相を揃えた複数OCXOの出力を平均すると単体を超える純度になる。</a:t>
-            </a:r>
-          </a:p>
-          <a:p>
-            <a:pPr lvl="1"/>
-            <a:r>
-              <a:rPr>
-                <a:latin typeface="Arial"/>
-                <a:ea typeface="Arial"/>
-              </a:rPr>
-              <a:t>無相関な雑音は平均すると電力が台数分の1（2台で 1/2）になり、近傍位相雑音が −3 dB 改善する</a:t>
-            </a:r>
-          </a:p>
-        </p:txBody>
-      </p:sp>
-      <p:pic>
-        <p:nvPicPr>
-          <p:cNvPr id="4" name="Picture 3" descr="image.png"/>
-          <p:cNvPicPr>
-            <a:picLocks noChangeAspect="1"/>
-          </p:cNvPicPr>
-          <p:nvPr/>
-        </p:nvPicPr>
-        <p:blipFill>
-          <a:blip r:embed="rId2"/>
-          <a:stretch>
-            <a:fillRect/>
-          </a:stretch>
-        </p:blipFill>
-        <p:spPr>
-          <a:xfrm>
-            <a:off x="2758198" y="2478024"/>
-            <a:ext cx="4359122" cy="3831335"/>
-          </a:xfrm>
-          <a:prstGeom prst="rect">
-            <a:avLst/>
-          </a:prstGeom>
-        </p:spPr>
-      </p:pic>
-    </p:spTree>
-  </p:cSld>
-  <p:clrMapOvr>
-    <a:masterClrMapping/>
-  </p:clrMapOvr>
-</p:sld>
-</file>
-
-<file path=ppt/slides/slide17.xml><?xml version="1.0" encoding="utf-8"?>
-<p:sld xmlns:a="http://schemas.openxmlformats.org/drawingml/2006/main" xmlns:p="http://schemas.openxmlformats.org/presentationml/2006/main" xmlns:r="http://schemas.openxmlformats.org/officeDocument/2006/relationships">
-  <p:cSld>
-    <p:spTree>
-      <p:nvGrpSpPr>
-        <p:cNvPr id="1" name=""/>
-        <p:cNvGrpSpPr/>
-        <p:nvPr/>
-      </p:nvGrpSpPr>
-      <p:grpSpPr/>
-      <p:sp>
-        <p:nvSpPr>
-          <p:cNvPr id="2" name="Title 1"/>
-          <p:cNvSpPr>
-            <a:spLocks noGrp="1"/>
-          </p:cNvSpPr>
-          <p:nvPr>
-            <p:ph type="title"/>
-          </p:nvPr>
-        </p:nvSpPr>
-        <p:spPr>
-          <a:xfrm>
-            <a:off x="228600" y="237744"/>
-            <a:ext cx="9473184" cy="969264"/>
-          </a:xfrm>
-        </p:spPr>
-        <p:txBody>
-          <a:bodyPr/>
-          <a:lstStyle/>
-          <a:p>
-            <a:pPr>
-              <a:spcBef>
-                <a:spcPts val="0"/>
-              </a:spcBef>
-              <a:spcAft>
-                <a:spcPts val="0"/>
-              </a:spcAft>
-            </a:pPr>
-            <a:r>
-              <a:rPr sz="1400" b="1">
+              <a:t>4-</a:t>
+            </a:r>
+            <a:r>
+              <a:rPr lang="en-US" b="1" dirty="0">
                 <a:solidFill>
                   <a:srgbClr val="000F78"/>
                 </a:solidFill>
-                <a:latin typeface="Arial"/>
-                <a:ea typeface="Arial"/>
-              </a:rPr>
-              <a:t>04. 研究方法</a:t>
-            </a:r>
-          </a:p>
-          <a:p>
-            <a:pPr>
-              <a:spcBef>
-                <a:spcPts val="0"/>
-              </a:spcBef>
-              <a:spcAft>
-                <a:spcPts val="0"/>
-              </a:spcAft>
-            </a:pPr>
-            <a:r>
-              <a:rPr b="1">
+              </a:rPr>
+              <a:t>7</a:t>
+            </a:r>
+            <a:r>
+              <a:rPr b="1" dirty="0">
                 <a:solidFill>
                   <a:srgbClr val="000F78"/>
                 </a:solidFill>
                 <a:latin typeface="Arial"/>
                 <a:ea typeface="Arial"/>
               </a:rPr>
-              <a:t>4-1. アプローチ：能動的に同期して平均する</a:t>
-            </a:r>
+              <a:t>. </a:t>
+            </a:r>
+            <a:r>
+              <a:rPr b="1" dirty="0" err="1">
+                <a:solidFill>
+                  <a:srgbClr val="000F78"/>
+                </a:solidFill>
+                <a:latin typeface="Arial"/>
+                <a:ea typeface="Arial"/>
+              </a:rPr>
+              <a:t>フィードバックロジック</a:t>
+            </a:r>
+            <a:endParaRPr b="1" dirty="0">
+              <a:solidFill>
+                <a:srgbClr val="000F78"/>
+              </a:solidFill>
+              <a:latin typeface="Arial"/>
+              <a:ea typeface="Arial"/>
+            </a:endParaRPr>
           </a:p>
         </p:txBody>
       </p:sp>
@@ -6900,7 +7733,6 @@
           <a:bodyPr wrap="square"/>
           <a:lstStyle/>
           <a:p>
-            <a:pPr/>
             <a:r>
               <a:rPr b="1">
                 <a:solidFill>
@@ -6909,7 +7741,7 @@
                 <a:latin typeface="Arial"/>
                 <a:ea typeface="Arial"/>
               </a:rPr>
-              <a:t>互いに無相関な雑音は平均で打ち消し合う。位相を揃えた複数OCXOの出力を能動的フィードバックで実時間に同期・平均し、単体を超える純度を実現する（国際原子時のクロックアンサンブルを小規模・実時間で適用）。</a:t>
+              <a:t>位相のズレ e と周波数のズレ Δf を使う2状態フィードバックで、必要な分だけ電圧を動かす（1 LSB 未満は動かさない＝不感帯）。同期動作そのものが位相雑音を持ち込まない。</a:t>
             </a:r>
           </a:p>
           <a:p>
@@ -6919,7 +7751,7 @@
                 <a:latin typeface="Arial"/>
                 <a:ea typeface="Arial"/>
               </a:rPr>
-              <a:t>平均には各発振器の位相が揃うことが前提</a:t>
+              <a:t>出自：ACC（車両追従制御）の状態方程式を波動系へ置き換え</a:t>
             </a:r>
           </a:p>
           <a:p>
@@ -6929,7 +7761,7 @@
                 <a:latin typeface="Arial"/>
                 <a:ea typeface="Arial"/>
               </a:rPr>
-              <a:t>本研究の方式：能動的フィードバックで実時間同期し、出力を平均する</a:t>
+              <a:t>更新：Δf_des=clamp(Kp_e·e) → 必要段数 dN=round(...) → 電圧更新</a:t>
             </a:r>
           </a:p>
           <a:p>
@@ -6939,7 +7771,7 @@
                 <a:latin typeface="Arial"/>
                 <a:ea typeface="Arial"/>
               </a:rPr>
-              <a:t>同期を『雑音を加えずに』行うことが中核課題</a:t>
+              <a:t>不感帯で静かに同期。比例・微分（PID）は過剰動作で短期雑音（対比）</a:t>
             </a:r>
           </a:p>
         </p:txBody>
@@ -6960,8 +7792,32 @@
         </p:blipFill>
         <p:spPr>
           <a:xfrm>
-            <a:off x="2157181" y="3493008"/>
-            <a:ext cx="5561156" cy="2816352"/>
+            <a:off x="457200" y="4003997"/>
+            <a:ext cx="4449927" cy="1702933"/>
+          </a:xfrm>
+          <a:prstGeom prst="rect">
+            <a:avLst/>
+          </a:prstGeom>
+        </p:spPr>
+      </p:pic>
+      <p:pic>
+        <p:nvPicPr>
+          <p:cNvPr id="5" name="Picture 4" descr="image.png"/>
+          <p:cNvPicPr>
+            <a:picLocks noChangeAspect="1"/>
+          </p:cNvPicPr>
+          <p:nvPr/>
+        </p:nvPicPr>
+        <p:blipFill>
+          <a:blip r:embed="rId3"/>
+          <a:stretch>
+            <a:fillRect/>
+          </a:stretch>
+        </p:blipFill>
+        <p:spPr>
+          <a:xfrm>
+            <a:off x="4998567" y="3597190"/>
+            <a:ext cx="4449927" cy="2516547"/>
           </a:xfrm>
           <a:prstGeom prst="rect">
             <a:avLst/>
@@ -6976,8 +7832,8 @@
 </p:sld>
 </file>
 
-<file path=ppt/slides/slide18.xml><?xml version="1.0" encoding="utf-8"?>
-<p:sld xmlns:a="http://schemas.openxmlformats.org/drawingml/2006/main" xmlns:p="http://schemas.openxmlformats.org/presentationml/2006/main" xmlns:r="http://schemas.openxmlformats.org/officeDocument/2006/relationships">
+<file path=ppt/slides/slide14.xml><?xml version="1.0" encoding="utf-8"?>
+<p:sld xmlns:a="http://schemas.openxmlformats.org/drawingml/2006/main" xmlns:r="http://schemas.openxmlformats.org/officeDocument/2006/relationships" xmlns:p="http://schemas.openxmlformats.org/presentationml/2006/main">
   <p:cSld>
     <p:spTree>
       <p:nvGrpSpPr>
@@ -6985,7 +7841,14 @@
         <p:cNvGrpSpPr/>
         <p:nvPr/>
       </p:nvGrpSpPr>
-      <p:grpSpPr/>
+      <p:grpSpPr>
+        <a:xfrm>
+          <a:off x="0" y="0"/>
+          <a:ext cx="0" cy="0"/>
+          <a:chOff x="0" y="0"/>
+          <a:chExt cx="0" cy="0"/>
+        </a:xfrm>
+      </p:grpSpPr>
       <p:sp>
         <p:nvSpPr>
           <p:cNvPr id="2" name="Title 1"/>
@@ -7015,34 +7878,14 @@
               </a:spcAft>
             </a:pPr>
             <a:r>
-              <a:rPr sz="1400" b="1">
+              <a:rPr b="1">
                 <a:solidFill>
                   <a:srgbClr val="000F78"/>
                 </a:solidFill>
                 <a:latin typeface="Arial"/>
                 <a:ea typeface="Arial"/>
               </a:rPr>
-              <a:t>04. 研究方法</a:t>
-            </a:r>
-          </a:p>
-          <a:p>
-            <a:pPr>
-              <a:spcBef>
-                <a:spcPts val="0"/>
-              </a:spcBef>
-              <a:spcAft>
-                <a:spcPts val="0"/>
-              </a:spcAft>
-            </a:pPr>
-            <a:r>
-              <a:rPr b="1">
-                <a:solidFill>
-                  <a:srgbClr val="000F78"/>
-                </a:solidFill>
-                <a:latin typeface="Arial"/>
-                <a:ea typeface="Arial"/>
-              </a:rPr>
-              <a:t>4-2. 実験系</a:t>
+              <a:t>05. 実験と結果</a:t>
             </a:r>
           </a:p>
         </p:txBody>
@@ -7067,7 +7910,6 @@
           <a:bodyPr wrap="square"/>
           <a:lstStyle/>
           <a:p>
-            <a:pPr/>
             <a:r>
               <a:rPr b="1">
                 <a:solidFill>
@@ -7076,7 +7918,7 @@
                 <a:latin typeface="Arial"/>
                 <a:ea typeface="Arial"/>
               </a:rPr>
-              <a:t>OCXO2台に対し、位相差FRFRをターゲットとしてオシロスコープで計測。計測結果を基に片方のOCXOへフィードバック電圧を印加する。</a:t>
+              <a:t>実測モデルに基づくモデルFB（Kp_e=0.08）は、無制御HOLDと同等の近傍位相雑音のまま同期できる（差≈0 dB）＝同期時に位相雑音を持ち込まない。PID制御は短期雑音を生む（対比）。</a:t>
             </a:r>
           </a:p>
           <a:p>
@@ -7086,67 +7928,69 @@
                 <a:latin typeface="Arial"/>
                 <a:ea typeface="Arial"/>
               </a:rPr>
-              <a:t>制御系統（オシロ FRFR）と精度評価系統（録音→ヒルベルト変換）の二系統で構成</a:t>
+              <a:t>モデルFB と HOLD の近傍位相雑音がほぼ一致（差≈0 dB）</a:t>
+            </a:r>
+          </a:p>
+          <a:p>
+            <a:pPr lvl="1"/>
+            <a:r>
+              <a:rPr>
+                <a:latin typeface="Arial"/>
+                <a:ea typeface="Arial"/>
+              </a:rPr>
+              <a:t>比例・微分（PID）制御は過剰動作で短期ジッタを注入</a:t>
             </a:r>
           </a:p>
         </p:txBody>
       </p:sp>
-      <p:sp>
-        <p:nvSpPr>
-          <p:cNvPr id="4" name="Rounded Rectangle 3"/>
-          <p:cNvSpPr/>
+      <p:pic>
+        <p:nvPicPr>
+          <p:cNvPr id="4" name="Picture 3" descr="image.png"/>
+          <p:cNvPicPr>
+            <a:picLocks noChangeAspect="1"/>
+          </p:cNvPicPr>
           <p:nvPr/>
-        </p:nvSpPr>
+        </p:nvPicPr>
+        <p:blipFill>
+          <a:blip r:embed="rId2"/>
+          <a:stretch>
+            <a:fillRect/>
+          </a:stretch>
+        </p:blipFill>
         <p:spPr>
           <a:xfrm>
-            <a:off x="1463040" y="2816352"/>
-            <a:ext cx="6949440" cy="3538727"/>
+            <a:off x="457200" y="2968507"/>
+            <a:ext cx="4449927" cy="3097257"/>
           </a:xfrm>
-          <a:prstGeom prst="roundRect">
+          <a:prstGeom prst="rect">
             <a:avLst/>
           </a:prstGeom>
-          <a:solidFill>
-            <a:srgbClr val="F2F2F2"/>
-          </a:solidFill>
-          <a:ln w="12700">
-            <a:solidFill>
-              <a:srgbClr val="595959"/>
-            </a:solidFill>
-          </a:ln>
-          <a:effectLst/>
         </p:spPr>
-        <p:style>
-          <a:lnRef idx="1">
-            <a:schemeClr val="accent1"/>
-          </a:lnRef>
-          <a:fillRef idx="3">
-            <a:schemeClr val="accent1"/>
-          </a:fillRef>
-          <a:effectRef idx="2">
-            <a:schemeClr val="accent1"/>
-          </a:effectRef>
-          <a:fontRef idx="minor">
-            <a:schemeClr val="lt1"/>
-          </a:fontRef>
-        </p:style>
-        <p:txBody>
-          <a:bodyPr rtlCol="0" anchor="ctr" wrap="square"/>
-          <a:lstStyle/>
-          <a:p>
-            <a:pPr algn="ctr"/>
-            <a:r>
-              <a:rPr sz="1200">
-                <a:solidFill>
-                  <a:srgbClr val="595959"/>
-                </a:solidFill>
-                <a:latin typeface="Arial"/>
-                <a:ea typeface="Arial"/>
-              </a:rPr>
-              <a:t>実験系ブロック図（image1.png を白黒で清書。FB→OCXO 帰還矢印・PC(MATLAB) ラベルを追記）</a:t>
-            </a:r>
-          </a:p>
-        </p:txBody>
-      </p:sp>
+      </p:pic>
+      <p:pic>
+        <p:nvPicPr>
+          <p:cNvPr id="5" name="Picture 4" descr="image.png"/>
+          <p:cNvPicPr>
+            <a:picLocks noChangeAspect="1"/>
+          </p:cNvPicPr>
+          <p:nvPr/>
+        </p:nvPicPr>
+        <p:blipFill>
+          <a:blip r:embed="rId3"/>
+          <a:stretch>
+            <a:fillRect/>
+          </a:stretch>
+        </p:blipFill>
+        <p:spPr>
+          <a:xfrm>
+            <a:off x="4998567" y="2968507"/>
+            <a:ext cx="4449927" cy="3097257"/>
+          </a:xfrm>
+          <a:prstGeom prst="rect">
+            <a:avLst/>
+          </a:prstGeom>
+        </p:spPr>
+      </p:pic>
     </p:spTree>
   </p:cSld>
   <p:clrMapOvr>
@@ -7155,8 +7999,8 @@
 </p:sld>
 </file>
 
-<file path=ppt/slides/slide19.xml><?xml version="1.0" encoding="utf-8"?>
-<p:sld xmlns:a="http://schemas.openxmlformats.org/drawingml/2006/main" xmlns:p="http://schemas.openxmlformats.org/presentationml/2006/main" xmlns:r="http://schemas.openxmlformats.org/officeDocument/2006/relationships">
+<file path=ppt/slides/slide15.xml><?xml version="1.0" encoding="utf-8"?>
+<p:sld xmlns:a="http://schemas.openxmlformats.org/drawingml/2006/main" xmlns:r="http://schemas.openxmlformats.org/officeDocument/2006/relationships" xmlns:p="http://schemas.openxmlformats.org/presentationml/2006/main">
   <p:cSld>
     <p:spTree>
       <p:nvGrpSpPr>
@@ -7164,7 +8008,14 @@
         <p:cNvGrpSpPr/>
         <p:nvPr/>
       </p:nvGrpSpPr>
-      <p:grpSpPr/>
+      <p:grpSpPr>
+        <a:xfrm>
+          <a:off x="0" y="0"/>
+          <a:ext cx="0" cy="0"/>
+          <a:chOff x="0" y="0"/>
+          <a:chExt cx="0" cy="0"/>
+        </a:xfrm>
+      </p:grpSpPr>
       <p:sp>
         <p:nvSpPr>
           <p:cNvPr id="2" name="Title 1"/>
@@ -7194,34 +8045,14 @@
               </a:spcAft>
             </a:pPr>
             <a:r>
-              <a:rPr sz="1400" b="1">
+              <a:rPr b="1">
                 <a:solidFill>
                   <a:srgbClr val="000F78"/>
                 </a:solidFill>
                 <a:latin typeface="Arial"/>
                 <a:ea typeface="Arial"/>
               </a:rPr>
-              <a:t>04. 研究方法</a:t>
-            </a:r>
-          </a:p>
-          <a:p>
-            <a:pPr>
-              <a:spcBef>
-                <a:spcPts val="0"/>
-              </a:spcBef>
-              <a:spcAft>
-                <a:spcPts val="0"/>
-              </a:spcAft>
-            </a:pPr>
-            <a:r>
-              <a:rPr b="1">
-                <a:solidFill>
-                  <a:srgbClr val="000F78"/>
-                </a:solidFill>
-                <a:latin typeface="Arial"/>
-                <a:ea typeface="Arial"/>
-              </a:rPr>
-              <a:t>4-3. 測定法：オーディオレコーダを使う理由</a:t>
+              <a:t>06. 考察と今後の展望</a:t>
             </a:r>
           </a:p>
         </p:txBody>
@@ -7239,79 +8070,77 @@
         <p:spPr>
           <a:xfrm>
             <a:off x="274320" y="932688"/>
-            <a:ext cx="9326880" cy="1810512"/>
+            <a:ext cx="9326880" cy="1424146"/>
           </a:xfrm>
         </p:spPr>
         <p:txBody>
           <a:bodyPr wrap="square"/>
           <a:lstStyle/>
           <a:p>
-            <a:pPr/>
-            <a:r>
-              <a:rPr b="1">
+            <a:r>
+              <a:rPr b="1" dirty="0">
                 <a:solidFill>
                   <a:srgbClr val="1B2A5A"/>
                 </a:solidFill>
                 <a:latin typeface="Arial"/>
                 <a:ea typeface="Arial"/>
               </a:rPr>
-              <a:t>オーディオレコーディングは高分解能（10秒測定で std 20–30 ps）かつ長時間測定が可能で、0.1–1 Hz の評価に向いている。</a:t>
-            </a:r>
-          </a:p>
-          <a:p>
-            <a:pPr lvl="1"/>
-            <a:r>
-              <a:rPr>
-                <a:latin typeface="Arial"/>
-                <a:ea typeface="Arial"/>
-              </a:rPr>
-              <a:t>オシロの FRFR は精度が要る／録音は高精度・長時間測定が可能</a:t>
-            </a:r>
-          </a:p>
-          <a:p>
-            <a:pPr lvl="1"/>
-            <a:r>
-              <a:rPr>
-                <a:latin typeface="Arial"/>
-                <a:ea typeface="Arial"/>
-              </a:rPr>
-              <a:t>卒論で確立した測定法を継承</a:t>
+              <a:t>フィードバック制御により、近傍位相雑音（同期動作に伴う短期の位相ゆらぎ）を持ち込まずに同期させることに成功した。今後は2台を同時制御・合成器で平均して −3 dB </a:t>
+            </a:r>
+            <a:r>
+              <a:rPr b="1" dirty="0" err="1">
+                <a:solidFill>
+                  <a:srgbClr val="1B2A5A"/>
+                </a:solidFill>
+                <a:latin typeface="Arial"/>
+                <a:ea typeface="Arial"/>
+              </a:rPr>
+              <a:t>を実証し、N台へ拡張する</a:t>
+            </a:r>
+            <a:r>
+              <a:rPr b="1" dirty="0">
+                <a:solidFill>
+                  <a:srgbClr val="1B2A5A"/>
+                </a:solidFill>
+                <a:latin typeface="Arial"/>
+                <a:ea typeface="Arial"/>
+              </a:rPr>
+              <a:t>。</a:t>
             </a:r>
           </a:p>
         </p:txBody>
       </p:sp>
       <p:sp>
         <p:nvSpPr>
-          <p:cNvPr id="4" name="Rounded Rectangle 3"/>
+          <p:cNvPr id="5" name="フローチャート: 他ページ結合子 4">
+            <a:extLst>
+              <a:ext uri="{FF2B5EF4-FFF2-40B4-BE49-F238E27FC236}">
+                <a16:creationId xmlns:a16="http://schemas.microsoft.com/office/drawing/2014/main" id="{05C5E4A2-40EA-3831-00BD-9F2BE282D4C3}"/>
+              </a:ext>
+            </a:extLst>
+          </p:cNvPr>
           <p:cNvSpPr/>
           <p:nvPr/>
         </p:nvSpPr>
         <p:spPr>
           <a:xfrm>
-            <a:off x="1463040" y="2816352"/>
-            <a:ext cx="6949440" cy="3538727"/>
+            <a:off x="656822" y="2589684"/>
+            <a:ext cx="1403797" cy="830172"/>
           </a:xfrm>
-          <a:prstGeom prst="roundRect">
+          <a:prstGeom prst="flowChartOffpageConnector">
             <a:avLst/>
           </a:prstGeom>
-          <a:solidFill>
-            <a:srgbClr val="F2F2F2"/>
-          </a:solidFill>
-          <a:ln w="12700">
-            <a:solidFill>
-              <a:srgbClr val="595959"/>
-            </a:solidFill>
-          </a:ln>
-          <a:effectLst/>
         </p:spPr>
         <p:style>
-          <a:lnRef idx="1">
-            <a:schemeClr val="accent1"/>
+          <a:lnRef idx="2">
+            <a:schemeClr val="accent1">
+              <a:shade val="15000"/>
+            </a:schemeClr>
           </a:lnRef>
-          <a:fillRef idx="3">
+          <a:fillRef idx="1">
             <a:schemeClr val="accent1"/>
           </a:fillRef>
-          <a:effectRef idx="2">
+          <a:effectRef idx="0">
             <a:schemeClr val="accent1"/>
           </a:effectRef>
           <a:fontRef idx="minor">
@@ -7319,24 +8148,606 @@
           </a:fontRef>
         </p:style>
         <p:txBody>
-          <a:bodyPr rtlCol="0" anchor="ctr" wrap="square"/>
+          <a:bodyPr rtlCol="0" anchor="ctr"/>
           <a:lstStyle/>
           <a:p>
             <a:pPr algn="ctr"/>
             <a:r>
-              <a:rPr sz="1200">
-                <a:solidFill>
-                  <a:srgbClr val="595959"/>
-                </a:solidFill>
-                <a:latin typeface="Arial"/>
-                <a:ea typeface="Arial"/>
-              </a:rPr>
-              <a:t>録音系統図・分周・サンプル数比較表（卒論PPTXの該当図を流用）</a:t>
+              <a:rPr kumimoji="1" lang="ja-JP" altLang="en-US" sz="1600" b="1" dirty="0">
+                <a:latin typeface="+mj-lt"/>
+              </a:rPr>
+              <a:t>現状</a:t>
+            </a:r>
+          </a:p>
+        </p:txBody>
+      </p:sp>
+      <p:sp>
+        <p:nvSpPr>
+          <p:cNvPr id="7" name="テキスト ボックス 6">
+            <a:extLst>
+              <a:ext uri="{FF2B5EF4-FFF2-40B4-BE49-F238E27FC236}">
+                <a16:creationId xmlns:a16="http://schemas.microsoft.com/office/drawing/2014/main" id="{7CCBBC37-475A-1459-4A2A-9A3A8910950D}"/>
+              </a:ext>
+            </a:extLst>
+          </p:cNvPr>
+          <p:cNvSpPr txBox="1"/>
+          <p:nvPr/>
+        </p:nvSpPr>
+        <p:spPr>
+          <a:xfrm>
+            <a:off x="2461797" y="2850882"/>
+            <a:ext cx="7005033" cy="307777"/>
+          </a:xfrm>
+          <a:prstGeom prst="rect">
+            <a:avLst/>
+          </a:prstGeom>
+          <a:noFill/>
+        </p:spPr>
+        <p:txBody>
+          <a:bodyPr wrap="square">
+            <a:spAutoFit/>
+          </a:bodyPr>
+          <a:lstStyle/>
+          <a:p>
+            <a:pPr lvl="1"/>
+            <a:r>
+              <a:rPr lang="ja-JP" altLang="en-US" dirty="0">
+                <a:latin typeface="Arial"/>
+                <a:ea typeface="Arial"/>
+              </a:rPr>
+              <a:t>実測モデルに基づく</a:t>
+            </a:r>
+            <a:r>
+              <a:rPr lang="en-US" altLang="ja-JP" dirty="0">
+                <a:latin typeface="Arial"/>
+                <a:ea typeface="Arial"/>
+              </a:rPr>
+              <a:t>FB</a:t>
+            </a:r>
+            <a:r>
+              <a:rPr lang="ja-JP" altLang="en-US" dirty="0">
+                <a:latin typeface="Arial"/>
+                <a:ea typeface="Arial"/>
+              </a:rPr>
+              <a:t>で近傍位相雑音を注入せず同期を実現</a:t>
+            </a:r>
+          </a:p>
+        </p:txBody>
+      </p:sp>
+      <p:sp>
+        <p:nvSpPr>
+          <p:cNvPr id="8" name="フローチャート: 他ページ結合子 7">
+            <a:extLst>
+              <a:ext uri="{FF2B5EF4-FFF2-40B4-BE49-F238E27FC236}">
+                <a16:creationId xmlns:a16="http://schemas.microsoft.com/office/drawing/2014/main" id="{08EBF897-D13F-E212-8B3E-C73BAA19611E}"/>
+              </a:ext>
+            </a:extLst>
+          </p:cNvPr>
+          <p:cNvSpPr/>
+          <p:nvPr/>
+        </p:nvSpPr>
+        <p:spPr>
+          <a:xfrm>
+            <a:off x="656822" y="3460167"/>
+            <a:ext cx="1403797" cy="830172"/>
+          </a:xfrm>
+          <a:prstGeom prst="flowChartOffpageConnector">
+            <a:avLst/>
+          </a:prstGeom>
+        </p:spPr>
+        <p:style>
+          <a:lnRef idx="2">
+            <a:schemeClr val="accent1">
+              <a:shade val="15000"/>
+            </a:schemeClr>
+          </a:lnRef>
+          <a:fillRef idx="1">
+            <a:schemeClr val="accent1"/>
+          </a:fillRef>
+          <a:effectRef idx="0">
+            <a:schemeClr val="accent1"/>
+          </a:effectRef>
+          <a:fontRef idx="minor">
+            <a:schemeClr val="lt1"/>
+          </a:fontRef>
+        </p:style>
+        <p:txBody>
+          <a:bodyPr rtlCol="0" anchor="ctr"/>
+          <a:lstStyle/>
+          <a:p>
+            <a:pPr algn="ctr"/>
+            <a:r>
+              <a:rPr kumimoji="1" lang="en-US" altLang="ja-JP" sz="1600" b="1" dirty="0">
+                <a:latin typeface="+mj-lt"/>
+              </a:rPr>
+              <a:t>Step1</a:t>
+            </a:r>
+          </a:p>
+        </p:txBody>
+      </p:sp>
+      <p:sp>
+        <p:nvSpPr>
+          <p:cNvPr id="9" name="フローチャート: 他ページ結合子 8">
+            <a:extLst>
+              <a:ext uri="{FF2B5EF4-FFF2-40B4-BE49-F238E27FC236}">
+                <a16:creationId xmlns:a16="http://schemas.microsoft.com/office/drawing/2014/main" id="{AD683D8F-C9D3-4078-B2A6-FA1663C3D490}"/>
+              </a:ext>
+            </a:extLst>
+          </p:cNvPr>
+          <p:cNvSpPr/>
+          <p:nvPr/>
+        </p:nvSpPr>
+        <p:spPr>
+          <a:xfrm>
+            <a:off x="656822" y="4330650"/>
+            <a:ext cx="1403797" cy="830172"/>
+          </a:xfrm>
+          <a:prstGeom prst="flowChartOffpageConnector">
+            <a:avLst/>
+          </a:prstGeom>
+        </p:spPr>
+        <p:style>
+          <a:lnRef idx="2">
+            <a:schemeClr val="accent1">
+              <a:shade val="15000"/>
+            </a:schemeClr>
+          </a:lnRef>
+          <a:fillRef idx="1">
+            <a:schemeClr val="accent1"/>
+          </a:fillRef>
+          <a:effectRef idx="0">
+            <a:schemeClr val="accent1"/>
+          </a:effectRef>
+          <a:fontRef idx="minor">
+            <a:schemeClr val="lt1"/>
+          </a:fontRef>
+        </p:style>
+        <p:txBody>
+          <a:bodyPr rtlCol="0" anchor="ctr"/>
+          <a:lstStyle/>
+          <a:p>
+            <a:pPr algn="ctr"/>
+            <a:r>
+              <a:rPr kumimoji="1" lang="en-US" altLang="ja-JP" sz="1600" b="1" dirty="0">
+                <a:latin typeface="+mj-lt"/>
+              </a:rPr>
+              <a:t>Step2</a:t>
+            </a:r>
+            <a:endParaRPr kumimoji="1" lang="ja-JP" altLang="en-US" sz="1600" b="1" dirty="0">
+              <a:latin typeface="+mj-lt"/>
+            </a:endParaRPr>
+          </a:p>
+        </p:txBody>
+      </p:sp>
+      <p:sp>
+        <p:nvSpPr>
+          <p:cNvPr id="10" name="フローチャート: 他ページ結合子 9">
+            <a:extLst>
+              <a:ext uri="{FF2B5EF4-FFF2-40B4-BE49-F238E27FC236}">
+                <a16:creationId xmlns:a16="http://schemas.microsoft.com/office/drawing/2014/main" id="{9DDC8AEE-0D00-7D7F-387D-0E6422E6B24E}"/>
+              </a:ext>
+            </a:extLst>
+          </p:cNvPr>
+          <p:cNvSpPr/>
+          <p:nvPr/>
+        </p:nvSpPr>
+        <p:spPr>
+          <a:xfrm>
+            <a:off x="656821" y="5201134"/>
+            <a:ext cx="1403797" cy="830172"/>
+          </a:xfrm>
+          <a:prstGeom prst="flowChartOffpageConnector">
+            <a:avLst/>
+          </a:prstGeom>
+        </p:spPr>
+        <p:style>
+          <a:lnRef idx="2">
+            <a:schemeClr val="accent1">
+              <a:shade val="15000"/>
+            </a:schemeClr>
+          </a:lnRef>
+          <a:fillRef idx="1">
+            <a:schemeClr val="accent1"/>
+          </a:fillRef>
+          <a:effectRef idx="0">
+            <a:schemeClr val="accent1"/>
+          </a:effectRef>
+          <a:fontRef idx="minor">
+            <a:schemeClr val="lt1"/>
+          </a:fontRef>
+        </p:style>
+        <p:txBody>
+          <a:bodyPr rtlCol="0" anchor="ctr"/>
+          <a:lstStyle/>
+          <a:p>
+            <a:pPr algn="ctr"/>
+            <a:r>
+              <a:rPr kumimoji="1" lang="en-US" altLang="ja-JP" sz="1600" b="1" dirty="0">
+                <a:latin typeface="+mj-lt"/>
+              </a:rPr>
+              <a:t>Step3</a:t>
+            </a:r>
+            <a:endParaRPr kumimoji="1" lang="ja-JP" altLang="en-US" sz="1600" b="1" dirty="0">
+              <a:latin typeface="+mj-lt"/>
+            </a:endParaRPr>
+          </a:p>
+        </p:txBody>
+      </p:sp>
+      <p:sp>
+        <p:nvSpPr>
+          <p:cNvPr id="12" name="テキスト ボックス 11">
+            <a:extLst>
+              <a:ext uri="{FF2B5EF4-FFF2-40B4-BE49-F238E27FC236}">
+                <a16:creationId xmlns:a16="http://schemas.microsoft.com/office/drawing/2014/main" id="{3894E7B0-12D2-45A5-A463-7CAFAB8F40AA}"/>
+              </a:ext>
+            </a:extLst>
+          </p:cNvPr>
+          <p:cNvSpPr txBox="1"/>
+          <p:nvPr/>
+        </p:nvSpPr>
+        <p:spPr>
+          <a:xfrm>
+            <a:off x="2461797" y="3721365"/>
+            <a:ext cx="4951926" cy="307777"/>
+          </a:xfrm>
+          <a:prstGeom prst="rect">
+            <a:avLst/>
+          </a:prstGeom>
+          <a:noFill/>
+        </p:spPr>
+        <p:txBody>
+          <a:bodyPr wrap="square">
+            <a:spAutoFit/>
+          </a:bodyPr>
+          <a:lstStyle/>
+          <a:p>
+            <a:pPr lvl="1"/>
+            <a:r>
+              <a:rPr lang="ja-JP" altLang="en-US" dirty="0">
+                <a:latin typeface="Arial"/>
+                <a:ea typeface="Arial"/>
+              </a:rPr>
+              <a:t>二つの</a:t>
+            </a:r>
+            <a:r>
+              <a:rPr lang="en-US" altLang="ja-JP" dirty="0">
+                <a:latin typeface="Arial"/>
+                <a:ea typeface="Arial"/>
+              </a:rPr>
+              <a:t>OCXO</a:t>
+            </a:r>
+            <a:r>
+              <a:rPr lang="ja-JP" altLang="en-US" dirty="0">
+                <a:latin typeface="Arial"/>
+                <a:ea typeface="Arial"/>
+              </a:rPr>
+              <a:t>の平均に対して同期させる</a:t>
+            </a:r>
+          </a:p>
+        </p:txBody>
+      </p:sp>
+      <p:sp>
+        <p:nvSpPr>
+          <p:cNvPr id="14" name="テキスト ボックス 13">
+            <a:extLst>
+              <a:ext uri="{FF2B5EF4-FFF2-40B4-BE49-F238E27FC236}">
+                <a16:creationId xmlns:a16="http://schemas.microsoft.com/office/drawing/2014/main" id="{DE56E0D7-3BE7-7AB1-F460-7CA6A1FDFC7F}"/>
+              </a:ext>
+            </a:extLst>
+          </p:cNvPr>
+          <p:cNvSpPr txBox="1"/>
+          <p:nvPr/>
+        </p:nvSpPr>
+        <p:spPr>
+          <a:xfrm>
+            <a:off x="2461797" y="4591848"/>
+            <a:ext cx="4951926" cy="307777"/>
+          </a:xfrm>
+          <a:prstGeom prst="rect">
+            <a:avLst/>
+          </a:prstGeom>
+          <a:noFill/>
+        </p:spPr>
+        <p:txBody>
+          <a:bodyPr wrap="square">
+            <a:spAutoFit/>
+          </a:bodyPr>
+          <a:lstStyle/>
+          <a:p>
+            <a:pPr lvl="1"/>
+            <a:r>
+              <a:rPr lang="ja-JP" altLang="en-US" dirty="0">
+                <a:latin typeface="Arial"/>
+                <a:ea typeface="Arial"/>
+              </a:rPr>
+              <a:t>同期した</a:t>
+            </a:r>
+            <a:r>
+              <a:rPr lang="en-US" altLang="ja-JP" dirty="0">
+                <a:latin typeface="Arial"/>
+                <a:ea typeface="Arial"/>
+              </a:rPr>
+              <a:t>OCXO</a:t>
+            </a:r>
+            <a:r>
+              <a:rPr lang="ja-JP" altLang="en-US" dirty="0">
+                <a:latin typeface="Arial"/>
+                <a:ea typeface="Arial"/>
+              </a:rPr>
+              <a:t>を合成器で平均し</a:t>
+            </a:r>
+            <a:r>
+              <a:rPr lang="ja-JP" altLang="en-US" dirty="0"/>
+              <a:t>測定</a:t>
+            </a:r>
+            <a:endParaRPr lang="ja-JP" altLang="en-US" dirty="0">
+              <a:latin typeface="Arial"/>
+              <a:ea typeface="Arial"/>
+            </a:endParaRPr>
+          </a:p>
+        </p:txBody>
+      </p:sp>
+      <p:sp>
+        <p:nvSpPr>
+          <p:cNvPr id="16" name="テキスト ボックス 15">
+            <a:extLst>
+              <a:ext uri="{FF2B5EF4-FFF2-40B4-BE49-F238E27FC236}">
+                <a16:creationId xmlns:a16="http://schemas.microsoft.com/office/drawing/2014/main" id="{DBA08A95-5A30-5DC1-F2F7-4B6B98949581}"/>
+              </a:ext>
+            </a:extLst>
+          </p:cNvPr>
+          <p:cNvSpPr txBox="1"/>
+          <p:nvPr/>
+        </p:nvSpPr>
+        <p:spPr>
+          <a:xfrm>
+            <a:off x="2461797" y="5462332"/>
+            <a:ext cx="4951926" cy="307777"/>
+          </a:xfrm>
+          <a:prstGeom prst="rect">
+            <a:avLst/>
+          </a:prstGeom>
+          <a:noFill/>
+        </p:spPr>
+        <p:txBody>
+          <a:bodyPr wrap="square">
+            <a:spAutoFit/>
+          </a:bodyPr>
+          <a:lstStyle/>
+          <a:p>
+            <a:pPr lvl="1"/>
+            <a:r>
+              <a:rPr lang="en-US" altLang="ja-JP" dirty="0">
+                <a:latin typeface="Arial"/>
+                <a:ea typeface="Arial"/>
+              </a:rPr>
+              <a:t>N</a:t>
+            </a:r>
+            <a:r>
+              <a:rPr lang="ja-JP" altLang="en-US" dirty="0">
+                <a:latin typeface="Arial"/>
+                <a:ea typeface="Arial"/>
+              </a:rPr>
+              <a:t>台へ拡張</a:t>
             </a:r>
           </a:p>
         </p:txBody>
       </p:sp>
     </p:spTree>
+  </p:cSld>
+  <p:clrMapOvr>
+    <a:masterClrMapping/>
+  </p:clrMapOvr>
+</p:sld>
+</file>
+
+<file path=ppt/slides/slide16.xml><?xml version="1.0" encoding="utf-8"?>
+<p:sld xmlns:a="http://schemas.openxmlformats.org/drawingml/2006/main" xmlns:r="http://schemas.openxmlformats.org/officeDocument/2006/relationships" xmlns:p="http://schemas.openxmlformats.org/presentationml/2006/main">
+  <p:cSld>
+    <p:spTree>
+      <p:nvGrpSpPr>
+        <p:cNvPr id="1" name=""/>
+        <p:cNvGrpSpPr/>
+        <p:nvPr/>
+      </p:nvGrpSpPr>
+      <p:grpSpPr>
+        <a:xfrm>
+          <a:off x="0" y="0"/>
+          <a:ext cx="0" cy="0"/>
+          <a:chOff x="0" y="0"/>
+          <a:chExt cx="0" cy="0"/>
+        </a:xfrm>
+      </p:grpSpPr>
+      <p:sp>
+        <p:nvSpPr>
+          <p:cNvPr id="2" name="タイトル 1">
+            <a:extLst>
+              <a:ext uri="{FF2B5EF4-FFF2-40B4-BE49-F238E27FC236}">
+                <a16:creationId xmlns:a16="http://schemas.microsoft.com/office/drawing/2014/main" id="{90480CC7-C2AC-AC42-A69E-25BFFC791958}"/>
+              </a:ext>
+            </a:extLst>
+          </p:cNvPr>
+          <p:cNvSpPr>
+            <a:spLocks noGrp="1"/>
+          </p:cNvSpPr>
+          <p:nvPr>
+            <p:ph type="title"/>
+          </p:nvPr>
+        </p:nvSpPr>
+        <p:spPr/>
+        <p:txBody>
+          <a:bodyPr/>
+          <a:lstStyle/>
+          <a:p>
+            <a:r>
+              <a:rPr kumimoji="1" lang="en-US" altLang="ja-JP" sz="1400" b="1" dirty="0">
+                <a:solidFill>
+                  <a:schemeClr val="bg1"/>
+                </a:solidFill>
+              </a:rPr>
+              <a:t>05</a:t>
+            </a:r>
+            <a:br>
+              <a:rPr kumimoji="1" lang="en-US" altLang="ja-JP" b="1" dirty="0"/>
+            </a:br>
+            <a:r>
+              <a:rPr kumimoji="1" lang="en-US" altLang="ja-JP" b="1" dirty="0"/>
+              <a:t>06.Appendix</a:t>
+            </a:r>
+            <a:endParaRPr kumimoji="1" lang="ja-JP" altLang="en-US" b="1"/>
+          </a:p>
+        </p:txBody>
+      </p:sp>
+      <p:sp>
+        <p:nvSpPr>
+          <p:cNvPr id="3" name="テキスト プレースホルダー 2">
+            <a:extLst>
+              <a:ext uri="{FF2B5EF4-FFF2-40B4-BE49-F238E27FC236}">
+                <a16:creationId xmlns:a16="http://schemas.microsoft.com/office/drawing/2014/main" id="{F7E80DAE-6024-3195-D2D4-EA3A5C54BC10}"/>
+              </a:ext>
+            </a:extLst>
+          </p:cNvPr>
+          <p:cNvSpPr>
+            <a:spLocks noGrp="1"/>
+          </p:cNvSpPr>
+          <p:nvPr>
+            <p:ph type="body" idx="1"/>
+          </p:nvPr>
+        </p:nvSpPr>
+        <p:spPr>
+          <a:xfrm>
+            <a:off x="213525" y="906114"/>
+            <a:ext cx="9101925" cy="628322"/>
+          </a:xfrm>
+        </p:spPr>
+        <p:txBody>
+          <a:bodyPr/>
+          <a:lstStyle/>
+          <a:p>
+            <a:r>
+              <a:rPr kumimoji="1" lang="en-US" altLang="ja-JP" sz="1800" dirty="0"/>
+              <a:t>Power laws for spectra and Allan variance</a:t>
+            </a:r>
+          </a:p>
+        </p:txBody>
+      </p:sp>
+      <p:pic>
+        <p:nvPicPr>
+          <p:cNvPr id="6" name="図 5" descr="ダイアグラム&#10;&#10;自動的に生成された説明">
+            <a:extLst>
+              <a:ext uri="{FF2B5EF4-FFF2-40B4-BE49-F238E27FC236}">
+                <a16:creationId xmlns:a16="http://schemas.microsoft.com/office/drawing/2014/main" id="{E1729760-8423-469D-DAB5-2C95D90C4793}"/>
+              </a:ext>
+            </a:extLst>
+          </p:cNvPr>
+          <p:cNvPicPr>
+            <a:picLocks noChangeAspect="1"/>
+          </p:cNvPicPr>
+          <p:nvPr/>
+        </p:nvPicPr>
+        <p:blipFill>
+          <a:blip r:embed="rId3"/>
+          <a:stretch>
+            <a:fillRect/>
+          </a:stretch>
+        </p:blipFill>
+        <p:spPr>
+          <a:xfrm>
+            <a:off x="3066651" y="1353233"/>
+            <a:ext cx="3772698" cy="5029424"/>
+          </a:xfrm>
+          <a:prstGeom prst="rect">
+            <a:avLst/>
+          </a:prstGeom>
+        </p:spPr>
+      </p:pic>
+      <p:cxnSp>
+        <p:nvCxnSpPr>
+          <p:cNvPr id="7" name="直線コネクタ 6">
+            <a:extLst>
+              <a:ext uri="{FF2B5EF4-FFF2-40B4-BE49-F238E27FC236}">
+                <a16:creationId xmlns:a16="http://schemas.microsoft.com/office/drawing/2014/main" id="{E8EBDA7F-41B7-8F02-8D98-66B5EF1431E8}"/>
+              </a:ext>
+            </a:extLst>
+          </p:cNvPr>
+          <p:cNvCxnSpPr>
+            <a:cxnSpLocks/>
+          </p:cNvCxnSpPr>
+          <p:nvPr/>
+        </p:nvCxnSpPr>
+        <p:spPr>
+          <a:xfrm flipH="1">
+            <a:off x="262215" y="6481500"/>
+            <a:ext cx="9381569" cy="0"/>
+          </a:xfrm>
+          <a:prstGeom prst="line">
+            <a:avLst/>
+          </a:prstGeom>
+        </p:spPr>
+        <p:style>
+          <a:lnRef idx="1">
+            <a:schemeClr val="dk1"/>
+          </a:lnRef>
+          <a:fillRef idx="0">
+            <a:schemeClr val="dk1"/>
+          </a:fillRef>
+          <a:effectRef idx="0">
+            <a:schemeClr val="dk1"/>
+          </a:effectRef>
+          <a:fontRef idx="minor">
+            <a:schemeClr val="tx1"/>
+          </a:fontRef>
+        </p:style>
+      </p:cxnSp>
+      <p:sp>
+        <p:nvSpPr>
+          <p:cNvPr id="8" name="テキスト ボックス 7">
+            <a:extLst>
+              <a:ext uri="{FF2B5EF4-FFF2-40B4-BE49-F238E27FC236}">
+                <a16:creationId xmlns:a16="http://schemas.microsoft.com/office/drawing/2014/main" id="{0328309F-53FC-9D69-213A-15BA930524BE}"/>
+              </a:ext>
+            </a:extLst>
+          </p:cNvPr>
+          <p:cNvSpPr txBox="1"/>
+          <p:nvPr/>
+        </p:nvSpPr>
+        <p:spPr>
+          <a:xfrm>
+            <a:off x="323502" y="6505048"/>
+            <a:ext cx="9258993" cy="307777"/>
+          </a:xfrm>
+          <a:prstGeom prst="rect">
+            <a:avLst/>
+          </a:prstGeom>
+          <a:noFill/>
+        </p:spPr>
+        <p:txBody>
+          <a:bodyPr wrap="square" rtlCol="0">
+            <a:spAutoFit/>
+          </a:bodyPr>
+          <a:lstStyle/>
+          <a:p>
+            <a:r>
+              <a:rPr lang="en-US" altLang="ja-JP" dirty="0"/>
+              <a:t>Enrico </a:t>
+            </a:r>
+            <a:r>
+              <a:rPr lang="en-US" altLang="ja-JP" dirty="0" err="1"/>
+              <a:t>Rubiola</a:t>
+            </a:r>
+            <a:r>
+              <a:rPr lang="en-US" altLang="ja-JP" dirty="0"/>
+              <a:t>, Phase Noise and Frequency Stability in Oscillators</a:t>
+            </a:r>
+          </a:p>
+        </p:txBody>
+      </p:sp>
+    </p:spTree>
+    <p:extLst>
+      <p:ext uri="{BB962C8B-B14F-4D97-AF65-F5344CB8AC3E}">
+        <p14:creationId xmlns:p14="http://schemas.microsoft.com/office/powerpoint/2010/main" val="3550089105"/>
+      </p:ext>
+    </p:extLst>
   </p:cSld>
   <p:clrMapOvr>
     <a:masterClrMapping/>
@@ -9145,704 +10556,6 @@
         <p14:creationId xmlns:p14="http://schemas.microsoft.com/office/powerpoint/2010/main" val="3626579769"/>
       </p:ext>
     </p:extLst>
-  </p:cSld>
-  <p:clrMapOvr>
-    <a:masterClrMapping/>
-  </p:clrMapOvr>
-</p:sld>
-</file>
-
-<file path=ppt/slides/slide20.xml><?xml version="1.0" encoding="utf-8"?>
-<p:sld xmlns:a="http://schemas.openxmlformats.org/drawingml/2006/main" xmlns:p="http://schemas.openxmlformats.org/presentationml/2006/main" xmlns:r="http://schemas.openxmlformats.org/officeDocument/2006/relationships">
-  <p:cSld>
-    <p:spTree>
-      <p:nvGrpSpPr>
-        <p:cNvPr id="1" name=""/>
-        <p:cNvGrpSpPr/>
-        <p:nvPr/>
-      </p:nvGrpSpPr>
-      <p:grpSpPr/>
-      <p:sp>
-        <p:nvSpPr>
-          <p:cNvPr id="2" name="Title 1"/>
-          <p:cNvSpPr>
-            <a:spLocks noGrp="1"/>
-          </p:cNvSpPr>
-          <p:nvPr>
-            <p:ph type="title"/>
-          </p:nvPr>
-        </p:nvSpPr>
-        <p:spPr>
-          <a:xfrm>
-            <a:off x="228600" y="237744"/>
-            <a:ext cx="9473184" cy="969264"/>
-          </a:xfrm>
-        </p:spPr>
-        <p:txBody>
-          <a:bodyPr/>
-          <a:lstStyle/>
-          <a:p>
-            <a:pPr>
-              <a:spcBef>
-                <a:spcPts val="0"/>
-              </a:spcBef>
-              <a:spcAft>
-                <a:spcPts val="0"/>
-              </a:spcAft>
-            </a:pPr>
-            <a:r>
-              <a:rPr sz="1400" b="1">
-                <a:solidFill>
-                  <a:srgbClr val="000F78"/>
-                </a:solidFill>
-                <a:latin typeface="Arial"/>
-                <a:ea typeface="Arial"/>
-              </a:rPr>
-              <a:t>04. 研究方法</a:t>
-            </a:r>
-          </a:p>
-          <a:p>
-            <a:pPr>
-              <a:spcBef>
-                <a:spcPts val="0"/>
-              </a:spcBef>
-              <a:spcAft>
-                <a:spcPts val="0"/>
-              </a:spcAft>
-            </a:pPr>
-            <a:r>
-              <a:rPr b="1">
-                <a:solidFill>
-                  <a:srgbClr val="000F78"/>
-                </a:solidFill>
-                <a:latin typeface="Arial"/>
-                <a:ea typeface="Arial"/>
-              </a:rPr>
-              <a:t>4-4. 予備実験：フィードバック電圧の感応度同定</a:t>
-            </a:r>
-          </a:p>
-        </p:txBody>
-      </p:sp>
-      <p:sp>
-        <p:nvSpPr>
-          <p:cNvPr id="3" name="Text Placeholder 2"/>
-          <p:cNvSpPr>
-            <a:spLocks noGrp="1"/>
-          </p:cNvSpPr>
-          <p:nvPr>
-            <p:ph type="body" idx="1"/>
-          </p:nvPr>
-        </p:nvSpPr>
-        <p:spPr>
-          <a:xfrm>
-            <a:off x="274320" y="932688"/>
-            <a:ext cx="9326880" cy="1810512"/>
-          </a:xfrm>
-        </p:spPr>
-        <p:txBody>
-          <a:bodyPr wrap="square"/>
-          <a:lstStyle/>
-          <a:p>
-            <a:pPr/>
-            <a:r>
-              <a:rPr b="1">
-                <a:solidFill>
-                  <a:srgbClr val="1B2A5A"/>
-                </a:solidFill>
-                <a:latin typeface="Arial"/>
-                <a:ea typeface="Arial"/>
-              </a:rPr>
-              <a:t>フィードバック電圧のLSBを測定し回帰検証することで、フィードバックロジックのパラメータをチューニングした。</a:t>
-            </a:r>
-          </a:p>
-          <a:p>
-            <a:pPr lvl="1"/>
-            <a:r>
-              <a:rPr>
-                <a:latin typeface="Arial"/>
-                <a:ea typeface="Arial"/>
-              </a:rPr>
-              <a:t>1 LSB（≈305 µV）ずつ階段状に電圧を変え、各段の FRFR 傾きを電圧増分に直線回帰</a:t>
-            </a:r>
-          </a:p>
-          <a:p>
-            <a:pPr lvl="1"/>
-            <a:r>
-              <a:rPr>
-                <a:latin typeface="Arial"/>
-                <a:ea typeface="Arial"/>
-              </a:rPr>
-              <a:t>→ プラントゲイン K≈860 ns/(V·s) が得られた</a:t>
-            </a:r>
-          </a:p>
-        </p:txBody>
-      </p:sp>
-      <p:pic>
-        <p:nvPicPr>
-          <p:cNvPr id="4" name="Picture 3" descr="image.png"/>
-          <p:cNvPicPr>
-            <a:picLocks noChangeAspect="1"/>
-          </p:cNvPicPr>
-          <p:nvPr/>
-        </p:nvPicPr>
-        <p:blipFill>
-          <a:blip r:embed="rId2"/>
-          <a:stretch>
-            <a:fillRect/>
-          </a:stretch>
-        </p:blipFill>
-        <p:spPr>
-          <a:xfrm>
-            <a:off x="1786748" y="2816352"/>
-            <a:ext cx="6302023" cy="3493008"/>
-          </a:xfrm>
-          <a:prstGeom prst="rect">
-            <a:avLst/>
-          </a:prstGeom>
-        </p:spPr>
-      </p:pic>
-    </p:spTree>
-  </p:cSld>
-  <p:clrMapOvr>
-    <a:masterClrMapping/>
-  </p:clrMapOvr>
-</p:sld>
-</file>
-
-<file path=ppt/slides/slide21.xml><?xml version="1.0" encoding="utf-8"?>
-<p:sld xmlns:a="http://schemas.openxmlformats.org/drawingml/2006/main" xmlns:p="http://schemas.openxmlformats.org/presentationml/2006/main" xmlns:r="http://schemas.openxmlformats.org/officeDocument/2006/relationships">
-  <p:cSld>
-    <p:spTree>
-      <p:nvGrpSpPr>
-        <p:cNvPr id="1" name=""/>
-        <p:cNvGrpSpPr/>
-        <p:nvPr/>
-      </p:nvGrpSpPr>
-      <p:grpSpPr/>
-      <p:sp>
-        <p:nvSpPr>
-          <p:cNvPr id="2" name="Title 1"/>
-          <p:cNvSpPr>
-            <a:spLocks noGrp="1"/>
-          </p:cNvSpPr>
-          <p:nvPr>
-            <p:ph type="title"/>
-          </p:nvPr>
-        </p:nvSpPr>
-        <p:spPr>
-          <a:xfrm>
-            <a:off x="228600" y="237744"/>
-            <a:ext cx="9473184" cy="969264"/>
-          </a:xfrm>
-        </p:spPr>
-        <p:txBody>
-          <a:bodyPr/>
-          <a:lstStyle/>
-          <a:p>
-            <a:pPr>
-              <a:spcBef>
-                <a:spcPts val="0"/>
-              </a:spcBef>
-              <a:spcAft>
-                <a:spcPts val="0"/>
-              </a:spcAft>
-            </a:pPr>
-            <a:r>
-              <a:rPr sz="1400" b="1">
-                <a:solidFill>
-                  <a:srgbClr val="000F78"/>
-                </a:solidFill>
-                <a:latin typeface="Arial"/>
-                <a:ea typeface="Arial"/>
-              </a:rPr>
-              <a:t>04. 研究方法</a:t>
-            </a:r>
-          </a:p>
-          <a:p>
-            <a:pPr>
-              <a:spcBef>
-                <a:spcPts val="0"/>
-              </a:spcBef>
-              <a:spcAft>
-                <a:spcPts val="0"/>
-              </a:spcAft>
-            </a:pPr>
-            <a:r>
-              <a:rPr b="1">
-                <a:solidFill>
-                  <a:srgbClr val="000F78"/>
-                </a:solidFill>
-                <a:latin typeface="Arial"/>
-                <a:ea typeface="Arial"/>
-              </a:rPr>
-              <a:t>4-5. フィードバックロジック</a:t>
-            </a:r>
-          </a:p>
-        </p:txBody>
-      </p:sp>
-      <p:sp>
-        <p:nvSpPr>
-          <p:cNvPr id="3" name="Text Placeholder 2"/>
-          <p:cNvSpPr>
-            <a:spLocks noGrp="1"/>
-          </p:cNvSpPr>
-          <p:nvPr>
-            <p:ph type="body" idx="1"/>
-          </p:nvPr>
-        </p:nvSpPr>
-        <p:spPr>
-          <a:xfrm>
-            <a:off x="274320" y="932688"/>
-            <a:ext cx="9326880" cy="2487168"/>
-          </a:xfrm>
-        </p:spPr>
-        <p:txBody>
-          <a:bodyPr wrap="square"/>
-          <a:lstStyle/>
-          <a:p>
-            <a:pPr/>
-            <a:r>
-              <a:rPr b="1">
-                <a:solidFill>
-                  <a:srgbClr val="1B2A5A"/>
-                </a:solidFill>
-                <a:latin typeface="Arial"/>
-                <a:ea typeface="Arial"/>
-              </a:rPr>
-              <a:t>位相のズレ e と周波数のズレ Δf を使う2状態フィードバックで、必要な分だけ電圧を動かす（1 LSB 未満は動かさない＝不感帯）。同期動作そのものが位相雑音を持ち込まない。</a:t>
-            </a:r>
-          </a:p>
-          <a:p>
-            <a:pPr lvl="1"/>
-            <a:r>
-              <a:rPr>
-                <a:latin typeface="Arial"/>
-                <a:ea typeface="Arial"/>
-              </a:rPr>
-              <a:t>出自：ACC（車両追従制御）の状態方程式を波動系へ置き換え</a:t>
-            </a:r>
-          </a:p>
-          <a:p>
-            <a:pPr lvl="1"/>
-            <a:r>
-              <a:rPr>
-                <a:latin typeface="Arial"/>
-                <a:ea typeface="Arial"/>
-              </a:rPr>
-              <a:t>更新：Δf_des=clamp(Kp_e·e) → 必要段数 dN=round(...) → 電圧更新</a:t>
-            </a:r>
-          </a:p>
-          <a:p>
-            <a:pPr lvl="1"/>
-            <a:r>
-              <a:rPr>
-                <a:latin typeface="Arial"/>
-                <a:ea typeface="Arial"/>
-              </a:rPr>
-              <a:t>不感帯で静かに同期。比例・微分（PID）は過剰動作で短期雑音（対比）</a:t>
-            </a:r>
-          </a:p>
-        </p:txBody>
-      </p:sp>
-      <p:pic>
-        <p:nvPicPr>
-          <p:cNvPr id="4" name="Picture 3" descr="image.png"/>
-          <p:cNvPicPr>
-            <a:picLocks noChangeAspect="1"/>
-          </p:cNvPicPr>
-          <p:nvPr/>
-        </p:nvPicPr>
-        <p:blipFill>
-          <a:blip r:embed="rId2"/>
-          <a:stretch>
-            <a:fillRect/>
-          </a:stretch>
-        </p:blipFill>
-        <p:spPr>
-          <a:xfrm>
-            <a:off x="457200" y="4003997"/>
-            <a:ext cx="4449927" cy="1702933"/>
-          </a:xfrm>
-          <a:prstGeom prst="rect">
-            <a:avLst/>
-          </a:prstGeom>
-        </p:spPr>
-      </p:pic>
-      <p:pic>
-        <p:nvPicPr>
-          <p:cNvPr id="5" name="Picture 4" descr="image.png"/>
-          <p:cNvPicPr>
-            <a:picLocks noChangeAspect="1"/>
-          </p:cNvPicPr>
-          <p:nvPr/>
-        </p:nvPicPr>
-        <p:blipFill>
-          <a:blip r:embed="rId3"/>
-          <a:stretch>
-            <a:fillRect/>
-          </a:stretch>
-        </p:blipFill>
-        <p:spPr>
-          <a:xfrm>
-            <a:off x="4998567" y="3597190"/>
-            <a:ext cx="4449927" cy="2516547"/>
-          </a:xfrm>
-          <a:prstGeom prst="rect">
-            <a:avLst/>
-          </a:prstGeom>
-        </p:spPr>
-      </p:pic>
-    </p:spTree>
-  </p:cSld>
-  <p:clrMapOvr>
-    <a:masterClrMapping/>
-  </p:clrMapOvr>
-</p:sld>
-</file>
-
-<file path=ppt/slides/slide22.xml><?xml version="1.0" encoding="utf-8"?>
-<p:sld xmlns:a="http://schemas.openxmlformats.org/drawingml/2006/main" xmlns:p="http://schemas.openxmlformats.org/presentationml/2006/main" xmlns:r="http://schemas.openxmlformats.org/officeDocument/2006/relationships">
-  <p:cSld>
-    <p:spTree>
-      <p:nvGrpSpPr>
-        <p:cNvPr id="1" name=""/>
-        <p:cNvGrpSpPr/>
-        <p:nvPr/>
-      </p:nvGrpSpPr>
-      <p:grpSpPr/>
-      <p:sp>
-        <p:nvSpPr>
-          <p:cNvPr id="2" name="Title 1"/>
-          <p:cNvSpPr>
-            <a:spLocks noGrp="1"/>
-          </p:cNvSpPr>
-          <p:nvPr>
-            <p:ph type="title"/>
-          </p:nvPr>
-        </p:nvSpPr>
-        <p:spPr>
-          <a:xfrm>
-            <a:off x="228600" y="237744"/>
-            <a:ext cx="9473184" cy="969264"/>
-          </a:xfrm>
-        </p:spPr>
-        <p:txBody>
-          <a:bodyPr/>
-          <a:lstStyle/>
-          <a:p>
-            <a:pPr>
-              <a:spcBef>
-                <a:spcPts val="0"/>
-              </a:spcBef>
-              <a:spcAft>
-                <a:spcPts val="0"/>
-              </a:spcAft>
-            </a:pPr>
-            <a:r>
-              <a:rPr b="1">
-                <a:solidFill>
-                  <a:srgbClr val="000F78"/>
-                </a:solidFill>
-                <a:latin typeface="Arial"/>
-                <a:ea typeface="Arial"/>
-              </a:rPr>
-              <a:t>05. 実験と結果</a:t>
-            </a:r>
-          </a:p>
-        </p:txBody>
-      </p:sp>
-      <p:sp>
-        <p:nvSpPr>
-          <p:cNvPr id="3" name="Text Placeholder 2"/>
-          <p:cNvSpPr>
-            <a:spLocks noGrp="1"/>
-          </p:cNvSpPr>
-          <p:nvPr>
-            <p:ph type="body" idx="1"/>
-          </p:nvPr>
-        </p:nvSpPr>
-        <p:spPr>
-          <a:xfrm>
-            <a:off x="274320" y="932688"/>
-            <a:ext cx="9326880" cy="1810512"/>
-          </a:xfrm>
-        </p:spPr>
-        <p:txBody>
-          <a:bodyPr wrap="square"/>
-          <a:lstStyle/>
-          <a:p>
-            <a:pPr/>
-            <a:r>
-              <a:rPr b="1">
-                <a:solidFill>
-                  <a:srgbClr val="1B2A5A"/>
-                </a:solidFill>
-                <a:latin typeface="Arial"/>
-                <a:ea typeface="Arial"/>
-              </a:rPr>
-              <a:t>実測モデルに基づくモデルFB（Kp_e=0.08）は、無制御HOLDと同等の近傍位相雑音のまま同期できる（差≈0 dB）＝同期時に位相雑音を持ち込まない。PID制御は短期雑音を生む（対比）。</a:t>
-            </a:r>
-          </a:p>
-          <a:p>
-            <a:pPr lvl="1"/>
-            <a:r>
-              <a:rPr>
-                <a:latin typeface="Arial"/>
-                <a:ea typeface="Arial"/>
-              </a:rPr>
-              <a:t>モデルFB と HOLD の近傍位相雑音がほぼ一致（差≈0 dB）</a:t>
-            </a:r>
-          </a:p>
-          <a:p>
-            <a:pPr lvl="1"/>
-            <a:r>
-              <a:rPr>
-                <a:latin typeface="Arial"/>
-                <a:ea typeface="Arial"/>
-              </a:rPr>
-              <a:t>比例・微分（PID）制御は過剰動作で短期ジッタを注入</a:t>
-            </a:r>
-          </a:p>
-        </p:txBody>
-      </p:sp>
-      <p:pic>
-        <p:nvPicPr>
-          <p:cNvPr id="4" name="Picture 3" descr="image.png"/>
-          <p:cNvPicPr>
-            <a:picLocks noChangeAspect="1"/>
-          </p:cNvPicPr>
-          <p:nvPr/>
-        </p:nvPicPr>
-        <p:blipFill>
-          <a:blip r:embed="rId2"/>
-          <a:stretch>
-            <a:fillRect/>
-          </a:stretch>
-        </p:blipFill>
-        <p:spPr>
-          <a:xfrm>
-            <a:off x="457200" y="2968507"/>
-            <a:ext cx="4449927" cy="3097257"/>
-          </a:xfrm>
-          <a:prstGeom prst="rect">
-            <a:avLst/>
-          </a:prstGeom>
-        </p:spPr>
-      </p:pic>
-      <p:pic>
-        <p:nvPicPr>
-          <p:cNvPr id="5" name="Picture 4" descr="image.png"/>
-          <p:cNvPicPr>
-            <a:picLocks noChangeAspect="1"/>
-          </p:cNvPicPr>
-          <p:nvPr/>
-        </p:nvPicPr>
-        <p:blipFill>
-          <a:blip r:embed="rId3"/>
-          <a:stretch>
-            <a:fillRect/>
-          </a:stretch>
-        </p:blipFill>
-        <p:spPr>
-          <a:xfrm>
-            <a:off x="4998567" y="2968507"/>
-            <a:ext cx="4449927" cy="3097257"/>
-          </a:xfrm>
-          <a:prstGeom prst="rect">
-            <a:avLst/>
-          </a:prstGeom>
-        </p:spPr>
-      </p:pic>
-    </p:spTree>
-  </p:cSld>
-  <p:clrMapOvr>
-    <a:masterClrMapping/>
-  </p:clrMapOvr>
-</p:sld>
-</file>
-
-<file path=ppt/slides/slide23.xml><?xml version="1.0" encoding="utf-8"?>
-<p:sld xmlns:a="http://schemas.openxmlformats.org/drawingml/2006/main" xmlns:p="http://schemas.openxmlformats.org/presentationml/2006/main" xmlns:r="http://schemas.openxmlformats.org/officeDocument/2006/relationships">
-  <p:cSld>
-    <p:spTree>
-      <p:nvGrpSpPr>
-        <p:cNvPr id="1" name=""/>
-        <p:cNvGrpSpPr/>
-        <p:nvPr/>
-      </p:nvGrpSpPr>
-      <p:grpSpPr/>
-      <p:sp>
-        <p:nvSpPr>
-          <p:cNvPr id="2" name="Title 1"/>
-          <p:cNvSpPr>
-            <a:spLocks noGrp="1"/>
-          </p:cNvSpPr>
-          <p:nvPr>
-            <p:ph type="title"/>
-          </p:nvPr>
-        </p:nvSpPr>
-        <p:spPr>
-          <a:xfrm>
-            <a:off x="228600" y="237744"/>
-            <a:ext cx="9473184" cy="969264"/>
-          </a:xfrm>
-        </p:spPr>
-        <p:txBody>
-          <a:bodyPr/>
-          <a:lstStyle/>
-          <a:p>
-            <a:pPr>
-              <a:spcBef>
-                <a:spcPts val="0"/>
-              </a:spcBef>
-              <a:spcAft>
-                <a:spcPts val="0"/>
-              </a:spcAft>
-            </a:pPr>
-            <a:r>
-              <a:rPr b="1">
-                <a:solidFill>
-                  <a:srgbClr val="000F78"/>
-                </a:solidFill>
-                <a:latin typeface="Arial"/>
-                <a:ea typeface="Arial"/>
-              </a:rPr>
-              <a:t>06. 考察と今後の展望</a:t>
-            </a:r>
-          </a:p>
-        </p:txBody>
-      </p:sp>
-      <p:sp>
-        <p:nvSpPr>
-          <p:cNvPr id="3" name="Text Placeholder 2"/>
-          <p:cNvSpPr>
-            <a:spLocks noGrp="1"/>
-          </p:cNvSpPr>
-          <p:nvPr>
-            <p:ph type="body" idx="1"/>
-          </p:nvPr>
-        </p:nvSpPr>
-        <p:spPr>
-          <a:xfrm>
-            <a:off x="274320" y="932688"/>
-            <a:ext cx="9326880" cy="2487168"/>
-          </a:xfrm>
-        </p:spPr>
-        <p:txBody>
-          <a:bodyPr wrap="square"/>
-          <a:lstStyle/>
-          <a:p>
-            <a:pPr/>
-            <a:r>
-              <a:rPr b="1">
-                <a:solidFill>
-                  <a:srgbClr val="1B2A5A"/>
-                </a:solidFill>
-                <a:latin typeface="Arial"/>
-                <a:ea typeface="Arial"/>
-              </a:rPr>
-              <a:t>フィードバック制御により、近傍位相雑音（同期動作に伴う短期の位相ゆらぎ）を持ち込まずに同期させることに成功した。今後は2台を同時制御・合成器で平均して −3 dB を実証し、N台へ拡張する。</a:t>
-            </a:r>
-          </a:p>
-          <a:p>
-            <a:pPr lvl="1"/>
-            <a:r>
-              <a:rPr>
-                <a:latin typeface="Arial"/>
-                <a:ea typeface="Arial"/>
-              </a:rPr>
-              <a:t>現状：実測モデルに基づくFBで近傍位相雑音を注入せず同期を実現</a:t>
-            </a:r>
-          </a:p>
-          <a:p>
-            <a:pPr lvl="1"/>
-            <a:r>
-              <a:rPr>
-                <a:latin typeface="Arial"/>
-                <a:ea typeface="Arial"/>
-              </a:rPr>
-              <a:t>Step1：二つのOCXOの平均に対して同期させる</a:t>
-            </a:r>
-          </a:p>
-          <a:p>
-            <a:pPr lvl="1"/>
-            <a:r>
-              <a:rPr>
-                <a:latin typeface="Arial"/>
-                <a:ea typeface="Arial"/>
-              </a:rPr>
-              <a:t>Step2：同期したOCXOを合成器で平均し測定</a:t>
-            </a:r>
-          </a:p>
-          <a:p>
-            <a:pPr lvl="1"/>
-            <a:r>
-              <a:rPr>
-                <a:latin typeface="Arial"/>
-                <a:ea typeface="Arial"/>
-              </a:rPr>
-              <a:t>Step3：N台へ拡張</a:t>
-            </a:r>
-          </a:p>
-        </p:txBody>
-      </p:sp>
-      <p:sp>
-        <p:nvSpPr>
-          <p:cNvPr id="4" name="Rounded Rectangle 3"/>
-          <p:cNvSpPr/>
-          <p:nvPr/>
-        </p:nvSpPr>
-        <p:spPr>
-          <a:xfrm>
-            <a:off x="1463040" y="3493008"/>
-            <a:ext cx="6949440" cy="2862072"/>
-          </a:xfrm>
-          <a:prstGeom prst="roundRect">
-            <a:avLst/>
-          </a:prstGeom>
-          <a:solidFill>
-            <a:srgbClr val="F2F2F2"/>
-          </a:solidFill>
-          <a:ln w="12700">
-            <a:solidFill>
-              <a:srgbClr val="595959"/>
-            </a:solidFill>
-          </a:ln>
-          <a:effectLst/>
-        </p:spPr>
-        <p:style>
-          <a:lnRef idx="1">
-            <a:schemeClr val="accent1"/>
-          </a:lnRef>
-          <a:fillRef idx="3">
-            <a:schemeClr val="accent1"/>
-          </a:fillRef>
-          <a:effectRef idx="2">
-            <a:schemeClr val="accent1"/>
-          </a:effectRef>
-          <a:fontRef idx="minor">
-            <a:schemeClr val="lt1"/>
-          </a:fontRef>
-        </p:style>
-        <p:txBody>
-          <a:bodyPr rtlCol="0" anchor="ctr" wrap="square"/>
-          <a:lstStyle/>
-          <a:p>
-            <a:pPr algn="ctr"/>
-            <a:r>
-              <a:rPr sz="1200">
-                <a:solidFill>
-                  <a:srgbClr val="595959"/>
-                </a:solidFill>
-                <a:latin typeface="Arial"/>
-                <a:ea typeface="Arial"/>
-              </a:rPr>
-              <a:t>今後のロードマップ（片方向同期 → 平均で −3 dB → N台 → 双方向結合）</a:t>
-            </a:r>
-          </a:p>
-        </p:txBody>
-      </p:sp>
-    </p:spTree>
   </p:cSld>
   <p:clrMapOvr>
     <a:masterClrMapping/>
@@ -11436,7 +12149,7 @@
         </p:blipFill>
         <p:spPr>
           <a:xfrm>
-            <a:off x="1244755" y="2214879"/>
+            <a:off x="1265665" y="1986279"/>
             <a:ext cx="7486593" cy="4121040"/>
           </a:xfrm>
           <a:prstGeom prst="rect">
@@ -11527,6 +12240,3020 @@
           </a:p>
         </p:txBody>
       </p:sp>
+    </p:spTree>
+  </p:cSld>
+  <p:clrMapOvr>
+    <a:masterClrMapping/>
+  </p:clrMapOvr>
+</p:sld>
+</file>
+
+<file path=ppt/slides/slide5.xml><?xml version="1.0" encoding="utf-8"?>
+<p:sld xmlns:a="http://schemas.openxmlformats.org/drawingml/2006/main" xmlns:r="http://schemas.openxmlformats.org/officeDocument/2006/relationships" xmlns:p="http://schemas.openxmlformats.org/presentationml/2006/main">
+  <p:cSld>
+    <p:spTree>
+      <p:nvGrpSpPr>
+        <p:cNvPr id="1" name=""/>
+        <p:cNvGrpSpPr/>
+        <p:nvPr/>
+      </p:nvGrpSpPr>
+      <p:grpSpPr>
+        <a:xfrm>
+          <a:off x="0" y="0"/>
+          <a:ext cx="0" cy="0"/>
+          <a:chOff x="0" y="0"/>
+          <a:chExt cx="0" cy="0"/>
+        </a:xfrm>
+      </p:grpSpPr>
+      <p:sp>
+        <p:nvSpPr>
+          <p:cNvPr id="2" name="Title 1"/>
+          <p:cNvSpPr>
+            <a:spLocks noGrp="1"/>
+          </p:cNvSpPr>
+          <p:nvPr>
+            <p:ph type="title"/>
+          </p:nvPr>
+        </p:nvSpPr>
+        <p:spPr>
+          <a:xfrm>
+            <a:off x="228600" y="237744"/>
+            <a:ext cx="9473184" cy="969264"/>
+          </a:xfrm>
+        </p:spPr>
+        <p:txBody>
+          <a:bodyPr/>
+          <a:lstStyle/>
+          <a:p>
+            <a:pPr>
+              <a:spcBef>
+                <a:spcPts val="0"/>
+              </a:spcBef>
+              <a:spcAft>
+                <a:spcPts val="0"/>
+              </a:spcAft>
+            </a:pPr>
+            <a:r>
+              <a:rPr b="1">
+                <a:solidFill>
+                  <a:srgbClr val="000F78"/>
+                </a:solidFill>
+                <a:latin typeface="Arial"/>
+                <a:ea typeface="Arial"/>
+              </a:rPr>
+              <a:t>02. 本研究の目標</a:t>
+            </a:r>
+          </a:p>
+        </p:txBody>
+      </p:sp>
+      <p:sp>
+        <p:nvSpPr>
+          <p:cNvPr id="3" name="Text Placeholder 2"/>
+          <p:cNvSpPr>
+            <a:spLocks noGrp="1"/>
+          </p:cNvSpPr>
+          <p:nvPr>
+            <p:ph type="body" idx="1"/>
+          </p:nvPr>
+        </p:nvSpPr>
+        <p:spPr>
+          <a:xfrm>
+            <a:off x="274320" y="932688"/>
+            <a:ext cx="9326880" cy="1810512"/>
+          </a:xfrm>
+        </p:spPr>
+        <p:txBody>
+          <a:bodyPr wrap="square"/>
+          <a:lstStyle/>
+          <a:p>
+            <a:r>
+              <a:rPr b="1" dirty="0" err="1">
+                <a:solidFill>
+                  <a:srgbClr val="1B2A5A"/>
+                </a:solidFill>
+                <a:latin typeface="Arial"/>
+                <a:ea typeface="Arial"/>
+              </a:rPr>
+              <a:t>安価なOCXOで可能な限り高純度な基準信号源を実現</a:t>
+            </a:r>
+            <a:r>
+              <a:rPr lang="ja-JP" altLang="en-US" b="1" dirty="0">
+                <a:solidFill>
+                  <a:srgbClr val="1B2A5A"/>
+                </a:solidFill>
+              </a:rPr>
+              <a:t>し、</a:t>
+            </a:r>
+            <a:r>
+              <a:rPr lang="en-US" altLang="ja-JP" b="1" dirty="0">
+                <a:solidFill>
+                  <a:srgbClr val="1B2A5A"/>
+                </a:solidFill>
+              </a:rPr>
+              <a:t>0.1-1Hz</a:t>
+            </a:r>
+            <a:r>
+              <a:rPr lang="ja-JP" altLang="en-US" b="1" dirty="0">
+                <a:solidFill>
+                  <a:srgbClr val="1B2A5A"/>
+                </a:solidFill>
+              </a:rPr>
+              <a:t>での位相ノイズ測定を実現</a:t>
+            </a:r>
+            <a:r>
+              <a:rPr b="1" dirty="0" err="1">
+                <a:solidFill>
+                  <a:srgbClr val="1B2A5A"/>
+                </a:solidFill>
+                <a:latin typeface="Arial"/>
+                <a:ea typeface="Arial"/>
+              </a:rPr>
+              <a:t>することを目標とする</a:t>
+            </a:r>
+            <a:r>
+              <a:rPr b="1" dirty="0">
+                <a:solidFill>
+                  <a:srgbClr val="1B2A5A"/>
+                </a:solidFill>
+                <a:latin typeface="Arial"/>
+                <a:ea typeface="Arial"/>
+              </a:rPr>
+              <a:t>。</a:t>
+            </a:r>
+          </a:p>
+          <a:p>
+            <a:pPr lvl="1"/>
+            <a:r>
+              <a:rPr dirty="0" err="1">
+                <a:latin typeface="Arial"/>
+                <a:ea typeface="Arial"/>
+              </a:rPr>
+              <a:t>究極的な目標：安価な水晶発振器（OCXO）で高純度な基準信号源を実現</a:t>
+            </a:r>
+            <a:endParaRPr dirty="0">
+              <a:latin typeface="Arial"/>
+              <a:ea typeface="Arial"/>
+            </a:endParaRPr>
+          </a:p>
+          <a:p>
+            <a:pPr lvl="1"/>
+            <a:r>
+              <a:rPr dirty="0">
+                <a:latin typeface="Arial"/>
+                <a:ea typeface="Arial"/>
+              </a:rPr>
+              <a:t>アプローチ：複数OCXOを同期させ、1台では実現できない純度での計測を可能にする</a:t>
+            </a:r>
+          </a:p>
+        </p:txBody>
+      </p:sp>
+      <p:pic>
+        <p:nvPicPr>
+          <p:cNvPr id="5" name="Picture 4" descr="image.png">
+            <a:extLst>
+              <a:ext uri="{FF2B5EF4-FFF2-40B4-BE49-F238E27FC236}">
+                <a16:creationId xmlns:a16="http://schemas.microsoft.com/office/drawing/2014/main" id="{9701A711-972D-9916-5160-05066857DAEB}"/>
+              </a:ext>
+            </a:extLst>
+          </p:cNvPr>
+          <p:cNvPicPr>
+            <a:picLocks noChangeAspect="1"/>
+          </p:cNvPicPr>
+          <p:nvPr/>
+        </p:nvPicPr>
+        <p:blipFill>
+          <a:blip r:embed="rId2"/>
+          <a:stretch>
+            <a:fillRect/>
+          </a:stretch>
+        </p:blipFill>
+        <p:spPr>
+          <a:xfrm>
+            <a:off x="1733010" y="2552756"/>
+            <a:ext cx="6630628" cy="3649869"/>
+          </a:xfrm>
+          <a:prstGeom prst="rect">
+            <a:avLst/>
+          </a:prstGeom>
+        </p:spPr>
+      </p:pic>
+      <p:sp>
+        <p:nvSpPr>
+          <p:cNvPr id="6" name="正方形/長方形 5">
+            <a:extLst>
+              <a:ext uri="{FF2B5EF4-FFF2-40B4-BE49-F238E27FC236}">
+                <a16:creationId xmlns:a16="http://schemas.microsoft.com/office/drawing/2014/main" id="{9D50DD32-78AD-194A-2282-9D9904666D64}"/>
+              </a:ext>
+            </a:extLst>
+          </p:cNvPr>
+          <p:cNvSpPr/>
+          <p:nvPr/>
+        </p:nvSpPr>
+        <p:spPr>
+          <a:xfrm>
+            <a:off x="2045970" y="2468880"/>
+            <a:ext cx="662940" cy="3733745"/>
+          </a:xfrm>
+          <a:prstGeom prst="rect">
+            <a:avLst/>
+          </a:prstGeom>
+          <a:noFill/>
+          <a:ln>
+            <a:solidFill>
+              <a:srgbClr val="FF0000"/>
+            </a:solidFill>
+          </a:ln>
+        </p:spPr>
+        <p:style>
+          <a:lnRef idx="2">
+            <a:schemeClr val="accent1">
+              <a:shade val="15000"/>
+            </a:schemeClr>
+          </a:lnRef>
+          <a:fillRef idx="1">
+            <a:schemeClr val="accent1"/>
+          </a:fillRef>
+          <a:effectRef idx="0">
+            <a:schemeClr val="accent1"/>
+          </a:effectRef>
+          <a:fontRef idx="minor">
+            <a:schemeClr val="lt1"/>
+          </a:fontRef>
+        </p:style>
+        <p:txBody>
+          <a:bodyPr rtlCol="0" anchor="ctr"/>
+          <a:lstStyle/>
+          <a:p>
+            <a:pPr algn="ctr"/>
+            <a:endParaRPr kumimoji="1" lang="ja-JP" altLang="en-US"/>
+          </a:p>
+        </p:txBody>
+      </p:sp>
+    </p:spTree>
+  </p:cSld>
+  <p:clrMapOvr>
+    <a:masterClrMapping/>
+  </p:clrMapOvr>
+</p:sld>
+</file>
+
+<file path=ppt/slides/slide6.xml><?xml version="1.0" encoding="utf-8"?>
+<p:sld xmlns:a="http://schemas.openxmlformats.org/drawingml/2006/main" xmlns:r="http://schemas.openxmlformats.org/officeDocument/2006/relationships" xmlns:p="http://schemas.openxmlformats.org/presentationml/2006/main">
+  <p:cSld>
+    <p:spTree>
+      <p:nvGrpSpPr>
+        <p:cNvPr id="1" name=""/>
+        <p:cNvGrpSpPr/>
+        <p:nvPr/>
+      </p:nvGrpSpPr>
+      <p:grpSpPr>
+        <a:xfrm>
+          <a:off x="0" y="0"/>
+          <a:ext cx="0" cy="0"/>
+          <a:chOff x="0" y="0"/>
+          <a:chExt cx="0" cy="0"/>
+        </a:xfrm>
+      </p:grpSpPr>
+      <p:sp>
+        <p:nvSpPr>
+          <p:cNvPr id="2" name="Title 1"/>
+          <p:cNvSpPr>
+            <a:spLocks noGrp="1"/>
+          </p:cNvSpPr>
+          <p:nvPr>
+            <p:ph type="title"/>
+          </p:nvPr>
+        </p:nvSpPr>
+        <p:spPr>
+          <a:xfrm>
+            <a:off x="228600" y="237744"/>
+            <a:ext cx="9473184" cy="969264"/>
+          </a:xfrm>
+        </p:spPr>
+        <p:txBody>
+          <a:bodyPr/>
+          <a:lstStyle/>
+          <a:p>
+            <a:pPr>
+              <a:spcBef>
+                <a:spcPts val="0"/>
+              </a:spcBef>
+              <a:spcAft>
+                <a:spcPts val="0"/>
+              </a:spcAft>
+            </a:pPr>
+            <a:r>
+              <a:rPr sz="1400" b="1" dirty="0">
+                <a:solidFill>
+                  <a:srgbClr val="000F78"/>
+                </a:solidFill>
+                <a:latin typeface="Arial"/>
+                <a:ea typeface="Arial"/>
+              </a:rPr>
+              <a:t>03. </a:t>
+            </a:r>
+            <a:r>
+              <a:rPr sz="1400" b="1" dirty="0" err="1">
+                <a:solidFill>
+                  <a:srgbClr val="000F78"/>
+                </a:solidFill>
+                <a:latin typeface="Arial"/>
+                <a:ea typeface="Arial"/>
+              </a:rPr>
+              <a:t>先行研究</a:t>
+            </a:r>
+            <a:endParaRPr sz="1400" b="1" dirty="0">
+              <a:solidFill>
+                <a:srgbClr val="000F78"/>
+              </a:solidFill>
+              <a:latin typeface="Arial"/>
+              <a:ea typeface="Arial"/>
+            </a:endParaRPr>
+          </a:p>
+          <a:p>
+            <a:pPr>
+              <a:spcBef>
+                <a:spcPts val="0"/>
+              </a:spcBef>
+              <a:spcAft>
+                <a:spcPts val="0"/>
+              </a:spcAft>
+            </a:pPr>
+            <a:r>
+              <a:rPr b="1" dirty="0">
+                <a:solidFill>
+                  <a:srgbClr val="000F78"/>
+                </a:solidFill>
+                <a:latin typeface="Arial"/>
+                <a:ea typeface="Arial"/>
+              </a:rPr>
+              <a:t>3-1. </a:t>
+            </a:r>
+            <a:r>
+              <a:rPr b="1" dirty="0" err="1">
+                <a:solidFill>
+                  <a:srgbClr val="000F78"/>
+                </a:solidFill>
+                <a:latin typeface="Arial"/>
+                <a:ea typeface="Arial"/>
+              </a:rPr>
+              <a:t>同期・平均による位相雑音の改善</a:t>
+            </a:r>
+            <a:r>
+              <a:rPr lang="ja-JP" altLang="en-US" b="1" dirty="0">
+                <a:solidFill>
+                  <a:srgbClr val="000F78"/>
+                </a:solidFill>
+                <a:latin typeface="Arial"/>
+                <a:ea typeface="Arial"/>
+              </a:rPr>
+              <a:t>原理</a:t>
+            </a:r>
+            <a:endParaRPr b="1" dirty="0">
+              <a:solidFill>
+                <a:srgbClr val="000F78"/>
+              </a:solidFill>
+              <a:latin typeface="Arial"/>
+              <a:ea typeface="Arial"/>
+            </a:endParaRPr>
+          </a:p>
+        </p:txBody>
+      </p:sp>
+      <p:sp>
+        <p:nvSpPr>
+          <p:cNvPr id="3" name="Text Placeholder 2"/>
+          <p:cNvSpPr>
+            <a:spLocks noGrp="1"/>
+          </p:cNvSpPr>
+          <p:nvPr>
+            <p:ph type="body" idx="1"/>
+          </p:nvPr>
+        </p:nvSpPr>
+        <p:spPr>
+          <a:xfrm>
+            <a:off x="274320" y="932688"/>
+            <a:ext cx="9326880" cy="1472184"/>
+          </a:xfrm>
+        </p:spPr>
+        <p:txBody>
+          <a:bodyPr wrap="square"/>
+          <a:lstStyle/>
+          <a:p>
+            <a:r>
+              <a:rPr b="1">
+                <a:solidFill>
+                  <a:srgbClr val="1B2A5A"/>
+                </a:solidFill>
+                <a:latin typeface="Arial"/>
+                <a:ea typeface="Arial"/>
+              </a:rPr>
+              <a:t>互いに無相関な雑音は平均で打ち消し合うため、位相を揃えた複数OCXOの出力を平均すると単体を超える純度になる。</a:t>
+            </a:r>
+          </a:p>
+          <a:p>
+            <a:pPr lvl="1"/>
+            <a:r>
+              <a:rPr>
+                <a:latin typeface="Arial"/>
+                <a:ea typeface="Arial"/>
+              </a:rPr>
+              <a:t>無相関な雑音は平均すると電力が台数分の1（2台で 1/2）になり、近傍位相雑音が −3 dB 改善する</a:t>
+            </a:r>
+          </a:p>
+        </p:txBody>
+      </p:sp>
+      <p:pic>
+        <p:nvPicPr>
+          <p:cNvPr id="4" name="Picture 3" descr="image.png"/>
+          <p:cNvPicPr>
+            <a:picLocks noChangeAspect="1"/>
+          </p:cNvPicPr>
+          <p:nvPr/>
+        </p:nvPicPr>
+        <p:blipFill>
+          <a:blip r:embed="rId2"/>
+          <a:stretch>
+            <a:fillRect/>
+          </a:stretch>
+        </p:blipFill>
+        <p:spPr>
+          <a:xfrm>
+            <a:off x="162997" y="2929814"/>
+            <a:ext cx="2718281" cy="2389161"/>
+          </a:xfrm>
+          <a:prstGeom prst="rect">
+            <a:avLst/>
+          </a:prstGeom>
+        </p:spPr>
+      </p:pic>
+      <p:pic>
+        <p:nvPicPr>
+          <p:cNvPr id="5" name="Picture 3" descr="image.png"/>
+          <p:cNvPicPr>
+            <a:picLocks noChangeAspect="1"/>
+          </p:cNvPicPr>
+          <p:nvPr/>
+        </p:nvPicPr>
+        <p:blipFill>
+          <a:blip r:embed="rId3"/>
+          <a:stretch>
+            <a:fillRect/>
+          </a:stretch>
+        </p:blipFill>
+        <p:spPr>
+          <a:xfrm>
+            <a:off x="2881278" y="2354708"/>
+            <a:ext cx="6719922" cy="3913890"/>
+          </a:xfrm>
+          <a:prstGeom prst="rect">
+            <a:avLst/>
+          </a:prstGeom>
+        </p:spPr>
+      </p:pic>
+    </p:spTree>
+  </p:cSld>
+  <p:clrMapOvr>
+    <a:masterClrMapping/>
+  </p:clrMapOvr>
+</p:sld>
+</file>
+
+<file path=ppt/slides/slide7.xml><?xml version="1.0" encoding="utf-8"?>
+<p:sld xmlns:a="http://schemas.openxmlformats.org/drawingml/2006/main" xmlns:r="http://schemas.openxmlformats.org/officeDocument/2006/relationships" xmlns:p="http://schemas.openxmlformats.org/presentationml/2006/main">
+  <p:cSld>
+    <p:spTree>
+      <p:nvGrpSpPr>
+        <p:cNvPr id="1" name=""/>
+        <p:cNvGrpSpPr/>
+        <p:nvPr/>
+      </p:nvGrpSpPr>
+      <p:grpSpPr>
+        <a:xfrm>
+          <a:off x="0" y="0"/>
+          <a:ext cx="0" cy="0"/>
+          <a:chOff x="0" y="0"/>
+          <a:chExt cx="0" cy="0"/>
+        </a:xfrm>
+      </p:grpSpPr>
+      <p:sp>
+        <p:nvSpPr>
+          <p:cNvPr id="2" name="Title 1"/>
+          <p:cNvSpPr>
+            <a:spLocks noGrp="1"/>
+          </p:cNvSpPr>
+          <p:nvPr>
+            <p:ph type="title"/>
+          </p:nvPr>
+        </p:nvSpPr>
+        <p:spPr>
+          <a:xfrm>
+            <a:off x="228600" y="237744"/>
+            <a:ext cx="9473184" cy="969264"/>
+          </a:xfrm>
+        </p:spPr>
+        <p:txBody>
+          <a:bodyPr/>
+          <a:lstStyle/>
+          <a:p>
+            <a:pPr>
+              <a:spcBef>
+                <a:spcPts val="0"/>
+              </a:spcBef>
+              <a:spcAft>
+                <a:spcPts val="0"/>
+              </a:spcAft>
+            </a:pPr>
+            <a:r>
+              <a:rPr sz="1400" b="1" dirty="0">
+                <a:solidFill>
+                  <a:srgbClr val="000F78"/>
+                </a:solidFill>
+                <a:latin typeface="Arial"/>
+                <a:ea typeface="Arial"/>
+              </a:rPr>
+              <a:t>04. </a:t>
+            </a:r>
+            <a:r>
+              <a:rPr sz="1400" b="1" dirty="0" err="1">
+                <a:solidFill>
+                  <a:srgbClr val="000F78"/>
+                </a:solidFill>
+                <a:latin typeface="Arial"/>
+                <a:ea typeface="Arial"/>
+              </a:rPr>
+              <a:t>研究方法</a:t>
+            </a:r>
+            <a:endParaRPr sz="1400" b="1" dirty="0">
+              <a:solidFill>
+                <a:srgbClr val="000F78"/>
+              </a:solidFill>
+              <a:latin typeface="Arial"/>
+              <a:ea typeface="Arial"/>
+            </a:endParaRPr>
+          </a:p>
+          <a:p>
+            <a:pPr>
+              <a:spcBef>
+                <a:spcPts val="0"/>
+              </a:spcBef>
+              <a:spcAft>
+                <a:spcPts val="0"/>
+              </a:spcAft>
+            </a:pPr>
+            <a:r>
+              <a:rPr b="1" dirty="0">
+                <a:solidFill>
+                  <a:srgbClr val="000F78"/>
+                </a:solidFill>
+                <a:latin typeface="Arial"/>
+                <a:ea typeface="Arial"/>
+              </a:rPr>
+              <a:t>4-</a:t>
+            </a:r>
+            <a:r>
+              <a:rPr lang="en-US" b="1" dirty="0">
+                <a:solidFill>
+                  <a:srgbClr val="000F78"/>
+                </a:solidFill>
+                <a:latin typeface="Arial"/>
+                <a:ea typeface="Arial"/>
+              </a:rPr>
+              <a:t>1</a:t>
+            </a:r>
+            <a:r>
+              <a:rPr b="1" dirty="0">
+                <a:solidFill>
+                  <a:srgbClr val="000F78"/>
+                </a:solidFill>
+                <a:latin typeface="Arial"/>
+                <a:ea typeface="Arial"/>
+              </a:rPr>
+              <a:t>. </a:t>
+            </a:r>
+            <a:r>
+              <a:rPr b="1" dirty="0" err="1">
+                <a:solidFill>
+                  <a:srgbClr val="000F78"/>
+                </a:solidFill>
+                <a:latin typeface="Arial"/>
+                <a:ea typeface="Arial"/>
+              </a:rPr>
+              <a:t>実験系</a:t>
+            </a:r>
+            <a:endParaRPr b="1" dirty="0">
+              <a:solidFill>
+                <a:srgbClr val="000F78"/>
+              </a:solidFill>
+              <a:latin typeface="Arial"/>
+              <a:ea typeface="Arial"/>
+            </a:endParaRPr>
+          </a:p>
+        </p:txBody>
+      </p:sp>
+      <p:sp>
+        <p:nvSpPr>
+          <p:cNvPr id="3" name="Text Placeholder 2"/>
+          <p:cNvSpPr>
+            <a:spLocks noGrp="1"/>
+          </p:cNvSpPr>
+          <p:nvPr>
+            <p:ph type="body" idx="1"/>
+          </p:nvPr>
+        </p:nvSpPr>
+        <p:spPr>
+          <a:xfrm>
+            <a:off x="274320" y="932688"/>
+            <a:ext cx="9326880" cy="876539"/>
+          </a:xfrm>
+        </p:spPr>
+        <p:txBody>
+          <a:bodyPr wrap="square"/>
+          <a:lstStyle/>
+          <a:p>
+            <a:r>
+              <a:rPr b="1" dirty="0">
+                <a:solidFill>
+                  <a:srgbClr val="1B2A5A"/>
+                </a:solidFill>
+                <a:latin typeface="Arial"/>
+                <a:ea typeface="Arial"/>
+              </a:rPr>
+              <a:t>OCXO2台に対し、位相差FRFRをターゲットとしてオシロスコープで計測。計測結果を基に片方のOCXOへフィードバック電圧を印加する。</a:t>
+            </a:r>
+            <a:endParaRPr dirty="0">
+              <a:latin typeface="Arial"/>
+              <a:ea typeface="Arial"/>
+            </a:endParaRPr>
+          </a:p>
+        </p:txBody>
+      </p:sp>
+      <p:sp>
+        <p:nvSpPr>
+          <p:cNvPr id="5" name="正方形/長方形 4">
+            <a:extLst>
+              <a:ext uri="{FF2B5EF4-FFF2-40B4-BE49-F238E27FC236}">
+                <a16:creationId xmlns:a16="http://schemas.microsoft.com/office/drawing/2014/main" id="{D5B4D475-FEC0-D141-EB98-8F8357F26004}"/>
+              </a:ext>
+            </a:extLst>
+          </p:cNvPr>
+          <p:cNvSpPr/>
+          <p:nvPr/>
+        </p:nvSpPr>
+        <p:spPr>
+          <a:xfrm>
+            <a:off x="425003" y="2358261"/>
+            <a:ext cx="1622738" cy="991673"/>
+          </a:xfrm>
+          <a:prstGeom prst="rect">
+            <a:avLst/>
+          </a:prstGeom>
+        </p:spPr>
+        <p:style>
+          <a:lnRef idx="1">
+            <a:schemeClr val="dk1"/>
+          </a:lnRef>
+          <a:fillRef idx="2">
+            <a:schemeClr val="dk1"/>
+          </a:fillRef>
+          <a:effectRef idx="1">
+            <a:schemeClr val="dk1"/>
+          </a:effectRef>
+          <a:fontRef idx="minor">
+            <a:schemeClr val="dk1"/>
+          </a:fontRef>
+        </p:style>
+        <p:txBody>
+          <a:bodyPr rtlCol="0" anchor="ctr"/>
+          <a:lstStyle/>
+          <a:p>
+            <a:pPr algn="ctr"/>
+            <a:r>
+              <a:rPr kumimoji="1" lang="en-US" altLang="ja-JP" dirty="0"/>
+              <a:t>KIKUSUI</a:t>
+            </a:r>
+            <a:br>
+              <a:rPr kumimoji="1" lang="en-US" altLang="ja-JP" dirty="0"/>
+            </a:br>
+            <a:r>
+              <a:rPr kumimoji="1" lang="en-US" altLang="ja-JP" dirty="0"/>
+              <a:t>7.54V</a:t>
+            </a:r>
+          </a:p>
+          <a:p>
+            <a:pPr algn="ctr"/>
+            <a:r>
+              <a:rPr kumimoji="1" lang="en-US" altLang="ja-JP" dirty="0"/>
+              <a:t>0.19A</a:t>
+            </a:r>
+            <a:endParaRPr kumimoji="1" lang="ja-JP" altLang="en-US" dirty="0"/>
+          </a:p>
+        </p:txBody>
+      </p:sp>
+      <p:sp>
+        <p:nvSpPr>
+          <p:cNvPr id="6" name="正方形/長方形 5">
+            <a:extLst>
+              <a:ext uri="{FF2B5EF4-FFF2-40B4-BE49-F238E27FC236}">
+                <a16:creationId xmlns:a16="http://schemas.microsoft.com/office/drawing/2014/main" id="{9F308EFD-6798-EE51-2175-30D5A9DCCD2D}"/>
+              </a:ext>
+            </a:extLst>
+          </p:cNvPr>
+          <p:cNvSpPr/>
+          <p:nvPr/>
+        </p:nvSpPr>
+        <p:spPr>
+          <a:xfrm>
+            <a:off x="2612694" y="2358260"/>
+            <a:ext cx="1622738" cy="991673"/>
+          </a:xfrm>
+          <a:prstGeom prst="rect">
+            <a:avLst/>
+          </a:prstGeom>
+        </p:spPr>
+        <p:style>
+          <a:lnRef idx="1">
+            <a:schemeClr val="dk1"/>
+          </a:lnRef>
+          <a:fillRef idx="2">
+            <a:schemeClr val="dk1"/>
+          </a:fillRef>
+          <a:effectRef idx="1">
+            <a:schemeClr val="dk1"/>
+          </a:effectRef>
+          <a:fontRef idx="minor">
+            <a:schemeClr val="dk1"/>
+          </a:fontRef>
+        </p:style>
+        <p:txBody>
+          <a:bodyPr rtlCol="0" anchor="ctr"/>
+          <a:lstStyle/>
+          <a:p>
+            <a:pPr algn="ctr"/>
+            <a:r>
+              <a:rPr kumimoji="1" lang="en-US" altLang="ja-JP" dirty="0"/>
+              <a:t>OCXO</a:t>
+            </a:r>
+          </a:p>
+          <a:p>
+            <a:pPr algn="ctr"/>
+            <a:r>
+              <a:rPr kumimoji="1" lang="en-US" altLang="ja-JP" dirty="0"/>
+              <a:t>F1</a:t>
+            </a:r>
+            <a:endParaRPr kumimoji="1" lang="ja-JP" altLang="en-US" dirty="0"/>
+          </a:p>
+        </p:txBody>
+      </p:sp>
+      <p:sp>
+        <p:nvSpPr>
+          <p:cNvPr id="9" name="正方形/長方形 8">
+            <a:extLst>
+              <a:ext uri="{FF2B5EF4-FFF2-40B4-BE49-F238E27FC236}">
+                <a16:creationId xmlns:a16="http://schemas.microsoft.com/office/drawing/2014/main" id="{DE65712B-70B8-A811-2639-31C93F61E6C3}"/>
+              </a:ext>
+            </a:extLst>
+          </p:cNvPr>
+          <p:cNvSpPr/>
+          <p:nvPr/>
+        </p:nvSpPr>
+        <p:spPr>
+          <a:xfrm>
+            <a:off x="4800385" y="2358260"/>
+            <a:ext cx="1622738" cy="991673"/>
+          </a:xfrm>
+          <a:prstGeom prst="rect">
+            <a:avLst/>
+          </a:prstGeom>
+        </p:spPr>
+        <p:style>
+          <a:lnRef idx="1">
+            <a:schemeClr val="dk1"/>
+          </a:lnRef>
+          <a:fillRef idx="2">
+            <a:schemeClr val="dk1"/>
+          </a:fillRef>
+          <a:effectRef idx="1">
+            <a:schemeClr val="dk1"/>
+          </a:effectRef>
+          <a:fontRef idx="minor">
+            <a:schemeClr val="dk1"/>
+          </a:fontRef>
+        </p:style>
+        <p:txBody>
+          <a:bodyPr rtlCol="0" anchor="ctr"/>
+          <a:lstStyle/>
+          <a:p>
+            <a:pPr algn="ctr"/>
+            <a:r>
+              <a:rPr kumimoji="1" lang="en-US" altLang="ja-JP" dirty="0"/>
+              <a:t>PIC1</a:t>
+            </a:r>
+            <a:endParaRPr kumimoji="1" lang="ja-JP" altLang="en-US" dirty="0"/>
+          </a:p>
+        </p:txBody>
+      </p:sp>
+      <p:sp>
+        <p:nvSpPr>
+          <p:cNvPr id="10" name="正方形/長方形 9">
+            <a:extLst>
+              <a:ext uri="{FF2B5EF4-FFF2-40B4-BE49-F238E27FC236}">
+                <a16:creationId xmlns:a16="http://schemas.microsoft.com/office/drawing/2014/main" id="{5800F7E5-3C39-270C-FF22-AE73DD95BADC}"/>
+              </a:ext>
+            </a:extLst>
+          </p:cNvPr>
+          <p:cNvSpPr/>
+          <p:nvPr/>
+        </p:nvSpPr>
+        <p:spPr>
+          <a:xfrm>
+            <a:off x="7873489" y="3179547"/>
+            <a:ext cx="1622738" cy="991673"/>
+          </a:xfrm>
+          <a:prstGeom prst="rect">
+            <a:avLst/>
+          </a:prstGeom>
+        </p:spPr>
+        <p:style>
+          <a:lnRef idx="1">
+            <a:schemeClr val="dk1"/>
+          </a:lnRef>
+          <a:fillRef idx="2">
+            <a:schemeClr val="dk1"/>
+          </a:fillRef>
+          <a:effectRef idx="1">
+            <a:schemeClr val="dk1"/>
+          </a:effectRef>
+          <a:fontRef idx="minor">
+            <a:schemeClr val="dk1"/>
+          </a:fontRef>
+        </p:style>
+        <p:txBody>
+          <a:bodyPr rtlCol="0" anchor="ctr"/>
+          <a:lstStyle/>
+          <a:p>
+            <a:pPr algn="ctr"/>
+            <a:r>
+              <a:rPr kumimoji="1" lang="en-US" altLang="ja-JP" dirty="0"/>
+              <a:t>TASCAM</a:t>
+            </a:r>
+            <a:endParaRPr kumimoji="1" lang="ja-JP" altLang="en-US" dirty="0"/>
+          </a:p>
+        </p:txBody>
+      </p:sp>
+      <p:cxnSp>
+        <p:nvCxnSpPr>
+          <p:cNvPr id="14" name="直線コネクタ 13">
+            <a:extLst>
+              <a:ext uri="{FF2B5EF4-FFF2-40B4-BE49-F238E27FC236}">
+                <a16:creationId xmlns:a16="http://schemas.microsoft.com/office/drawing/2014/main" id="{ED1A4AFF-E8B5-ADDA-6AA4-6A1ECDDB7816}"/>
+              </a:ext>
+            </a:extLst>
+          </p:cNvPr>
+          <p:cNvCxnSpPr>
+            <a:stCxn id="5" idx="3"/>
+            <a:endCxn id="6" idx="1"/>
+          </p:cNvCxnSpPr>
+          <p:nvPr/>
+        </p:nvCxnSpPr>
+        <p:spPr>
+          <a:xfrm flipV="1">
+            <a:off x="2047741" y="2854097"/>
+            <a:ext cx="564953" cy="1"/>
+          </a:xfrm>
+          <a:prstGeom prst="line">
+            <a:avLst/>
+          </a:prstGeom>
+          <a:ln w="28575"/>
+        </p:spPr>
+        <p:style>
+          <a:lnRef idx="1">
+            <a:schemeClr val="dk1"/>
+          </a:lnRef>
+          <a:fillRef idx="0">
+            <a:schemeClr val="dk1"/>
+          </a:fillRef>
+          <a:effectRef idx="0">
+            <a:schemeClr val="dk1"/>
+          </a:effectRef>
+          <a:fontRef idx="minor">
+            <a:schemeClr val="tx1"/>
+          </a:fontRef>
+        </p:style>
+      </p:cxnSp>
+      <p:cxnSp>
+        <p:nvCxnSpPr>
+          <p:cNvPr id="15" name="直線コネクタ 14">
+            <a:extLst>
+              <a:ext uri="{FF2B5EF4-FFF2-40B4-BE49-F238E27FC236}">
+                <a16:creationId xmlns:a16="http://schemas.microsoft.com/office/drawing/2014/main" id="{B2E8B0A7-A6D8-80C9-0C08-04D48EB371D3}"/>
+              </a:ext>
+            </a:extLst>
+          </p:cNvPr>
+          <p:cNvCxnSpPr>
+            <a:cxnSpLocks/>
+            <a:stCxn id="6" idx="3"/>
+            <a:endCxn id="9" idx="1"/>
+          </p:cNvCxnSpPr>
+          <p:nvPr/>
+        </p:nvCxnSpPr>
+        <p:spPr>
+          <a:xfrm>
+            <a:off x="4235432" y="2854097"/>
+            <a:ext cx="564953" cy="0"/>
+          </a:xfrm>
+          <a:prstGeom prst="line">
+            <a:avLst/>
+          </a:prstGeom>
+          <a:ln w="28575"/>
+        </p:spPr>
+        <p:style>
+          <a:lnRef idx="1">
+            <a:schemeClr val="dk1"/>
+          </a:lnRef>
+          <a:fillRef idx="0">
+            <a:schemeClr val="dk1"/>
+          </a:fillRef>
+          <a:effectRef idx="0">
+            <a:schemeClr val="dk1"/>
+          </a:effectRef>
+          <a:fontRef idx="minor">
+            <a:schemeClr val="tx1"/>
+          </a:fontRef>
+        </p:style>
+      </p:cxnSp>
+      <p:cxnSp>
+        <p:nvCxnSpPr>
+          <p:cNvPr id="19" name="直線コネクタ 18">
+            <a:extLst>
+              <a:ext uri="{FF2B5EF4-FFF2-40B4-BE49-F238E27FC236}">
+                <a16:creationId xmlns:a16="http://schemas.microsoft.com/office/drawing/2014/main" id="{1131CDBB-47CF-F27E-78E0-1A103F66C0A3}"/>
+              </a:ext>
+            </a:extLst>
+          </p:cNvPr>
+          <p:cNvCxnSpPr>
+            <a:cxnSpLocks/>
+            <a:stCxn id="8" idx="3"/>
+            <a:endCxn id="10" idx="1"/>
+          </p:cNvCxnSpPr>
+          <p:nvPr/>
+        </p:nvCxnSpPr>
+        <p:spPr>
+          <a:xfrm flipV="1">
+            <a:off x="7321919" y="3675384"/>
+            <a:ext cx="551570" cy="1"/>
+          </a:xfrm>
+          <a:prstGeom prst="line">
+            <a:avLst/>
+          </a:prstGeom>
+          <a:ln w="28575"/>
+        </p:spPr>
+        <p:style>
+          <a:lnRef idx="1">
+            <a:schemeClr val="dk1"/>
+          </a:lnRef>
+          <a:fillRef idx="0">
+            <a:schemeClr val="dk1"/>
+          </a:fillRef>
+          <a:effectRef idx="0">
+            <a:schemeClr val="dk1"/>
+          </a:effectRef>
+          <a:fontRef idx="minor">
+            <a:schemeClr val="tx1"/>
+          </a:fontRef>
+        </p:style>
+      </p:cxnSp>
+      <p:sp>
+        <p:nvSpPr>
+          <p:cNvPr id="23" name="正方形/長方形 22">
+            <a:extLst>
+              <a:ext uri="{FF2B5EF4-FFF2-40B4-BE49-F238E27FC236}">
+                <a16:creationId xmlns:a16="http://schemas.microsoft.com/office/drawing/2014/main" id="{E2A0921F-7A7B-B667-60D8-6A31F6139E09}"/>
+              </a:ext>
+            </a:extLst>
+          </p:cNvPr>
+          <p:cNvSpPr/>
+          <p:nvPr/>
+        </p:nvSpPr>
+        <p:spPr>
+          <a:xfrm>
+            <a:off x="425003" y="4000835"/>
+            <a:ext cx="1622738" cy="991673"/>
+          </a:xfrm>
+          <a:prstGeom prst="rect">
+            <a:avLst/>
+          </a:prstGeom>
+        </p:spPr>
+        <p:style>
+          <a:lnRef idx="1">
+            <a:schemeClr val="dk1"/>
+          </a:lnRef>
+          <a:fillRef idx="2">
+            <a:schemeClr val="dk1"/>
+          </a:fillRef>
+          <a:effectRef idx="1">
+            <a:schemeClr val="dk1"/>
+          </a:effectRef>
+          <a:fontRef idx="minor">
+            <a:schemeClr val="dk1"/>
+          </a:fontRef>
+        </p:style>
+        <p:txBody>
+          <a:bodyPr rtlCol="0" anchor="ctr"/>
+          <a:lstStyle/>
+          <a:p>
+            <a:pPr algn="ctr"/>
+            <a:r>
+              <a:rPr kumimoji="1" lang="en-US" altLang="ja-JP" dirty="0"/>
+              <a:t>KIKUSUI</a:t>
+            </a:r>
+            <a:br>
+              <a:rPr kumimoji="1" lang="en-US" altLang="ja-JP" dirty="0"/>
+            </a:br>
+            <a:r>
+              <a:rPr kumimoji="1" lang="en-US" altLang="ja-JP" dirty="0"/>
+              <a:t>5.06V</a:t>
+            </a:r>
+          </a:p>
+          <a:p>
+            <a:pPr algn="ctr"/>
+            <a:r>
+              <a:rPr kumimoji="1" lang="en-US" altLang="ja-JP" dirty="0"/>
+              <a:t>0.24A</a:t>
+            </a:r>
+            <a:endParaRPr kumimoji="1" lang="ja-JP" altLang="en-US" dirty="0"/>
+          </a:p>
+        </p:txBody>
+      </p:sp>
+      <p:sp>
+        <p:nvSpPr>
+          <p:cNvPr id="24" name="正方形/長方形 23">
+            <a:extLst>
+              <a:ext uri="{FF2B5EF4-FFF2-40B4-BE49-F238E27FC236}">
+                <a16:creationId xmlns:a16="http://schemas.microsoft.com/office/drawing/2014/main" id="{DF441E8A-F446-7172-0F6C-75683941B7BA}"/>
+              </a:ext>
+            </a:extLst>
+          </p:cNvPr>
+          <p:cNvSpPr/>
+          <p:nvPr/>
+        </p:nvSpPr>
+        <p:spPr>
+          <a:xfrm>
+            <a:off x="2612694" y="4000834"/>
+            <a:ext cx="1622738" cy="991673"/>
+          </a:xfrm>
+          <a:prstGeom prst="rect">
+            <a:avLst/>
+          </a:prstGeom>
+        </p:spPr>
+        <p:style>
+          <a:lnRef idx="1">
+            <a:schemeClr val="dk1"/>
+          </a:lnRef>
+          <a:fillRef idx="2">
+            <a:schemeClr val="dk1"/>
+          </a:fillRef>
+          <a:effectRef idx="1">
+            <a:schemeClr val="dk1"/>
+          </a:effectRef>
+          <a:fontRef idx="minor">
+            <a:schemeClr val="dk1"/>
+          </a:fontRef>
+        </p:style>
+        <p:txBody>
+          <a:bodyPr rtlCol="0" anchor="ctr"/>
+          <a:lstStyle/>
+          <a:p>
+            <a:pPr algn="ctr"/>
+            <a:r>
+              <a:rPr kumimoji="1" lang="en-US" altLang="ja-JP" dirty="0"/>
+              <a:t>OCXO</a:t>
+            </a:r>
+          </a:p>
+          <a:p>
+            <a:pPr algn="ctr"/>
+            <a:r>
+              <a:rPr kumimoji="1" lang="en-US" altLang="ja-JP" dirty="0"/>
+              <a:t>F2</a:t>
+            </a:r>
+            <a:endParaRPr kumimoji="1" lang="ja-JP" altLang="en-US" dirty="0"/>
+          </a:p>
+        </p:txBody>
+      </p:sp>
+      <p:sp>
+        <p:nvSpPr>
+          <p:cNvPr id="25" name="正方形/長方形 24">
+            <a:extLst>
+              <a:ext uri="{FF2B5EF4-FFF2-40B4-BE49-F238E27FC236}">
+                <a16:creationId xmlns:a16="http://schemas.microsoft.com/office/drawing/2014/main" id="{0F57625B-E1BC-4CA8-0D02-37A9E1C57F42}"/>
+              </a:ext>
+            </a:extLst>
+          </p:cNvPr>
+          <p:cNvSpPr/>
+          <p:nvPr/>
+        </p:nvSpPr>
+        <p:spPr>
+          <a:xfrm>
+            <a:off x="4800385" y="4000834"/>
+            <a:ext cx="1622738" cy="991673"/>
+          </a:xfrm>
+          <a:prstGeom prst="rect">
+            <a:avLst/>
+          </a:prstGeom>
+        </p:spPr>
+        <p:style>
+          <a:lnRef idx="1">
+            <a:schemeClr val="dk1"/>
+          </a:lnRef>
+          <a:fillRef idx="2">
+            <a:schemeClr val="dk1"/>
+          </a:fillRef>
+          <a:effectRef idx="1">
+            <a:schemeClr val="dk1"/>
+          </a:effectRef>
+          <a:fontRef idx="minor">
+            <a:schemeClr val="dk1"/>
+          </a:fontRef>
+        </p:style>
+        <p:txBody>
+          <a:bodyPr rtlCol="0" anchor="ctr"/>
+          <a:lstStyle/>
+          <a:p>
+            <a:pPr algn="ctr"/>
+            <a:r>
+              <a:rPr kumimoji="1" lang="en-US" altLang="ja-JP" dirty="0"/>
+              <a:t>PIC2</a:t>
+            </a:r>
+            <a:endParaRPr kumimoji="1" lang="ja-JP" altLang="en-US" dirty="0"/>
+          </a:p>
+        </p:txBody>
+      </p:sp>
+      <p:cxnSp>
+        <p:nvCxnSpPr>
+          <p:cNvPr id="26" name="直線コネクタ 25">
+            <a:extLst>
+              <a:ext uri="{FF2B5EF4-FFF2-40B4-BE49-F238E27FC236}">
+                <a16:creationId xmlns:a16="http://schemas.microsoft.com/office/drawing/2014/main" id="{286E6675-7451-DDE9-9D8B-5575F833DFC1}"/>
+              </a:ext>
+            </a:extLst>
+          </p:cNvPr>
+          <p:cNvCxnSpPr>
+            <a:stCxn id="23" idx="3"/>
+            <a:endCxn id="24" idx="1"/>
+          </p:cNvCxnSpPr>
+          <p:nvPr/>
+        </p:nvCxnSpPr>
+        <p:spPr>
+          <a:xfrm flipV="1">
+            <a:off x="2047741" y="4496671"/>
+            <a:ext cx="564953" cy="1"/>
+          </a:xfrm>
+          <a:prstGeom prst="line">
+            <a:avLst/>
+          </a:prstGeom>
+          <a:ln w="28575"/>
+        </p:spPr>
+        <p:style>
+          <a:lnRef idx="1">
+            <a:schemeClr val="dk1"/>
+          </a:lnRef>
+          <a:fillRef idx="0">
+            <a:schemeClr val="dk1"/>
+          </a:fillRef>
+          <a:effectRef idx="0">
+            <a:schemeClr val="dk1"/>
+          </a:effectRef>
+          <a:fontRef idx="minor">
+            <a:schemeClr val="tx1"/>
+          </a:fontRef>
+        </p:style>
+      </p:cxnSp>
+      <p:cxnSp>
+        <p:nvCxnSpPr>
+          <p:cNvPr id="27" name="直線コネクタ 26">
+            <a:extLst>
+              <a:ext uri="{FF2B5EF4-FFF2-40B4-BE49-F238E27FC236}">
+                <a16:creationId xmlns:a16="http://schemas.microsoft.com/office/drawing/2014/main" id="{B58195FB-2E42-7097-F735-7C6B10EBB0BD}"/>
+              </a:ext>
+            </a:extLst>
+          </p:cNvPr>
+          <p:cNvCxnSpPr>
+            <a:cxnSpLocks/>
+            <a:stCxn id="24" idx="3"/>
+            <a:endCxn id="25" idx="1"/>
+          </p:cNvCxnSpPr>
+          <p:nvPr/>
+        </p:nvCxnSpPr>
+        <p:spPr>
+          <a:xfrm>
+            <a:off x="4235432" y="4496671"/>
+            <a:ext cx="564953" cy="0"/>
+          </a:xfrm>
+          <a:prstGeom prst="line">
+            <a:avLst/>
+          </a:prstGeom>
+          <a:ln w="28575"/>
+        </p:spPr>
+        <p:style>
+          <a:lnRef idx="1">
+            <a:schemeClr val="dk1"/>
+          </a:lnRef>
+          <a:fillRef idx="0">
+            <a:schemeClr val="dk1"/>
+          </a:fillRef>
+          <a:effectRef idx="0">
+            <a:schemeClr val="dk1"/>
+          </a:effectRef>
+          <a:fontRef idx="minor">
+            <a:schemeClr val="tx1"/>
+          </a:fontRef>
+        </p:style>
+      </p:cxnSp>
+      <p:cxnSp>
+        <p:nvCxnSpPr>
+          <p:cNvPr id="29" name="コネクタ: カギ線 28">
+            <a:extLst>
+              <a:ext uri="{FF2B5EF4-FFF2-40B4-BE49-F238E27FC236}">
+                <a16:creationId xmlns:a16="http://schemas.microsoft.com/office/drawing/2014/main" id="{6AFBA4B9-2648-93F4-DD1F-E3291BBD1932}"/>
+              </a:ext>
+            </a:extLst>
+          </p:cNvPr>
+          <p:cNvCxnSpPr>
+            <a:cxnSpLocks/>
+            <a:stCxn id="9" idx="3"/>
+          </p:cNvCxnSpPr>
+          <p:nvPr/>
+        </p:nvCxnSpPr>
+        <p:spPr>
+          <a:xfrm>
+            <a:off x="6423123" y="2854097"/>
+            <a:ext cx="693294" cy="673622"/>
+          </a:xfrm>
+          <a:prstGeom prst="bentConnector3">
+            <a:avLst/>
+          </a:prstGeom>
+          <a:ln w="19050"/>
+        </p:spPr>
+        <p:style>
+          <a:lnRef idx="1">
+            <a:schemeClr val="dk1"/>
+          </a:lnRef>
+          <a:fillRef idx="0">
+            <a:schemeClr val="dk1"/>
+          </a:fillRef>
+          <a:effectRef idx="0">
+            <a:schemeClr val="dk1"/>
+          </a:effectRef>
+          <a:fontRef idx="minor">
+            <a:schemeClr val="tx1"/>
+          </a:fontRef>
+        </p:style>
+      </p:cxnSp>
+      <p:cxnSp>
+        <p:nvCxnSpPr>
+          <p:cNvPr id="32" name="コネクタ: カギ線 31">
+            <a:extLst>
+              <a:ext uri="{FF2B5EF4-FFF2-40B4-BE49-F238E27FC236}">
+                <a16:creationId xmlns:a16="http://schemas.microsoft.com/office/drawing/2014/main" id="{6EDE228B-CA5E-5B59-5A0B-710D94FA463E}"/>
+              </a:ext>
+            </a:extLst>
+          </p:cNvPr>
+          <p:cNvCxnSpPr>
+            <a:cxnSpLocks/>
+            <a:stCxn id="25" idx="3"/>
+          </p:cNvCxnSpPr>
+          <p:nvPr/>
+        </p:nvCxnSpPr>
+        <p:spPr>
+          <a:xfrm flipV="1">
+            <a:off x="6423123" y="3894452"/>
+            <a:ext cx="693294" cy="602219"/>
+          </a:xfrm>
+          <a:prstGeom prst="bentConnector3">
+            <a:avLst/>
+          </a:prstGeom>
+          <a:ln w="19050"/>
+        </p:spPr>
+        <p:style>
+          <a:lnRef idx="1">
+            <a:schemeClr val="dk1"/>
+          </a:lnRef>
+          <a:fillRef idx="0">
+            <a:schemeClr val="dk1"/>
+          </a:fillRef>
+          <a:effectRef idx="0">
+            <a:schemeClr val="dk1"/>
+          </a:effectRef>
+          <a:fontRef idx="minor">
+            <a:schemeClr val="tx1"/>
+          </a:fontRef>
+        </p:style>
+      </p:cxnSp>
+      <p:sp>
+        <p:nvSpPr>
+          <p:cNvPr id="8" name="正方形/長方形 7">
+            <a:extLst>
+              <a:ext uri="{FF2B5EF4-FFF2-40B4-BE49-F238E27FC236}">
+                <a16:creationId xmlns:a16="http://schemas.microsoft.com/office/drawing/2014/main" id="{5CE4BE48-911B-AD27-7315-14A2D379986F}"/>
+              </a:ext>
+            </a:extLst>
+          </p:cNvPr>
+          <p:cNvSpPr/>
+          <p:nvPr/>
+        </p:nvSpPr>
+        <p:spPr>
+          <a:xfrm>
+            <a:off x="7008533" y="3349934"/>
+            <a:ext cx="313386" cy="650901"/>
+          </a:xfrm>
+          <a:prstGeom prst="rect">
+            <a:avLst/>
+          </a:prstGeom>
+        </p:spPr>
+        <p:style>
+          <a:lnRef idx="1">
+            <a:schemeClr val="dk1"/>
+          </a:lnRef>
+          <a:fillRef idx="2">
+            <a:schemeClr val="dk1"/>
+          </a:fillRef>
+          <a:effectRef idx="1">
+            <a:schemeClr val="dk1"/>
+          </a:effectRef>
+          <a:fontRef idx="minor">
+            <a:schemeClr val="dk1"/>
+          </a:fontRef>
+        </p:style>
+        <p:txBody>
+          <a:bodyPr rtlCol="0" anchor="ctr"/>
+          <a:lstStyle/>
+          <a:p>
+            <a:pPr algn="ctr"/>
+            <a:r>
+              <a:rPr kumimoji="1" lang="en-US" altLang="ja-JP" dirty="0"/>
+              <a:t>L</a:t>
+            </a:r>
+          </a:p>
+          <a:p>
+            <a:pPr algn="ctr"/>
+            <a:r>
+              <a:rPr kumimoji="1" lang="en-US" altLang="ja-JP" dirty="0"/>
+              <a:t>R</a:t>
+            </a:r>
+            <a:endParaRPr kumimoji="1" lang="ja-JP" altLang="en-US" dirty="0"/>
+          </a:p>
+        </p:txBody>
+      </p:sp>
+      <p:sp>
+        <p:nvSpPr>
+          <p:cNvPr id="38" name="正方形/長方形 37">
+            <a:extLst>
+              <a:ext uri="{FF2B5EF4-FFF2-40B4-BE49-F238E27FC236}">
+                <a16:creationId xmlns:a16="http://schemas.microsoft.com/office/drawing/2014/main" id="{45B8F234-DFFB-2AAE-672B-9EE93D78A5FF}"/>
+              </a:ext>
+            </a:extLst>
+          </p:cNvPr>
+          <p:cNvSpPr/>
+          <p:nvPr/>
+        </p:nvSpPr>
+        <p:spPr>
+          <a:xfrm>
+            <a:off x="6101606" y="5374378"/>
+            <a:ext cx="1150739" cy="538059"/>
+          </a:xfrm>
+          <a:prstGeom prst="rect">
+            <a:avLst/>
+          </a:prstGeom>
+        </p:spPr>
+        <p:style>
+          <a:lnRef idx="1">
+            <a:schemeClr val="dk1"/>
+          </a:lnRef>
+          <a:fillRef idx="2">
+            <a:schemeClr val="dk1"/>
+          </a:fillRef>
+          <a:effectRef idx="1">
+            <a:schemeClr val="dk1"/>
+          </a:effectRef>
+          <a:fontRef idx="minor">
+            <a:schemeClr val="dk1"/>
+          </a:fontRef>
+        </p:style>
+        <p:txBody>
+          <a:bodyPr rtlCol="0" anchor="ctr"/>
+          <a:lstStyle/>
+          <a:p>
+            <a:pPr algn="ctr"/>
+            <a:r>
+              <a:rPr kumimoji="1" lang="en-US" altLang="ja-JP" dirty="0"/>
+              <a:t>SIGLENT</a:t>
+            </a:r>
+            <a:endParaRPr kumimoji="1" lang="ja-JP" altLang="en-US" dirty="0"/>
+          </a:p>
+        </p:txBody>
+      </p:sp>
+      <p:cxnSp>
+        <p:nvCxnSpPr>
+          <p:cNvPr id="40" name="直線コネクタ 39">
+            <a:extLst>
+              <a:ext uri="{FF2B5EF4-FFF2-40B4-BE49-F238E27FC236}">
+                <a16:creationId xmlns:a16="http://schemas.microsoft.com/office/drawing/2014/main" id="{FABFFBBC-DF02-C6A0-019D-C2AD73CD7F2A}"/>
+              </a:ext>
+            </a:extLst>
+          </p:cNvPr>
+          <p:cNvCxnSpPr>
+            <a:cxnSpLocks/>
+          </p:cNvCxnSpPr>
+          <p:nvPr/>
+        </p:nvCxnSpPr>
+        <p:spPr>
+          <a:xfrm>
+            <a:off x="6676976" y="2873749"/>
+            <a:ext cx="0" cy="2500629"/>
+          </a:xfrm>
+          <a:prstGeom prst="line">
+            <a:avLst/>
+          </a:prstGeom>
+          <a:ln w="19050">
+            <a:prstDash val="dash"/>
+          </a:ln>
+        </p:spPr>
+        <p:style>
+          <a:lnRef idx="1">
+            <a:schemeClr val="dk1"/>
+          </a:lnRef>
+          <a:fillRef idx="0">
+            <a:schemeClr val="dk1"/>
+          </a:fillRef>
+          <a:effectRef idx="0">
+            <a:schemeClr val="dk1"/>
+          </a:effectRef>
+          <a:fontRef idx="minor">
+            <a:schemeClr val="tx1"/>
+          </a:fontRef>
+        </p:style>
+      </p:cxnSp>
+      <p:cxnSp>
+        <p:nvCxnSpPr>
+          <p:cNvPr id="41" name="直線コネクタ 40">
+            <a:extLst>
+              <a:ext uri="{FF2B5EF4-FFF2-40B4-BE49-F238E27FC236}">
+                <a16:creationId xmlns:a16="http://schemas.microsoft.com/office/drawing/2014/main" id="{9F5A5923-F960-537A-FE3A-0C549E7FA179}"/>
+              </a:ext>
+            </a:extLst>
+          </p:cNvPr>
+          <p:cNvCxnSpPr>
+            <a:cxnSpLocks/>
+          </p:cNvCxnSpPr>
+          <p:nvPr/>
+        </p:nvCxnSpPr>
+        <p:spPr>
+          <a:xfrm>
+            <a:off x="6551080" y="4496671"/>
+            <a:ext cx="0" cy="877707"/>
+          </a:xfrm>
+          <a:prstGeom prst="line">
+            <a:avLst/>
+          </a:prstGeom>
+          <a:ln w="19050">
+            <a:prstDash val="dash"/>
+          </a:ln>
+        </p:spPr>
+        <p:style>
+          <a:lnRef idx="1">
+            <a:schemeClr val="dk1"/>
+          </a:lnRef>
+          <a:fillRef idx="0">
+            <a:schemeClr val="dk1"/>
+          </a:fillRef>
+          <a:effectRef idx="0">
+            <a:schemeClr val="dk1"/>
+          </a:effectRef>
+          <a:fontRef idx="minor">
+            <a:schemeClr val="tx1"/>
+          </a:fontRef>
+        </p:style>
+      </p:cxnSp>
+      <p:sp>
+        <p:nvSpPr>
+          <p:cNvPr id="43" name="正方形/長方形 42">
+            <a:extLst>
+              <a:ext uri="{FF2B5EF4-FFF2-40B4-BE49-F238E27FC236}">
+                <a16:creationId xmlns:a16="http://schemas.microsoft.com/office/drawing/2014/main" id="{B415AE24-7109-E992-051B-D92C6811BC37}"/>
+              </a:ext>
+            </a:extLst>
+          </p:cNvPr>
+          <p:cNvSpPr/>
+          <p:nvPr/>
+        </p:nvSpPr>
+        <p:spPr>
+          <a:xfrm>
+            <a:off x="5087111" y="5374377"/>
+            <a:ext cx="727769" cy="538059"/>
+          </a:xfrm>
+          <a:prstGeom prst="rect">
+            <a:avLst/>
+          </a:prstGeom>
+        </p:spPr>
+        <p:style>
+          <a:lnRef idx="1">
+            <a:schemeClr val="dk1"/>
+          </a:lnRef>
+          <a:fillRef idx="2">
+            <a:schemeClr val="dk1"/>
+          </a:fillRef>
+          <a:effectRef idx="1">
+            <a:schemeClr val="dk1"/>
+          </a:effectRef>
+          <a:fontRef idx="minor">
+            <a:schemeClr val="dk1"/>
+          </a:fontRef>
+        </p:style>
+        <p:txBody>
+          <a:bodyPr rtlCol="0" anchor="ctr"/>
+          <a:lstStyle/>
+          <a:p>
+            <a:pPr algn="ctr"/>
+            <a:r>
+              <a:rPr kumimoji="1" lang="en-US" altLang="ja-JP" dirty="0"/>
+              <a:t>FB</a:t>
+            </a:r>
+          </a:p>
+          <a:p>
+            <a:pPr algn="ctr"/>
+            <a:r>
+              <a:rPr kumimoji="1" lang="ja-JP" altLang="en-US" dirty="0"/>
+              <a:t>制御</a:t>
+            </a:r>
+          </a:p>
+        </p:txBody>
+      </p:sp>
+      <p:sp>
+        <p:nvSpPr>
+          <p:cNvPr id="44" name="正方形/長方形 43">
+            <a:extLst>
+              <a:ext uri="{FF2B5EF4-FFF2-40B4-BE49-F238E27FC236}">
+                <a16:creationId xmlns:a16="http://schemas.microsoft.com/office/drawing/2014/main" id="{79675660-B371-2219-4791-276D349372AE}"/>
+              </a:ext>
+            </a:extLst>
+          </p:cNvPr>
+          <p:cNvSpPr/>
+          <p:nvPr/>
+        </p:nvSpPr>
+        <p:spPr>
+          <a:xfrm>
+            <a:off x="4072616" y="5387253"/>
+            <a:ext cx="727769" cy="538059"/>
+          </a:xfrm>
+          <a:prstGeom prst="rect">
+            <a:avLst/>
+          </a:prstGeom>
+        </p:spPr>
+        <p:style>
+          <a:lnRef idx="1">
+            <a:schemeClr val="dk1"/>
+          </a:lnRef>
+          <a:fillRef idx="2">
+            <a:schemeClr val="dk1"/>
+          </a:fillRef>
+          <a:effectRef idx="1">
+            <a:schemeClr val="dk1"/>
+          </a:effectRef>
+          <a:fontRef idx="minor">
+            <a:schemeClr val="dk1"/>
+          </a:fontRef>
+        </p:style>
+        <p:txBody>
+          <a:bodyPr rtlCol="0" anchor="ctr"/>
+          <a:lstStyle/>
+          <a:p>
+            <a:pPr algn="ctr"/>
+            <a:r>
+              <a:rPr kumimoji="1" lang="en-US" altLang="ja-JP" dirty="0"/>
+              <a:t>NI</a:t>
+            </a:r>
+          </a:p>
+        </p:txBody>
+      </p:sp>
+      <p:cxnSp>
+        <p:nvCxnSpPr>
+          <p:cNvPr id="45" name="直線コネクタ 44">
+            <a:extLst>
+              <a:ext uri="{FF2B5EF4-FFF2-40B4-BE49-F238E27FC236}">
+                <a16:creationId xmlns:a16="http://schemas.microsoft.com/office/drawing/2014/main" id="{F5BF876E-E4B6-C171-6897-C772E99B4FB9}"/>
+              </a:ext>
+            </a:extLst>
+          </p:cNvPr>
+          <p:cNvCxnSpPr>
+            <a:cxnSpLocks/>
+            <a:stCxn id="43" idx="3"/>
+            <a:endCxn id="38" idx="1"/>
+          </p:cNvCxnSpPr>
+          <p:nvPr/>
+        </p:nvCxnSpPr>
+        <p:spPr>
+          <a:xfrm>
+            <a:off x="5814880" y="5643407"/>
+            <a:ext cx="286726" cy="1"/>
+          </a:xfrm>
+          <a:prstGeom prst="line">
+            <a:avLst/>
+          </a:prstGeom>
+          <a:ln w="19050">
+            <a:prstDash val="dash"/>
+          </a:ln>
+        </p:spPr>
+        <p:style>
+          <a:lnRef idx="1">
+            <a:schemeClr val="dk1"/>
+          </a:lnRef>
+          <a:fillRef idx="0">
+            <a:schemeClr val="dk1"/>
+          </a:fillRef>
+          <a:effectRef idx="0">
+            <a:schemeClr val="dk1"/>
+          </a:effectRef>
+          <a:fontRef idx="minor">
+            <a:schemeClr val="tx1"/>
+          </a:fontRef>
+        </p:style>
+      </p:cxnSp>
+      <p:cxnSp>
+        <p:nvCxnSpPr>
+          <p:cNvPr id="48" name="直線コネクタ 47">
+            <a:extLst>
+              <a:ext uri="{FF2B5EF4-FFF2-40B4-BE49-F238E27FC236}">
+                <a16:creationId xmlns:a16="http://schemas.microsoft.com/office/drawing/2014/main" id="{1855D12C-CCE1-6B62-EC61-6997AF892EC5}"/>
+              </a:ext>
+            </a:extLst>
+          </p:cNvPr>
+          <p:cNvCxnSpPr>
+            <a:cxnSpLocks/>
+            <a:stCxn id="44" idx="3"/>
+            <a:endCxn id="43" idx="1"/>
+          </p:cNvCxnSpPr>
+          <p:nvPr/>
+        </p:nvCxnSpPr>
+        <p:spPr>
+          <a:xfrm flipV="1">
+            <a:off x="4800385" y="5643407"/>
+            <a:ext cx="286726" cy="12876"/>
+          </a:xfrm>
+          <a:prstGeom prst="line">
+            <a:avLst/>
+          </a:prstGeom>
+          <a:ln w="19050">
+            <a:prstDash val="dash"/>
+          </a:ln>
+        </p:spPr>
+        <p:style>
+          <a:lnRef idx="1">
+            <a:schemeClr val="dk1"/>
+          </a:lnRef>
+          <a:fillRef idx="0">
+            <a:schemeClr val="dk1"/>
+          </a:fillRef>
+          <a:effectRef idx="0">
+            <a:schemeClr val="dk1"/>
+          </a:effectRef>
+          <a:fontRef idx="minor">
+            <a:schemeClr val="tx1"/>
+          </a:fontRef>
+        </p:style>
+      </p:cxnSp>
+      <p:cxnSp>
+        <p:nvCxnSpPr>
+          <p:cNvPr id="52" name="コネクタ: カギ線 51">
+            <a:extLst>
+              <a:ext uri="{FF2B5EF4-FFF2-40B4-BE49-F238E27FC236}">
+                <a16:creationId xmlns:a16="http://schemas.microsoft.com/office/drawing/2014/main" id="{12C12AC0-5503-6545-2797-97B315567D81}"/>
+              </a:ext>
+            </a:extLst>
+          </p:cNvPr>
+          <p:cNvCxnSpPr>
+            <a:cxnSpLocks/>
+            <a:stCxn id="44" idx="1"/>
+            <a:endCxn id="24" idx="2"/>
+          </p:cNvCxnSpPr>
+          <p:nvPr/>
+        </p:nvCxnSpPr>
+        <p:spPr>
+          <a:xfrm rot="10800000">
+            <a:off x="3424064" y="4992507"/>
+            <a:ext cx="648553" cy="663776"/>
+          </a:xfrm>
+          <a:prstGeom prst="bentConnector2">
+            <a:avLst/>
+          </a:prstGeom>
+          <a:ln w="19050">
+            <a:prstDash val="dash"/>
+          </a:ln>
+        </p:spPr>
+        <p:style>
+          <a:lnRef idx="1">
+            <a:schemeClr val="dk1"/>
+          </a:lnRef>
+          <a:fillRef idx="0">
+            <a:schemeClr val="dk1"/>
+          </a:fillRef>
+          <a:effectRef idx="0">
+            <a:schemeClr val="dk1"/>
+          </a:effectRef>
+          <a:fontRef idx="minor">
+            <a:schemeClr val="tx1"/>
+          </a:fontRef>
+        </p:style>
+      </p:cxnSp>
+      <p:sp>
+        <p:nvSpPr>
+          <p:cNvPr id="55" name="テキスト ボックス 54">
+            <a:extLst>
+              <a:ext uri="{FF2B5EF4-FFF2-40B4-BE49-F238E27FC236}">
+                <a16:creationId xmlns:a16="http://schemas.microsoft.com/office/drawing/2014/main" id="{C4E3AE74-DE72-E04B-7DD7-80139974F851}"/>
+              </a:ext>
+            </a:extLst>
+          </p:cNvPr>
+          <p:cNvSpPr txBox="1"/>
+          <p:nvPr/>
+        </p:nvSpPr>
+        <p:spPr>
+          <a:xfrm>
+            <a:off x="4815516" y="1953578"/>
+            <a:ext cx="1622738" cy="307777"/>
+          </a:xfrm>
+          <a:prstGeom prst="rect">
+            <a:avLst/>
+          </a:prstGeom>
+          <a:noFill/>
+        </p:spPr>
+        <p:txBody>
+          <a:bodyPr wrap="square" rtlCol="0">
+            <a:spAutoFit/>
+          </a:bodyPr>
+          <a:lstStyle/>
+          <a:p>
+            <a:pPr algn="ctr"/>
+            <a:r>
+              <a:rPr kumimoji="1" lang="en-US" altLang="ja-JP" dirty="0"/>
+              <a:t>10MHz</a:t>
+            </a:r>
+            <a:r>
+              <a:rPr kumimoji="1" lang="ja-JP" altLang="en-US" dirty="0"/>
+              <a:t>→</a:t>
+            </a:r>
+            <a:r>
+              <a:rPr kumimoji="1" lang="en-US" altLang="ja-JP" dirty="0"/>
+              <a:t>48kHz</a:t>
+            </a:r>
+            <a:endParaRPr kumimoji="1" lang="ja-JP" altLang="en-US" dirty="0"/>
+          </a:p>
+        </p:txBody>
+      </p:sp>
+      <p:sp>
+        <p:nvSpPr>
+          <p:cNvPr id="56" name="テキスト ボックス 55">
+            <a:extLst>
+              <a:ext uri="{FF2B5EF4-FFF2-40B4-BE49-F238E27FC236}">
+                <a16:creationId xmlns:a16="http://schemas.microsoft.com/office/drawing/2014/main" id="{AD5DC596-5B58-1E30-7804-DC0F2D4458B5}"/>
+              </a:ext>
+            </a:extLst>
+          </p:cNvPr>
+          <p:cNvSpPr txBox="1"/>
+          <p:nvPr/>
+        </p:nvSpPr>
+        <p:spPr>
+          <a:xfrm>
+            <a:off x="4800385" y="3618962"/>
+            <a:ext cx="1622738" cy="307777"/>
+          </a:xfrm>
+          <a:prstGeom prst="rect">
+            <a:avLst/>
+          </a:prstGeom>
+          <a:noFill/>
+        </p:spPr>
+        <p:txBody>
+          <a:bodyPr wrap="square" rtlCol="0">
+            <a:spAutoFit/>
+          </a:bodyPr>
+          <a:lstStyle/>
+          <a:p>
+            <a:pPr algn="ctr"/>
+            <a:r>
+              <a:rPr kumimoji="1" lang="en-US" altLang="ja-JP" dirty="0"/>
+              <a:t>10MHz</a:t>
+            </a:r>
+            <a:r>
+              <a:rPr kumimoji="1" lang="ja-JP" altLang="en-US" dirty="0"/>
+              <a:t>→</a:t>
+            </a:r>
+            <a:r>
+              <a:rPr kumimoji="1" lang="en-US" altLang="ja-JP" dirty="0"/>
+              <a:t>48kHz</a:t>
+            </a:r>
+            <a:endParaRPr kumimoji="1" lang="ja-JP" altLang="en-US" dirty="0"/>
+          </a:p>
+        </p:txBody>
+      </p:sp>
+    </p:spTree>
+  </p:cSld>
+  <p:clrMapOvr>
+    <a:masterClrMapping/>
+  </p:clrMapOvr>
+</p:sld>
+</file>
+
+<file path=ppt/slides/slide8.xml><?xml version="1.0" encoding="utf-8"?>
+<p:sld xmlns:a="http://schemas.openxmlformats.org/drawingml/2006/main" xmlns:r="http://schemas.openxmlformats.org/officeDocument/2006/relationships" xmlns:p="http://schemas.openxmlformats.org/presentationml/2006/main">
+  <p:cSld>
+    <p:spTree>
+      <p:nvGrpSpPr>
+        <p:cNvPr id="1" name=""/>
+        <p:cNvGrpSpPr/>
+        <p:nvPr/>
+      </p:nvGrpSpPr>
+      <p:grpSpPr>
+        <a:xfrm>
+          <a:off x="0" y="0"/>
+          <a:ext cx="0" cy="0"/>
+          <a:chOff x="0" y="0"/>
+          <a:chExt cx="0" cy="0"/>
+        </a:xfrm>
+      </p:grpSpPr>
+      <p:sp>
+        <p:nvSpPr>
+          <p:cNvPr id="2" name="Title 1"/>
+          <p:cNvSpPr>
+            <a:spLocks noGrp="1"/>
+          </p:cNvSpPr>
+          <p:nvPr>
+            <p:ph type="title"/>
+          </p:nvPr>
+        </p:nvSpPr>
+        <p:spPr>
+          <a:xfrm>
+            <a:off x="228600" y="237744"/>
+            <a:ext cx="9473184" cy="969264"/>
+          </a:xfrm>
+        </p:spPr>
+        <p:txBody>
+          <a:bodyPr/>
+          <a:lstStyle/>
+          <a:p>
+            <a:pPr>
+              <a:spcBef>
+                <a:spcPts val="0"/>
+              </a:spcBef>
+              <a:spcAft>
+                <a:spcPts val="0"/>
+              </a:spcAft>
+            </a:pPr>
+            <a:r>
+              <a:rPr sz="1400" b="1" dirty="0">
+                <a:solidFill>
+                  <a:srgbClr val="000F78"/>
+                </a:solidFill>
+                <a:latin typeface="Arial"/>
+                <a:ea typeface="Arial"/>
+              </a:rPr>
+              <a:t>04. </a:t>
+            </a:r>
+            <a:r>
+              <a:rPr sz="1400" b="1" dirty="0" err="1">
+                <a:solidFill>
+                  <a:srgbClr val="000F78"/>
+                </a:solidFill>
+                <a:latin typeface="Arial"/>
+                <a:ea typeface="Arial"/>
+              </a:rPr>
+              <a:t>研究方法</a:t>
+            </a:r>
+            <a:endParaRPr sz="1400" b="1" dirty="0">
+              <a:solidFill>
+                <a:srgbClr val="000F78"/>
+              </a:solidFill>
+              <a:latin typeface="Arial"/>
+              <a:ea typeface="Arial"/>
+            </a:endParaRPr>
+          </a:p>
+          <a:p>
+            <a:pPr>
+              <a:spcBef>
+                <a:spcPts val="0"/>
+              </a:spcBef>
+              <a:spcAft>
+                <a:spcPts val="0"/>
+              </a:spcAft>
+            </a:pPr>
+            <a:r>
+              <a:rPr b="1" dirty="0">
+                <a:solidFill>
+                  <a:srgbClr val="000F78"/>
+                </a:solidFill>
+                <a:latin typeface="Arial"/>
+                <a:ea typeface="Arial"/>
+              </a:rPr>
+              <a:t>4-</a:t>
+            </a:r>
+            <a:r>
+              <a:rPr lang="en-US" b="1" dirty="0">
+                <a:solidFill>
+                  <a:srgbClr val="000F78"/>
+                </a:solidFill>
+                <a:latin typeface="Arial"/>
+                <a:ea typeface="Arial"/>
+              </a:rPr>
+              <a:t>2</a:t>
+            </a:r>
+            <a:r>
+              <a:rPr b="1" dirty="0">
+                <a:solidFill>
+                  <a:srgbClr val="000F78"/>
+                </a:solidFill>
+                <a:latin typeface="Arial"/>
+                <a:ea typeface="Arial"/>
+              </a:rPr>
+              <a:t>. </a:t>
+            </a:r>
+            <a:r>
+              <a:rPr b="1" dirty="0" err="1">
+                <a:solidFill>
+                  <a:srgbClr val="000F78"/>
+                </a:solidFill>
+                <a:latin typeface="Arial"/>
+                <a:ea typeface="Arial"/>
+              </a:rPr>
+              <a:t>測定法：オーディオレコーダを使う理由</a:t>
+            </a:r>
+            <a:endParaRPr b="1" dirty="0">
+              <a:solidFill>
+                <a:srgbClr val="000F78"/>
+              </a:solidFill>
+              <a:latin typeface="Arial"/>
+              <a:ea typeface="Arial"/>
+            </a:endParaRPr>
+          </a:p>
+        </p:txBody>
+      </p:sp>
+      <p:sp>
+        <p:nvSpPr>
+          <p:cNvPr id="3" name="Text Placeholder 2"/>
+          <p:cNvSpPr>
+            <a:spLocks noGrp="1"/>
+          </p:cNvSpPr>
+          <p:nvPr>
+            <p:ph type="body" idx="1"/>
+          </p:nvPr>
+        </p:nvSpPr>
+        <p:spPr>
+          <a:xfrm>
+            <a:off x="274320" y="932688"/>
+            <a:ext cx="9326880" cy="1810512"/>
+          </a:xfrm>
+        </p:spPr>
+        <p:txBody>
+          <a:bodyPr wrap="square"/>
+          <a:lstStyle/>
+          <a:p>
+            <a:r>
+              <a:rPr b="1" dirty="0">
+                <a:solidFill>
+                  <a:srgbClr val="1B2A5A"/>
+                </a:solidFill>
+                <a:latin typeface="Arial"/>
+                <a:ea typeface="Arial"/>
+              </a:rPr>
+              <a:t>オーディオレコーディングは高分解能（10秒測定で std 20–30 ps）かつ長時間測定が可能で、0.1–1 Hz </a:t>
+            </a:r>
+            <a:r>
+              <a:rPr b="1" dirty="0" err="1">
+                <a:solidFill>
+                  <a:srgbClr val="1B2A5A"/>
+                </a:solidFill>
+                <a:latin typeface="Arial"/>
+                <a:ea typeface="Arial"/>
+              </a:rPr>
+              <a:t>の評価に向いている</a:t>
+            </a:r>
+            <a:r>
+              <a:rPr lang="ja-JP" altLang="en-US" b="1" dirty="0">
+                <a:solidFill>
+                  <a:srgbClr val="1B2A5A"/>
+                </a:solidFill>
+                <a:latin typeface="Arial"/>
+                <a:ea typeface="Arial"/>
+              </a:rPr>
+              <a:t>。</a:t>
+            </a:r>
+            <a:endParaRPr b="1" dirty="0">
+              <a:solidFill>
+                <a:srgbClr val="1B2A5A"/>
+              </a:solidFill>
+              <a:latin typeface="Arial"/>
+              <a:ea typeface="Arial"/>
+            </a:endParaRPr>
+          </a:p>
+        </p:txBody>
+      </p:sp>
+      <p:sp>
+        <p:nvSpPr>
+          <p:cNvPr id="5" name="テキスト プレースホルダー 2">
+            <a:extLst>
+              <a:ext uri="{FF2B5EF4-FFF2-40B4-BE49-F238E27FC236}">
+                <a16:creationId xmlns:a16="http://schemas.microsoft.com/office/drawing/2014/main" id="{743FFDF0-7939-69C6-101F-4FD83094F5E2}"/>
+              </a:ext>
+            </a:extLst>
+          </p:cNvPr>
+          <p:cNvSpPr txBox="1">
+            <a:spLocks/>
+          </p:cNvSpPr>
+          <p:nvPr/>
+        </p:nvSpPr>
+        <p:spPr>
+          <a:xfrm>
+            <a:off x="274320" y="2515110"/>
+            <a:ext cx="9049008" cy="1461735"/>
+          </a:xfrm>
+          <a:prstGeom prst="rect">
+            <a:avLst/>
+          </a:prstGeom>
+          <a:noFill/>
+          <a:ln>
+            <a:noFill/>
+          </a:ln>
+        </p:spPr>
+        <p:txBody>
+          <a:bodyPr spcFirstLastPara="1" wrap="square" lIns="88425" tIns="43175" rIns="88425" bIns="43175" anchor="t" anchorCtr="0">
+            <a:noAutofit/>
+          </a:bodyPr>
+          <a:lstStyle>
+            <a:defPPr marR="0" lvl="0" algn="l" rtl="0">
+              <a:lnSpc>
+                <a:spcPct val="100000"/>
+              </a:lnSpc>
+              <a:spcBef>
+                <a:spcPts val="0"/>
+              </a:spcBef>
+              <a:spcAft>
+                <a:spcPts val="0"/>
+              </a:spcAft>
+            </a:defPPr>
+            <a:lvl1pPr marL="457200" marR="0" lvl="0" indent="-331787" algn="l" rtl="0">
+              <a:lnSpc>
+                <a:spcPct val="100000"/>
+              </a:lnSpc>
+              <a:spcBef>
+                <a:spcPts val="488"/>
+              </a:spcBef>
+              <a:spcAft>
+                <a:spcPts val="0"/>
+              </a:spcAft>
+              <a:buClr>
+                <a:schemeClr val="lt2"/>
+              </a:buClr>
+              <a:buSzPts val="1625"/>
+              <a:buFont typeface="Noto Sans Symbols"/>
+              <a:buChar char="■"/>
+              <a:defRPr sz="1800" b="0" i="0" u="none" strike="noStrike" cap="none">
+                <a:solidFill>
+                  <a:schemeClr val="tx1"/>
+                </a:solidFill>
+                <a:latin typeface="Arial"/>
+                <a:ea typeface="Arial"/>
+                <a:cs typeface="Arial"/>
+                <a:sym typeface="Arial"/>
+              </a:defRPr>
+            </a:lvl1pPr>
+            <a:lvl2pPr marL="914400" marR="0" lvl="1" indent="-321500" algn="l" rtl="0">
+              <a:lnSpc>
+                <a:spcPct val="100000"/>
+              </a:lnSpc>
+              <a:spcBef>
+                <a:spcPts val="439"/>
+              </a:spcBef>
+              <a:spcAft>
+                <a:spcPts val="0"/>
+              </a:spcAft>
+              <a:buClr>
+                <a:schemeClr val="lt2"/>
+              </a:buClr>
+              <a:buSzPts val="1463"/>
+              <a:buFont typeface="Noto Sans Symbols"/>
+              <a:buChar char="●"/>
+              <a:defRPr sz="1463" b="0" i="0" u="none" strike="noStrike" cap="none">
+                <a:solidFill>
+                  <a:schemeClr val="dk1"/>
+                </a:solidFill>
+                <a:latin typeface="Arial"/>
+                <a:ea typeface="Arial"/>
+                <a:cs typeface="Arial"/>
+                <a:sym typeface="Arial"/>
+              </a:defRPr>
+            </a:lvl2pPr>
+            <a:lvl3pPr marL="1371600" marR="0" lvl="2" indent="-311150" algn="l" rtl="0">
+              <a:lnSpc>
+                <a:spcPct val="100000"/>
+              </a:lnSpc>
+              <a:spcBef>
+                <a:spcPts val="260"/>
+              </a:spcBef>
+              <a:spcAft>
+                <a:spcPts val="0"/>
+              </a:spcAft>
+              <a:buClr>
+                <a:schemeClr val="dk1"/>
+              </a:buClr>
+              <a:buSzPts val="1300"/>
+              <a:buFont typeface="Arial"/>
+              <a:buChar char="▪"/>
+              <a:defRPr sz="1300" b="0" i="0" u="none" strike="noStrike" cap="none">
+                <a:solidFill>
+                  <a:schemeClr val="dk1"/>
+                </a:solidFill>
+                <a:latin typeface="Arial"/>
+                <a:ea typeface="Arial"/>
+                <a:cs typeface="Arial"/>
+                <a:sym typeface="Arial"/>
+              </a:defRPr>
+            </a:lvl3pPr>
+            <a:lvl4pPr marL="1828800" marR="0" lvl="3" indent="-300863" algn="l" rtl="0">
+              <a:lnSpc>
+                <a:spcPct val="100000"/>
+              </a:lnSpc>
+              <a:spcBef>
+                <a:spcPts val="171"/>
+              </a:spcBef>
+              <a:spcAft>
+                <a:spcPts val="0"/>
+              </a:spcAft>
+              <a:buClr>
+                <a:schemeClr val="dk1"/>
+              </a:buClr>
+              <a:buSzPts val="1138"/>
+              <a:buFont typeface="Arial"/>
+              <a:buChar char="▪"/>
+              <a:defRPr sz="1138" b="0" i="0" u="none" strike="noStrike" cap="none">
+                <a:solidFill>
+                  <a:schemeClr val="dk1"/>
+                </a:solidFill>
+                <a:latin typeface="Arial"/>
+                <a:ea typeface="Arial"/>
+                <a:cs typeface="Arial"/>
+                <a:sym typeface="Arial"/>
+              </a:defRPr>
+            </a:lvl4pPr>
+            <a:lvl5pPr marL="2286000" marR="0" lvl="4" indent="-290512" algn="l" rtl="0">
+              <a:lnSpc>
+                <a:spcPct val="100000"/>
+              </a:lnSpc>
+              <a:spcBef>
+                <a:spcPts val="98"/>
+              </a:spcBef>
+              <a:spcAft>
+                <a:spcPts val="0"/>
+              </a:spcAft>
+              <a:buClr>
+                <a:schemeClr val="dk1"/>
+              </a:buClr>
+              <a:buSzPts val="975"/>
+              <a:buFont typeface="Arial"/>
+              <a:buChar char="▪"/>
+              <a:defRPr sz="975" b="0" i="0" u="none" strike="noStrike" cap="none">
+                <a:solidFill>
+                  <a:schemeClr val="dk1"/>
+                </a:solidFill>
+                <a:latin typeface="Arial"/>
+                <a:ea typeface="Arial"/>
+                <a:cs typeface="Arial"/>
+                <a:sym typeface="Arial"/>
+              </a:defRPr>
+            </a:lvl5pPr>
+            <a:lvl6pPr marL="2743200" marR="0" lvl="5" indent="-342900" algn="l" rtl="0">
+              <a:lnSpc>
+                <a:spcPct val="100000"/>
+              </a:lnSpc>
+              <a:spcBef>
+                <a:spcPts val="180"/>
+              </a:spcBef>
+              <a:spcAft>
+                <a:spcPts val="0"/>
+              </a:spcAft>
+              <a:buClr>
+                <a:schemeClr val="dk1"/>
+              </a:buClr>
+              <a:buSzPts val="1800"/>
+              <a:buFont typeface="Arial"/>
+              <a:buChar char="▪"/>
+              <a:defRPr sz="1200" b="0" i="0" u="none" strike="noStrike" cap="none">
+                <a:solidFill>
+                  <a:schemeClr val="dk1"/>
+                </a:solidFill>
+                <a:latin typeface="Arial"/>
+                <a:ea typeface="Arial"/>
+                <a:cs typeface="Arial"/>
+                <a:sym typeface="Arial"/>
+              </a:defRPr>
+            </a:lvl6pPr>
+            <a:lvl7pPr marL="3200400" marR="0" lvl="6" indent="-342900" algn="l" rtl="0">
+              <a:lnSpc>
+                <a:spcPct val="100000"/>
+              </a:lnSpc>
+              <a:spcBef>
+                <a:spcPts val="180"/>
+              </a:spcBef>
+              <a:spcAft>
+                <a:spcPts val="0"/>
+              </a:spcAft>
+              <a:buClr>
+                <a:schemeClr val="dk1"/>
+              </a:buClr>
+              <a:buSzPts val="1800"/>
+              <a:buFont typeface="Arial"/>
+              <a:buChar char="▪"/>
+              <a:defRPr sz="1200" b="0" i="0" u="none" strike="noStrike" cap="none">
+                <a:solidFill>
+                  <a:schemeClr val="dk1"/>
+                </a:solidFill>
+                <a:latin typeface="Arial"/>
+                <a:ea typeface="Arial"/>
+                <a:cs typeface="Arial"/>
+                <a:sym typeface="Arial"/>
+              </a:defRPr>
+            </a:lvl7pPr>
+            <a:lvl8pPr marL="3657600" marR="0" lvl="7" indent="-342900" algn="l" rtl="0">
+              <a:lnSpc>
+                <a:spcPct val="100000"/>
+              </a:lnSpc>
+              <a:spcBef>
+                <a:spcPts val="180"/>
+              </a:spcBef>
+              <a:spcAft>
+                <a:spcPts val="0"/>
+              </a:spcAft>
+              <a:buClr>
+                <a:schemeClr val="dk1"/>
+              </a:buClr>
+              <a:buSzPts val="1800"/>
+              <a:buFont typeface="Arial"/>
+              <a:buChar char="▪"/>
+              <a:defRPr sz="1200" b="0" i="0" u="none" strike="noStrike" cap="none">
+                <a:solidFill>
+                  <a:schemeClr val="dk1"/>
+                </a:solidFill>
+                <a:latin typeface="Arial"/>
+                <a:ea typeface="Arial"/>
+                <a:cs typeface="Arial"/>
+                <a:sym typeface="Arial"/>
+              </a:defRPr>
+            </a:lvl8pPr>
+            <a:lvl9pPr marL="4114800" marR="0" lvl="8" indent="-342900" algn="l" rtl="0">
+              <a:lnSpc>
+                <a:spcPct val="100000"/>
+              </a:lnSpc>
+              <a:spcBef>
+                <a:spcPts val="180"/>
+              </a:spcBef>
+              <a:spcAft>
+                <a:spcPts val="0"/>
+              </a:spcAft>
+              <a:buClr>
+                <a:schemeClr val="dk1"/>
+              </a:buClr>
+              <a:buSzPts val="1800"/>
+              <a:buFont typeface="Arial"/>
+              <a:buChar char="▪"/>
+              <a:defRPr sz="1200" b="0" i="0" u="none" strike="noStrike" cap="none">
+                <a:solidFill>
+                  <a:schemeClr val="dk1"/>
+                </a:solidFill>
+                <a:latin typeface="Arial"/>
+                <a:ea typeface="Arial"/>
+                <a:cs typeface="Arial"/>
+                <a:sym typeface="Arial"/>
+              </a:defRPr>
+            </a:lvl9pPr>
+          </a:lstStyle>
+          <a:p>
+            <a:r>
+              <a:rPr kumimoji="1" lang="ja-JP" altLang="en-US" dirty="0"/>
+              <a:t>なぜオシロスコープでは、下限</a:t>
+            </a:r>
+            <a:r>
+              <a:rPr kumimoji="1" lang="en-US" altLang="ja-JP" dirty="0"/>
+              <a:t>0.1Hz</a:t>
+            </a:r>
+            <a:r>
+              <a:rPr kumimoji="1" lang="ja-JP" altLang="en-US" dirty="0"/>
+              <a:t>の測定が行えないか。</a:t>
+            </a:r>
+            <a:endParaRPr kumimoji="1" lang="en-US" altLang="ja-JP" dirty="0"/>
+          </a:p>
+          <a:p>
+            <a:pPr lvl="1"/>
+            <a:r>
+              <a:rPr kumimoji="1" lang="en-US" altLang="ja-JP" sz="1637" dirty="0">
+                <a:solidFill>
+                  <a:schemeClr val="tx1"/>
+                </a:solidFill>
+              </a:rPr>
+              <a:t>DFT</a:t>
+            </a:r>
+            <a:r>
+              <a:rPr kumimoji="1" lang="ja-JP" altLang="en-US" sz="1637" dirty="0">
+                <a:solidFill>
+                  <a:schemeClr val="tx1"/>
+                </a:solidFill>
+              </a:rPr>
+              <a:t>による解析時に最小周波数単位</a:t>
+            </a:r>
+            <a:r>
+              <a:rPr kumimoji="1" lang="en-US" altLang="ja-JP" sz="1637" dirty="0" err="1">
+                <a:solidFill>
+                  <a:schemeClr val="tx1"/>
+                </a:solidFill>
+              </a:rPr>
+              <a:t>Δf</a:t>
+            </a:r>
+            <a:r>
+              <a:rPr kumimoji="1" lang="en-US" altLang="ja-JP" sz="1637" dirty="0">
+                <a:solidFill>
+                  <a:schemeClr val="tx1"/>
+                </a:solidFill>
+              </a:rPr>
+              <a:t>=0.1Hz</a:t>
+            </a:r>
+            <a:r>
+              <a:rPr kumimoji="1" lang="ja-JP" altLang="en-US" sz="1637" dirty="0">
+                <a:solidFill>
+                  <a:schemeClr val="tx1"/>
+                </a:solidFill>
+              </a:rPr>
+              <a:t>でなければならない。</a:t>
+            </a:r>
+            <a:endParaRPr kumimoji="1" lang="en-US" altLang="ja-JP" sz="1637" dirty="0">
+              <a:solidFill>
+                <a:schemeClr val="tx1"/>
+              </a:solidFill>
+            </a:endParaRPr>
+          </a:p>
+          <a:p>
+            <a:pPr marL="592900" lvl="1" indent="0">
+              <a:buNone/>
+            </a:pPr>
+            <a:r>
+              <a:rPr kumimoji="1" lang="en-US" altLang="ja-JP" sz="1637" dirty="0">
+                <a:solidFill>
+                  <a:schemeClr val="tx1"/>
+                </a:solidFill>
+              </a:rPr>
+              <a:t>      </a:t>
+            </a:r>
+            <a:r>
+              <a:rPr kumimoji="1" lang="ja-JP" altLang="en-US" sz="1637" dirty="0">
+                <a:solidFill>
+                  <a:schemeClr val="tx1"/>
+                </a:solidFill>
+              </a:rPr>
+              <a:t>→</a:t>
+            </a:r>
+            <a:r>
+              <a:rPr kumimoji="1" lang="en-US" altLang="ja-JP" sz="1637" dirty="0">
+                <a:solidFill>
+                  <a:schemeClr val="tx1"/>
+                </a:solidFill>
+              </a:rPr>
+              <a:t>10s</a:t>
+            </a:r>
+            <a:r>
+              <a:rPr kumimoji="1" lang="ja-JP" altLang="en-US" sz="1637" dirty="0">
+                <a:solidFill>
+                  <a:schemeClr val="tx1"/>
+                </a:solidFill>
+              </a:rPr>
+              <a:t>の測定が必要。</a:t>
+            </a:r>
+            <a:r>
+              <a:rPr kumimoji="1" lang="en-US" altLang="ja-JP" sz="1600" dirty="0">
+                <a:solidFill>
+                  <a:schemeClr val="tx1"/>
+                </a:solidFill>
+              </a:rPr>
+              <a:t>	</a:t>
+            </a:r>
+            <a:endParaRPr kumimoji="1" lang="en-US" altLang="ja-JP" sz="1637" dirty="0">
+              <a:solidFill>
+                <a:schemeClr val="tx1"/>
+              </a:solidFill>
+            </a:endParaRPr>
+          </a:p>
+          <a:p>
+            <a:endParaRPr kumimoji="1" lang="en-US" altLang="ja-JP" sz="2137" dirty="0"/>
+          </a:p>
+          <a:p>
+            <a:pPr marL="592900" lvl="1" indent="0">
+              <a:buFont typeface="Noto Sans Symbols"/>
+              <a:buNone/>
+            </a:pPr>
+            <a:r>
+              <a:rPr kumimoji="1" lang="en-US" altLang="ja-JP" sz="1800" dirty="0">
+                <a:solidFill>
+                  <a:schemeClr val="tx1"/>
+                </a:solidFill>
+              </a:rPr>
+              <a:t>	</a:t>
+            </a:r>
+          </a:p>
+        </p:txBody>
+      </p:sp>
+      <p:graphicFrame>
+        <p:nvGraphicFramePr>
+          <p:cNvPr id="6" name="表 5">
+            <a:extLst>
+              <a:ext uri="{FF2B5EF4-FFF2-40B4-BE49-F238E27FC236}">
+                <a16:creationId xmlns:a16="http://schemas.microsoft.com/office/drawing/2014/main" id="{ED9071B2-E2DC-5E0A-25D9-390051D71256}"/>
+              </a:ext>
+            </a:extLst>
+          </p:cNvPr>
+          <p:cNvGraphicFramePr>
+            <a:graphicFrameLocks noGrp="1"/>
+          </p:cNvGraphicFramePr>
+          <p:nvPr>
+            <p:extLst>
+              <p:ext uri="{D42A27DB-BD31-4B8C-83A1-F6EECF244321}">
+                <p14:modId xmlns:p14="http://schemas.microsoft.com/office/powerpoint/2010/main" val="2172531467"/>
+              </p:ext>
+            </p:extLst>
+          </p:nvPr>
+        </p:nvGraphicFramePr>
+        <p:xfrm>
+          <a:off x="1943112" y="3782403"/>
+          <a:ext cx="6474460" cy="1756400"/>
+        </p:xfrm>
+        <a:graphic>
+          <a:graphicData uri="http://schemas.openxmlformats.org/drawingml/2006/table">
+            <a:tbl>
+              <a:tblPr firstRow="1" bandRow="1">
+                <a:tableStyleId>{FFF55246-B984-4F00-A051-4BF160ACBDB1}</a:tableStyleId>
+              </a:tblPr>
+              <a:tblGrid>
+                <a:gridCol w="2158153">
+                  <a:extLst>
+                    <a:ext uri="{9D8B030D-6E8A-4147-A177-3AD203B41FA5}">
+                      <a16:colId xmlns:a16="http://schemas.microsoft.com/office/drawing/2014/main" val="1379942070"/>
+                    </a:ext>
+                  </a:extLst>
+                </a:gridCol>
+                <a:gridCol w="2192085">
+                  <a:extLst>
+                    <a:ext uri="{9D8B030D-6E8A-4147-A177-3AD203B41FA5}">
+                      <a16:colId xmlns:a16="http://schemas.microsoft.com/office/drawing/2014/main" val="4021740923"/>
+                    </a:ext>
+                  </a:extLst>
+                </a:gridCol>
+                <a:gridCol w="2124222">
+                  <a:extLst>
+                    <a:ext uri="{9D8B030D-6E8A-4147-A177-3AD203B41FA5}">
+                      <a16:colId xmlns:a16="http://schemas.microsoft.com/office/drawing/2014/main" val="1910060141"/>
+                    </a:ext>
+                  </a:extLst>
+                </a:gridCol>
+              </a:tblGrid>
+              <a:tr h="726786">
+                <a:tc>
+                  <a:txBody>
+                    <a:bodyPr/>
+                    <a:lstStyle/>
+                    <a:p>
+                      <a:r>
+                        <a:rPr kumimoji="1" lang="ja-JP" altLang="en-US"/>
+                        <a:t>測定器</a:t>
+                      </a:r>
+                    </a:p>
+                  </a:txBody>
+                  <a:tcPr/>
+                </a:tc>
+                <a:tc>
+                  <a:txBody>
+                    <a:bodyPr/>
+                    <a:lstStyle/>
+                    <a:p>
+                      <a:r>
+                        <a:rPr kumimoji="1" lang="ja-JP" altLang="en-US"/>
+                        <a:t>サンプルレート</a:t>
+                      </a:r>
+                    </a:p>
+                  </a:txBody>
+                  <a:tcPr/>
+                </a:tc>
+                <a:tc>
+                  <a:txBody>
+                    <a:bodyPr/>
+                    <a:lstStyle/>
+                    <a:p>
+                      <a:r>
+                        <a:rPr kumimoji="1" lang="ja-JP" altLang="en-US"/>
+                        <a:t>サンプル数</a:t>
+                      </a:r>
+                      <a:endParaRPr kumimoji="1" lang="en-US" altLang="ja-JP" dirty="0"/>
+                    </a:p>
+                    <a:p>
+                      <a:r>
+                        <a:rPr kumimoji="1" lang="ja-JP" altLang="en-US"/>
+                        <a:t>（</a:t>
+                      </a:r>
+                      <a:r>
+                        <a:rPr kumimoji="1" lang="en-US" altLang="ja-JP" dirty="0"/>
+                        <a:t>10</a:t>
+                      </a:r>
+                      <a:r>
+                        <a:rPr kumimoji="1" lang="ja-JP" altLang="en-US"/>
+                        <a:t>秒測定の場合）</a:t>
+                      </a:r>
+                    </a:p>
+                  </a:txBody>
+                  <a:tcPr/>
+                </a:tc>
+                <a:extLst>
+                  <a:ext uri="{0D108BD9-81ED-4DB2-BD59-A6C34878D82A}">
+                    <a16:rowId xmlns:a16="http://schemas.microsoft.com/office/drawing/2014/main" val="280143233"/>
+                  </a:ext>
+                </a:extLst>
+              </a:tr>
+              <a:tr h="514807">
+                <a:tc>
+                  <a:txBody>
+                    <a:bodyPr/>
+                    <a:lstStyle/>
+                    <a:p>
+                      <a:r>
+                        <a:rPr kumimoji="1" lang="en-US" altLang="ja-JP" dirty="0"/>
+                        <a:t>Oscilloscope</a:t>
+                      </a:r>
+                      <a:endParaRPr kumimoji="1" lang="ja-JP" altLang="en-US"/>
+                    </a:p>
+                  </a:txBody>
+                  <a:tcPr/>
+                </a:tc>
+                <a:tc>
+                  <a:txBody>
+                    <a:bodyPr/>
+                    <a:lstStyle/>
+                    <a:p>
+                      <a:r>
+                        <a:rPr kumimoji="1" lang="en-US" altLang="ja-JP" dirty="0"/>
+                        <a:t>2.5G</a:t>
+                      </a:r>
+                      <a:r>
+                        <a:rPr kumimoji="1" lang="ja-JP" altLang="en-US"/>
+                        <a:t>サンプル</a:t>
+                      </a:r>
+                      <a:r>
+                        <a:rPr kumimoji="1" lang="en-US" altLang="ja-JP" dirty="0"/>
+                        <a:t>/s</a:t>
+                      </a:r>
+                      <a:endParaRPr kumimoji="1" lang="ja-JP" altLang="en-US"/>
+                    </a:p>
+                  </a:txBody>
+                  <a:tcPr/>
+                </a:tc>
+                <a:tc>
+                  <a:txBody>
+                    <a:bodyPr/>
+                    <a:lstStyle/>
+                    <a:p>
+                      <a:r>
+                        <a:rPr kumimoji="1" lang="en-US" altLang="ja-JP" dirty="0"/>
+                        <a:t>25G</a:t>
+                      </a:r>
+                      <a:r>
+                        <a:rPr kumimoji="1" lang="ja-JP" altLang="en-US"/>
+                        <a:t>サンプル</a:t>
+                      </a:r>
+                    </a:p>
+                  </a:txBody>
+                  <a:tcPr/>
+                </a:tc>
+                <a:extLst>
+                  <a:ext uri="{0D108BD9-81ED-4DB2-BD59-A6C34878D82A}">
+                    <a16:rowId xmlns:a16="http://schemas.microsoft.com/office/drawing/2014/main" val="1514337629"/>
+                  </a:ext>
+                </a:extLst>
+              </a:tr>
+              <a:tr h="514807">
+                <a:tc>
+                  <a:txBody>
+                    <a:bodyPr/>
+                    <a:lstStyle/>
+                    <a:p>
+                      <a:r>
+                        <a:rPr kumimoji="1" lang="en-US" altLang="ja-JP" dirty="0"/>
+                        <a:t>Audio Recorder</a:t>
+                      </a:r>
+                      <a:endParaRPr kumimoji="1" lang="ja-JP" altLang="en-US"/>
+                    </a:p>
+                  </a:txBody>
+                  <a:tcPr/>
+                </a:tc>
+                <a:tc>
+                  <a:txBody>
+                    <a:bodyPr/>
+                    <a:lstStyle/>
+                    <a:p>
+                      <a:r>
+                        <a:rPr kumimoji="1" lang="en-US" altLang="ja-JP" dirty="0"/>
+                        <a:t>192k</a:t>
+                      </a:r>
+                      <a:r>
+                        <a:rPr kumimoji="1" lang="ja-JP" altLang="en-US"/>
+                        <a:t>サンプル</a:t>
+                      </a:r>
+                      <a:r>
+                        <a:rPr kumimoji="1" lang="en-US" altLang="ja-JP" dirty="0"/>
+                        <a:t>/s</a:t>
+                      </a:r>
+                      <a:endParaRPr kumimoji="1" lang="ja-JP" altLang="en-US"/>
+                    </a:p>
+                  </a:txBody>
+                  <a:tcPr/>
+                </a:tc>
+                <a:tc>
+                  <a:txBody>
+                    <a:bodyPr/>
+                    <a:lstStyle/>
+                    <a:p>
+                      <a:r>
+                        <a:rPr kumimoji="1" lang="en-US" altLang="ja-JP" dirty="0"/>
+                        <a:t>1.92M</a:t>
+                      </a:r>
+                      <a:r>
+                        <a:rPr kumimoji="1" lang="ja-JP" altLang="en-US"/>
+                        <a:t>サンプル</a:t>
+                      </a:r>
+                    </a:p>
+                  </a:txBody>
+                  <a:tcPr/>
+                </a:tc>
+                <a:extLst>
+                  <a:ext uri="{0D108BD9-81ED-4DB2-BD59-A6C34878D82A}">
+                    <a16:rowId xmlns:a16="http://schemas.microsoft.com/office/drawing/2014/main" val="3723115245"/>
+                  </a:ext>
+                </a:extLst>
+              </a:tr>
+            </a:tbl>
+          </a:graphicData>
+        </a:graphic>
+      </p:graphicFrame>
+    </p:spTree>
+  </p:cSld>
+  <p:clrMapOvr>
+    <a:masterClrMapping/>
+  </p:clrMapOvr>
+</p:sld>
+</file>
+
+<file path=ppt/slides/slide9.xml><?xml version="1.0" encoding="utf-8"?>
+<p:sld xmlns:a="http://schemas.openxmlformats.org/drawingml/2006/main" xmlns:r="http://schemas.openxmlformats.org/officeDocument/2006/relationships" xmlns:p="http://schemas.openxmlformats.org/presentationml/2006/main">
+  <p:cSld>
+    <p:spTree>
+      <p:nvGrpSpPr>
+        <p:cNvPr id="1" name=""/>
+        <p:cNvGrpSpPr/>
+        <p:nvPr/>
+      </p:nvGrpSpPr>
+      <p:grpSpPr>
+        <a:xfrm>
+          <a:off x="0" y="0"/>
+          <a:ext cx="0" cy="0"/>
+          <a:chOff x="0" y="0"/>
+          <a:chExt cx="0" cy="0"/>
+        </a:xfrm>
+      </p:grpSpPr>
+      <p:sp>
+        <p:nvSpPr>
+          <p:cNvPr id="2" name="Title 1"/>
+          <p:cNvSpPr>
+            <a:spLocks noGrp="1"/>
+          </p:cNvSpPr>
+          <p:nvPr>
+            <p:ph type="title"/>
+          </p:nvPr>
+        </p:nvSpPr>
+        <p:spPr>
+          <a:xfrm>
+            <a:off x="228600" y="237744"/>
+            <a:ext cx="9473184" cy="969264"/>
+          </a:xfrm>
+        </p:spPr>
+        <p:txBody>
+          <a:bodyPr/>
+          <a:lstStyle/>
+          <a:p>
+            <a:pPr>
+              <a:spcBef>
+                <a:spcPts val="0"/>
+              </a:spcBef>
+              <a:spcAft>
+                <a:spcPts val="0"/>
+              </a:spcAft>
+            </a:pPr>
+            <a:r>
+              <a:rPr sz="1400" b="1" dirty="0">
+                <a:solidFill>
+                  <a:srgbClr val="000F78"/>
+                </a:solidFill>
+                <a:latin typeface="Arial"/>
+                <a:ea typeface="Arial"/>
+              </a:rPr>
+              <a:t>04. </a:t>
+            </a:r>
+            <a:r>
+              <a:rPr sz="1400" b="1" dirty="0" err="1">
+                <a:solidFill>
+                  <a:srgbClr val="000F78"/>
+                </a:solidFill>
+                <a:latin typeface="Arial"/>
+                <a:ea typeface="Arial"/>
+              </a:rPr>
+              <a:t>研究方法</a:t>
+            </a:r>
+            <a:endParaRPr sz="1400" b="1" dirty="0">
+              <a:solidFill>
+                <a:srgbClr val="000F78"/>
+              </a:solidFill>
+              <a:latin typeface="Arial"/>
+              <a:ea typeface="Arial"/>
+            </a:endParaRPr>
+          </a:p>
+          <a:p>
+            <a:pPr>
+              <a:spcBef>
+                <a:spcPts val="0"/>
+              </a:spcBef>
+              <a:spcAft>
+                <a:spcPts val="0"/>
+              </a:spcAft>
+            </a:pPr>
+            <a:r>
+              <a:rPr b="1" dirty="0">
+                <a:solidFill>
+                  <a:srgbClr val="000F78"/>
+                </a:solidFill>
+                <a:latin typeface="Arial"/>
+                <a:ea typeface="Arial"/>
+              </a:rPr>
+              <a:t>4-</a:t>
+            </a:r>
+            <a:r>
+              <a:rPr lang="en-US" b="1" dirty="0">
+                <a:solidFill>
+                  <a:srgbClr val="000F78"/>
+                </a:solidFill>
+              </a:rPr>
+              <a:t>3</a:t>
+            </a:r>
+            <a:r>
+              <a:rPr b="1" dirty="0">
+                <a:solidFill>
+                  <a:srgbClr val="000F78"/>
+                </a:solidFill>
+                <a:latin typeface="Arial"/>
+                <a:ea typeface="Arial"/>
+              </a:rPr>
+              <a:t>. </a:t>
+            </a:r>
+            <a:r>
+              <a:rPr lang="en-US" altLang="ja-JP" b="1" dirty="0">
+                <a:solidFill>
+                  <a:srgbClr val="000F78"/>
+                </a:solidFill>
+                <a:latin typeface="Arial"/>
+                <a:ea typeface="Arial"/>
+              </a:rPr>
+              <a:t>OCXO</a:t>
+            </a:r>
+            <a:r>
+              <a:rPr lang="ja-JP" altLang="en-US" b="1" dirty="0">
+                <a:solidFill>
+                  <a:srgbClr val="000F78"/>
+                </a:solidFill>
+                <a:latin typeface="Arial"/>
+                <a:ea typeface="Arial"/>
+              </a:rPr>
+              <a:t>の同期制御</a:t>
+            </a:r>
+            <a:endParaRPr b="1" dirty="0">
+              <a:solidFill>
+                <a:srgbClr val="000F78"/>
+              </a:solidFill>
+              <a:latin typeface="Arial"/>
+              <a:ea typeface="Arial"/>
+            </a:endParaRPr>
+          </a:p>
+        </p:txBody>
+      </p:sp>
+      <p:sp>
+        <p:nvSpPr>
+          <p:cNvPr id="3" name="Text Placeholder 2"/>
+          <p:cNvSpPr>
+            <a:spLocks noGrp="1"/>
+          </p:cNvSpPr>
+          <p:nvPr>
+            <p:ph type="body" idx="1"/>
+          </p:nvPr>
+        </p:nvSpPr>
+        <p:spPr>
+          <a:xfrm>
+            <a:off x="274320" y="932688"/>
+            <a:ext cx="9326880" cy="1771875"/>
+          </a:xfrm>
+        </p:spPr>
+        <p:txBody>
+          <a:bodyPr wrap="square"/>
+          <a:lstStyle/>
+          <a:p>
+            <a:r>
+              <a:rPr b="1" dirty="0" err="1">
+                <a:solidFill>
+                  <a:srgbClr val="1B2A5A"/>
+                </a:solidFill>
+                <a:latin typeface="Arial"/>
+                <a:ea typeface="Arial"/>
+              </a:rPr>
+              <a:t>互いに無相関な雑音は平均で打ち消し合う。位相を揃えた複数OCXOの出力をフィードバックで実時間に同期・平均し</a:t>
+            </a:r>
+            <a:r>
+              <a:rPr lang="ja-JP" altLang="en-US" b="1" dirty="0">
+                <a:solidFill>
+                  <a:srgbClr val="1B2A5A"/>
+                </a:solidFill>
+              </a:rPr>
+              <a:t>、</a:t>
+            </a:r>
+            <a:r>
+              <a:rPr lang="en-US" altLang="ja-JP" b="1" dirty="0">
+                <a:solidFill>
+                  <a:srgbClr val="1B2A5A"/>
+                </a:solidFill>
+              </a:rPr>
+              <a:t>OXCO</a:t>
+            </a:r>
+            <a:r>
+              <a:rPr lang="ja-JP" altLang="en-US" b="1" dirty="0">
+                <a:solidFill>
+                  <a:srgbClr val="1B2A5A"/>
+                </a:solidFill>
+              </a:rPr>
+              <a:t>一台</a:t>
+            </a:r>
+            <a:r>
+              <a:rPr b="1" dirty="0" err="1">
+                <a:solidFill>
+                  <a:srgbClr val="1B2A5A"/>
+                </a:solidFill>
+                <a:latin typeface="Arial"/>
+                <a:ea typeface="Arial"/>
+              </a:rPr>
+              <a:t>を超える純度を実現する</a:t>
+            </a:r>
+            <a:r>
+              <a:rPr lang="ja-JP" altLang="en-US" b="1" dirty="0">
+                <a:solidFill>
+                  <a:srgbClr val="1B2A5A"/>
+                </a:solidFill>
+                <a:latin typeface="Arial"/>
+                <a:ea typeface="Arial"/>
+              </a:rPr>
+              <a:t>。</a:t>
+            </a:r>
+            <a:endParaRPr b="1" dirty="0">
+              <a:solidFill>
+                <a:srgbClr val="1B2A5A"/>
+              </a:solidFill>
+              <a:latin typeface="Arial"/>
+              <a:ea typeface="Arial"/>
+            </a:endParaRPr>
+          </a:p>
+          <a:p>
+            <a:pPr lvl="1"/>
+            <a:r>
+              <a:rPr lang="ja-JP" altLang="en-US" dirty="0">
+                <a:latin typeface="Arial"/>
+                <a:ea typeface="Arial"/>
+              </a:rPr>
+              <a:t>力学系における車両追従制御（</a:t>
+            </a:r>
+            <a:r>
+              <a:rPr lang="en-US" altLang="ja-JP" dirty="0">
+                <a:latin typeface="Arial"/>
+                <a:ea typeface="Arial"/>
+              </a:rPr>
+              <a:t>ACC</a:t>
+            </a:r>
+            <a:r>
+              <a:rPr lang="ja-JP" altLang="en-US" dirty="0">
+                <a:latin typeface="Arial"/>
+                <a:ea typeface="Arial"/>
+              </a:rPr>
+              <a:t>）を本実験における波動系に応用</a:t>
+            </a:r>
+            <a:endParaRPr dirty="0">
+              <a:latin typeface="Arial"/>
+              <a:ea typeface="Arial"/>
+            </a:endParaRPr>
+          </a:p>
+        </p:txBody>
+      </p:sp>
+      <p:pic>
+        <p:nvPicPr>
+          <p:cNvPr id="6" name="図 5" descr="The image illustrates a diagram showing various components of an automated control system, including vehicle distance, speed, oscillation, and control elements like OCXO-1 and OCXO-2, with a focus on phase difference and control voltage.&#10;&#10;AI 生成コンテンツは誤りを含む可能性があります。">
+            <a:extLst>
+              <a:ext uri="{FF2B5EF4-FFF2-40B4-BE49-F238E27FC236}">
+                <a16:creationId xmlns:a16="http://schemas.microsoft.com/office/drawing/2014/main" id="{1BA0518F-A2AD-4737-69B5-0D21DD844B3A}"/>
+              </a:ext>
+            </a:extLst>
+          </p:cNvPr>
+          <p:cNvPicPr>
+            <a:picLocks noChangeAspect="1"/>
+          </p:cNvPicPr>
+          <p:nvPr/>
+        </p:nvPicPr>
+        <p:blipFill>
+          <a:blip r:embed="rId2"/>
+          <a:stretch>
+            <a:fillRect/>
+          </a:stretch>
+        </p:blipFill>
+        <p:spPr>
+          <a:xfrm>
+            <a:off x="3150543" y="2529768"/>
+            <a:ext cx="6500949" cy="2590872"/>
+          </a:xfrm>
+          <a:prstGeom prst="rect">
+            <a:avLst/>
+          </a:prstGeom>
+        </p:spPr>
+      </p:pic>
+      <p:graphicFrame>
+        <p:nvGraphicFramePr>
+          <p:cNvPr id="7" name="オブジェクト 6">
+            <a:extLst>
+              <a:ext uri="{FF2B5EF4-FFF2-40B4-BE49-F238E27FC236}">
+                <a16:creationId xmlns:a16="http://schemas.microsoft.com/office/drawing/2014/main" id="{540B0B4D-43C3-BDDD-A8ED-67E17D674A8E}"/>
+              </a:ext>
+            </a:extLst>
+          </p:cNvPr>
+          <p:cNvGraphicFramePr>
+            <a:graphicFrameLocks noChangeAspect="1"/>
+          </p:cNvGraphicFramePr>
+          <p:nvPr>
+            <p:extLst>
+              <p:ext uri="{D42A27DB-BD31-4B8C-83A1-F6EECF244321}">
+                <p14:modId xmlns:p14="http://schemas.microsoft.com/office/powerpoint/2010/main" val="2802652254"/>
+              </p:ext>
+            </p:extLst>
+          </p:nvPr>
+        </p:nvGraphicFramePr>
+        <p:xfrm>
+          <a:off x="3371850" y="6332538"/>
+          <a:ext cx="2781300" cy="517525"/>
+        </p:xfrm>
+        <a:graphic>
+          <a:graphicData uri="http://schemas.openxmlformats.org/presentationml/2006/ole">
+            <mc:AlternateContent xmlns:mc="http://schemas.openxmlformats.org/markup-compatibility/2006">
+              <mc:Choice xmlns:v="urn:schemas-microsoft-com:vml" Requires="v">
+                <p:oleObj name="パッケージャー シェル オブジェクト" showAsIcon="1" r:id="rId3" imgW="2781229" imgH="517998" progId="Package">
+                  <p:embed/>
+                </p:oleObj>
+              </mc:Choice>
+              <mc:Fallback>
+                <p:oleObj name="パッケージャー シェル オブジェクト" showAsIcon="1" r:id="rId3" imgW="2781229" imgH="517998" progId="Package">
+                  <p:embed/>
+                  <p:pic>
+                    <p:nvPicPr>
+                      <p:cNvPr id="0" name=""/>
+                      <p:cNvPicPr/>
+                      <p:nvPr/>
+                    </p:nvPicPr>
+                    <p:blipFill>
+                      <a:blip r:embed="rId4"/>
+                      <a:stretch>
+                        <a:fillRect/>
+                      </a:stretch>
+                    </p:blipFill>
+                    <p:spPr>
+                      <a:xfrm>
+                        <a:off x="3371850" y="6332538"/>
+                        <a:ext cx="2781300" cy="517525"/>
+                      </a:xfrm>
+                      <a:prstGeom prst="rect">
+                        <a:avLst/>
+                      </a:prstGeom>
+                    </p:spPr>
+                  </p:pic>
+                </p:oleObj>
+              </mc:Fallback>
+            </mc:AlternateContent>
+          </a:graphicData>
+        </a:graphic>
+      </p:graphicFrame>
     </p:spTree>
   </p:cSld>
   <p:clrMapOvr>
